--- a/TEACHING/files/2019/1029/CS598AML_AmishGoel.pptx
+++ b/TEACHING/files/2019/1029/CS598AML_AmishGoel.pptx
@@ -6,28 +6,31 @@
   </p:sldMasterIdLst>
   <p:sldIdLst>
     <p:sldId id="256" r:id="rId2"/>
-    <p:sldId id="257" r:id="rId3"/>
+    <p:sldId id="260" r:id="rId3"/>
     <p:sldId id="258" r:id="rId4"/>
     <p:sldId id="259" r:id="rId5"/>
     <p:sldId id="269" r:id="rId6"/>
-    <p:sldId id="260" r:id="rId7"/>
+    <p:sldId id="257" r:id="rId7"/>
     <p:sldId id="261" r:id="rId8"/>
-    <p:sldId id="266" r:id="rId9"/>
-    <p:sldId id="267" r:id="rId10"/>
-    <p:sldId id="262" r:id="rId11"/>
-    <p:sldId id="263" r:id="rId12"/>
-    <p:sldId id="264" r:id="rId13"/>
-    <p:sldId id="265" r:id="rId14"/>
-    <p:sldId id="268" r:id="rId15"/>
-    <p:sldId id="272" r:id="rId16"/>
-    <p:sldId id="273" r:id="rId17"/>
-    <p:sldId id="274" r:id="rId18"/>
-    <p:sldId id="270" r:id="rId19"/>
-    <p:sldId id="275" r:id="rId20"/>
-    <p:sldId id="279" r:id="rId21"/>
-    <p:sldId id="280" r:id="rId22"/>
-    <p:sldId id="283" r:id="rId23"/>
-    <p:sldId id="282" r:id="rId24"/>
+    <p:sldId id="286" r:id="rId9"/>
+    <p:sldId id="285" r:id="rId10"/>
+    <p:sldId id="266" r:id="rId11"/>
+    <p:sldId id="284" r:id="rId12"/>
+    <p:sldId id="262" r:id="rId13"/>
+    <p:sldId id="263" r:id="rId14"/>
+    <p:sldId id="264" r:id="rId15"/>
+    <p:sldId id="265" r:id="rId16"/>
+    <p:sldId id="287" r:id="rId17"/>
+    <p:sldId id="268" r:id="rId18"/>
+    <p:sldId id="272" r:id="rId19"/>
+    <p:sldId id="273" r:id="rId20"/>
+    <p:sldId id="274" r:id="rId21"/>
+    <p:sldId id="270" r:id="rId22"/>
+    <p:sldId id="275" r:id="rId23"/>
+    <p:sldId id="279" r:id="rId24"/>
+    <p:sldId id="280" r:id="rId25"/>
+    <p:sldId id="283" r:id="rId26"/>
+    <p:sldId id="282" r:id="rId27"/>
   </p:sldIdLst>
   <p:sldSz cx="12192000" cy="6858000"/>
   <p:notesSz cx="6858000" cy="9144000"/>
@@ -293,7 +296,7 @@
           <a:p>
             <a:fld id="{BC7E31B9-159D-4EB3-B4D8-25E2B65BB27C}" type="datetimeFigureOut">
               <a:rPr lang="en-US" smtClean="0"/>
-              <a:t>10/28/2019</a:t>
+              <a:t>10/29/2019</a:t>
             </a:fld>
             <a:endParaRPr lang="en-US"/>
           </a:p>
@@ -491,7 +494,7 @@
           <a:p>
             <a:fld id="{BC7E31B9-159D-4EB3-B4D8-25E2B65BB27C}" type="datetimeFigureOut">
               <a:rPr lang="en-US" smtClean="0"/>
-              <a:t>10/28/2019</a:t>
+              <a:t>10/29/2019</a:t>
             </a:fld>
             <a:endParaRPr lang="en-US"/>
           </a:p>
@@ -699,7 +702,7 @@
           <a:p>
             <a:fld id="{BC7E31B9-159D-4EB3-B4D8-25E2B65BB27C}" type="datetimeFigureOut">
               <a:rPr lang="en-US" smtClean="0"/>
-              <a:t>10/28/2019</a:t>
+              <a:t>10/29/2019</a:t>
             </a:fld>
             <a:endParaRPr lang="en-US"/>
           </a:p>
@@ -897,7 +900,7 @@
           <a:p>
             <a:fld id="{BC7E31B9-159D-4EB3-B4D8-25E2B65BB27C}" type="datetimeFigureOut">
               <a:rPr lang="en-US" smtClean="0"/>
-              <a:t>10/28/2019</a:t>
+              <a:t>10/29/2019</a:t>
             </a:fld>
             <a:endParaRPr lang="en-US"/>
           </a:p>
@@ -1172,7 +1175,7 @@
           <a:p>
             <a:fld id="{BC7E31B9-159D-4EB3-B4D8-25E2B65BB27C}" type="datetimeFigureOut">
               <a:rPr lang="en-US" smtClean="0"/>
-              <a:t>10/28/2019</a:t>
+              <a:t>10/29/2019</a:t>
             </a:fld>
             <a:endParaRPr lang="en-US"/>
           </a:p>
@@ -1437,7 +1440,7 @@
           <a:p>
             <a:fld id="{BC7E31B9-159D-4EB3-B4D8-25E2B65BB27C}" type="datetimeFigureOut">
               <a:rPr lang="en-US" smtClean="0"/>
-              <a:t>10/28/2019</a:t>
+              <a:t>10/29/2019</a:t>
             </a:fld>
             <a:endParaRPr lang="en-US"/>
           </a:p>
@@ -1849,7 +1852,7 @@
           <a:p>
             <a:fld id="{BC7E31B9-159D-4EB3-B4D8-25E2B65BB27C}" type="datetimeFigureOut">
               <a:rPr lang="en-US" smtClean="0"/>
-              <a:t>10/28/2019</a:t>
+              <a:t>10/29/2019</a:t>
             </a:fld>
             <a:endParaRPr lang="en-US"/>
           </a:p>
@@ -1990,7 +1993,7 @@
           <a:p>
             <a:fld id="{BC7E31B9-159D-4EB3-B4D8-25E2B65BB27C}" type="datetimeFigureOut">
               <a:rPr lang="en-US" smtClean="0"/>
-              <a:t>10/28/2019</a:t>
+              <a:t>10/29/2019</a:t>
             </a:fld>
             <a:endParaRPr lang="en-US"/>
           </a:p>
@@ -2103,7 +2106,7 @@
           <a:p>
             <a:fld id="{BC7E31B9-159D-4EB3-B4D8-25E2B65BB27C}" type="datetimeFigureOut">
               <a:rPr lang="en-US" smtClean="0"/>
-              <a:t>10/28/2019</a:t>
+              <a:t>10/29/2019</a:t>
             </a:fld>
             <a:endParaRPr lang="en-US"/>
           </a:p>
@@ -2414,7 +2417,7 @@
           <a:p>
             <a:fld id="{BC7E31B9-159D-4EB3-B4D8-25E2B65BB27C}" type="datetimeFigureOut">
               <a:rPr lang="en-US" smtClean="0"/>
-              <a:t>10/28/2019</a:t>
+              <a:t>10/29/2019</a:t>
             </a:fld>
             <a:endParaRPr lang="en-US"/>
           </a:p>
@@ -2702,7 +2705,7 @@
           <a:p>
             <a:fld id="{BC7E31B9-159D-4EB3-B4D8-25E2B65BB27C}" type="datetimeFigureOut">
               <a:rPr lang="en-US" smtClean="0"/>
-              <a:t>10/28/2019</a:t>
+              <a:t>10/29/2019</a:t>
             </a:fld>
             <a:endParaRPr lang="en-US"/>
           </a:p>
@@ -2943,7 +2946,7 @@
           <a:p>
             <a:fld id="{BC7E31B9-159D-4EB3-B4D8-25E2B65BB27C}" type="datetimeFigureOut">
               <a:rPr lang="en-US" smtClean="0"/>
-              <a:t>10/28/2019</a:t>
+              <a:t>10/29/2019</a:t>
             </a:fld>
             <a:endParaRPr lang="en-US"/>
           </a:p>
@@ -3383,7 +3386,7 @@
           <a:p>
             <a:r>
               <a:rPr lang="en-US" dirty="0"/>
-              <a:t>Adversarial Attacks on Graph Structured Data</a:t>
+              <a:t>Adversarial Attacks for Graphical  Data</a:t>
             </a:r>
           </a:p>
         </p:txBody>
@@ -3423,7 +3426,7 @@
           <p:cNvPr id="2" name="Title 1">
             <a:extLst>
               <a:ext uri="{FF2B5EF4-FFF2-40B4-BE49-F238E27FC236}">
-                <a16:creationId xmlns:a16="http://schemas.microsoft.com/office/drawing/2014/main" id="{3B078ED8-20E6-4CC4-A58F-1859DD33ED7E}"/>
+                <a16:creationId xmlns:a16="http://schemas.microsoft.com/office/drawing/2014/main" id="{9CF001FE-7E83-4C14-8E4D-48CD81B58D68}"/>
               </a:ext>
             </a:extLst>
           </p:cNvPr>
@@ -3439,6 +3442,488 @@
           <a:bodyPr/>
           <a:lstStyle/>
           <a:p>
+            <a:r>
+              <a:rPr lang="en-US" dirty="0"/>
+              <a:t>Gradient based White Box attack (WBA) </a:t>
+            </a:r>
+          </a:p>
+        </p:txBody>
+      </p:sp>
+      <p:sp>
+        <p:nvSpPr>
+          <p:cNvPr id="3" name="Content Placeholder 2">
+            <a:extLst>
+              <a:ext uri="{FF2B5EF4-FFF2-40B4-BE49-F238E27FC236}">
+                <a16:creationId xmlns:a16="http://schemas.microsoft.com/office/drawing/2014/main" id="{4E9C06B9-04E2-40D3-8C24-F1816E771DD9}"/>
+              </a:ext>
+            </a:extLst>
+          </p:cNvPr>
+          <p:cNvSpPr>
+            <a:spLocks noGrp="1"/>
+          </p:cNvSpPr>
+          <p:nvPr>
+            <p:ph idx="1"/>
+          </p:nvPr>
+        </p:nvSpPr>
+        <p:spPr/>
+        <p:txBody>
+          <a:bodyPr/>
+          <a:lstStyle/>
+          <a:p>
+            <a:r>
+              <a:rPr lang="en-US" dirty="0"/>
+              <a:t>Compute the gradient of the classification loss with respect to the adjacency matrix A of the graph. </a:t>
+            </a:r>
+          </a:p>
+          <a:p>
+            <a:pPr marL="0" indent="0">
+              <a:buNone/>
+            </a:pPr>
+            <a:endParaRPr lang="en-US" dirty="0"/>
+          </a:p>
+          <a:p>
+            <a:endParaRPr lang="en-US" dirty="0"/>
+          </a:p>
+        </p:txBody>
+      </p:sp>
+      <p:pic>
+        <p:nvPicPr>
+          <p:cNvPr id="4" name="Picture 3">
+            <a:extLst>
+              <a:ext uri="{FF2B5EF4-FFF2-40B4-BE49-F238E27FC236}">
+                <a16:creationId xmlns:a16="http://schemas.microsoft.com/office/drawing/2014/main" id="{AEFA0C95-23D5-4A18-A8C3-8356AFF62EA9}"/>
+              </a:ext>
+            </a:extLst>
+          </p:cNvPr>
+          <p:cNvPicPr>
+            <a:picLocks noChangeAspect="1"/>
+          </p:cNvPicPr>
+          <p:nvPr/>
+        </p:nvPicPr>
+        <p:blipFill>
+          <a:blip r:embed="rId2"/>
+          <a:stretch>
+            <a:fillRect/>
+          </a:stretch>
+        </p:blipFill>
+        <p:spPr>
+          <a:xfrm>
+            <a:off x="2601084" y="2891093"/>
+            <a:ext cx="3063192" cy="972215"/>
+          </a:xfrm>
+          <a:prstGeom prst="rect">
+            <a:avLst/>
+          </a:prstGeom>
+        </p:spPr>
+      </p:pic>
+      <p:pic>
+        <p:nvPicPr>
+          <p:cNvPr id="6" name="Picture 5">
+            <a:extLst>
+              <a:ext uri="{FF2B5EF4-FFF2-40B4-BE49-F238E27FC236}">
+                <a16:creationId xmlns:a16="http://schemas.microsoft.com/office/drawing/2014/main" id="{FE433175-04EF-4B3A-8E92-FD460BA131B2}"/>
+              </a:ext>
+            </a:extLst>
+          </p:cNvPr>
+          <p:cNvPicPr>
+            <a:picLocks noChangeAspect="1"/>
+          </p:cNvPicPr>
+          <p:nvPr/>
+        </p:nvPicPr>
+        <p:blipFill>
+          <a:blip r:embed="rId3"/>
+          <a:stretch>
+            <a:fillRect/>
+          </a:stretch>
+        </p:blipFill>
+        <p:spPr>
+          <a:xfrm>
+            <a:off x="1329987" y="4888191"/>
+            <a:ext cx="4602310" cy="1077222"/>
+          </a:xfrm>
+          <a:prstGeom prst="rect">
+            <a:avLst/>
+          </a:prstGeom>
+        </p:spPr>
+      </p:pic>
+      <p:sp>
+        <p:nvSpPr>
+          <p:cNvPr id="8" name="TextBox 7">
+            <a:extLst>
+              <a:ext uri="{FF2B5EF4-FFF2-40B4-BE49-F238E27FC236}">
+                <a16:creationId xmlns:a16="http://schemas.microsoft.com/office/drawing/2014/main" id="{49C753B4-10DB-4FB2-A374-44DC4B95CA20}"/>
+              </a:ext>
+            </a:extLst>
+          </p:cNvPr>
+          <p:cNvSpPr txBox="1"/>
+          <p:nvPr/>
+        </p:nvSpPr>
+        <p:spPr>
+          <a:xfrm>
+            <a:off x="2176415" y="4383922"/>
+            <a:ext cx="3190104" cy="369332"/>
+          </a:xfrm>
+          <a:prstGeom prst="rect">
+            <a:avLst/>
+          </a:prstGeom>
+          <a:noFill/>
+        </p:spPr>
+        <p:txBody>
+          <a:bodyPr wrap="none" rtlCol="0">
+            <a:spAutoFit/>
+          </a:bodyPr>
+          <a:lstStyle/>
+          <a:p>
+            <a:r>
+              <a:rPr lang="en-US" dirty="0"/>
+              <a:t>Greedy Algorithm - </a:t>
+            </a:r>
+            <a:r>
+              <a:rPr lang="en-US" i="1" dirty="0" err="1"/>
+              <a:t>GradArgmax</a:t>
+            </a:r>
+            <a:endParaRPr lang="en-US" i="1" dirty="0"/>
+          </a:p>
+        </p:txBody>
+      </p:sp>
+      <p:grpSp>
+        <p:nvGrpSpPr>
+          <p:cNvPr id="15" name="Group 14">
+            <a:extLst>
+              <a:ext uri="{FF2B5EF4-FFF2-40B4-BE49-F238E27FC236}">
+                <a16:creationId xmlns:a16="http://schemas.microsoft.com/office/drawing/2014/main" id="{78F207D4-CFB8-44F6-9D82-ED478F8FD80C}"/>
+              </a:ext>
+            </a:extLst>
+          </p:cNvPr>
+          <p:cNvGrpSpPr/>
+          <p:nvPr/>
+        </p:nvGrpSpPr>
+        <p:grpSpPr>
+          <a:xfrm>
+            <a:off x="6527726" y="4383922"/>
+            <a:ext cx="3889473" cy="2354648"/>
+            <a:chOff x="6244341" y="4118725"/>
+            <a:chExt cx="3889473" cy="2354648"/>
+          </a:xfrm>
+        </p:grpSpPr>
+        <p:pic>
+          <p:nvPicPr>
+            <p:cNvPr id="12" name="Picture 11">
+              <a:extLst>
+                <a:ext uri="{FF2B5EF4-FFF2-40B4-BE49-F238E27FC236}">
+                  <a16:creationId xmlns:a16="http://schemas.microsoft.com/office/drawing/2014/main" id="{4D21CEB1-329D-4CF6-9304-FE0B42333EFA}"/>
+                </a:ext>
+              </a:extLst>
+            </p:cNvPr>
+            <p:cNvPicPr>
+              <a:picLocks noChangeAspect="1"/>
+            </p:cNvPicPr>
+            <p:nvPr/>
+          </p:nvPicPr>
+          <p:blipFill>
+            <a:blip r:embed="rId4"/>
+            <a:stretch>
+              <a:fillRect/>
+            </a:stretch>
+          </p:blipFill>
+          <p:spPr>
+            <a:xfrm>
+              <a:off x="6439606" y="4118725"/>
+              <a:ext cx="3138607" cy="2354648"/>
+            </a:xfrm>
+            <a:prstGeom prst="rect">
+              <a:avLst/>
+            </a:prstGeom>
+          </p:spPr>
+        </p:pic>
+        <p:sp>
+          <p:nvSpPr>
+            <p:cNvPr id="13" name="Rectangle 12">
+              <a:extLst>
+                <a:ext uri="{FF2B5EF4-FFF2-40B4-BE49-F238E27FC236}">
+                  <a16:creationId xmlns:a16="http://schemas.microsoft.com/office/drawing/2014/main" id="{7F05E5FE-7E6D-4618-809A-AD8BAAEA2721}"/>
+                </a:ext>
+              </a:extLst>
+            </p:cNvPr>
+            <p:cNvSpPr/>
+            <p:nvPr/>
+          </p:nvSpPr>
+          <p:spPr>
+            <a:xfrm>
+              <a:off x="6244341" y="5248920"/>
+              <a:ext cx="720673" cy="316720"/>
+            </a:xfrm>
+            <a:prstGeom prst="rect">
+              <a:avLst/>
+            </a:prstGeom>
+            <a:solidFill>
+              <a:schemeClr val="bg1"/>
+            </a:solidFill>
+            <a:ln>
+              <a:solidFill>
+                <a:schemeClr val="bg1"/>
+              </a:solidFill>
+            </a:ln>
+          </p:spPr>
+          <p:style>
+            <a:lnRef idx="2">
+              <a:schemeClr val="accent1">
+                <a:shade val="50000"/>
+              </a:schemeClr>
+            </a:lnRef>
+            <a:fillRef idx="1">
+              <a:schemeClr val="accent1"/>
+            </a:fillRef>
+            <a:effectRef idx="0">
+              <a:schemeClr val="accent1"/>
+            </a:effectRef>
+            <a:fontRef idx="minor">
+              <a:schemeClr val="lt1"/>
+            </a:fontRef>
+          </p:style>
+          <p:txBody>
+            <a:bodyPr rtlCol="0" anchor="ctr"/>
+            <a:lstStyle/>
+            <a:p>
+              <a:pPr algn="ctr"/>
+              <a:endParaRPr lang="en-US"/>
+            </a:p>
+          </p:txBody>
+        </p:sp>
+        <p:sp>
+          <p:nvSpPr>
+            <p:cNvPr id="14" name="Rectangle 13">
+              <a:extLst>
+                <a:ext uri="{FF2B5EF4-FFF2-40B4-BE49-F238E27FC236}">
+                  <a16:creationId xmlns:a16="http://schemas.microsoft.com/office/drawing/2014/main" id="{DCD9D89A-CDC6-463B-AC75-464FAA4BEDB0}"/>
+                </a:ext>
+              </a:extLst>
+            </p:cNvPr>
+            <p:cNvSpPr/>
+            <p:nvPr/>
+          </p:nvSpPr>
+          <p:spPr>
+            <a:xfrm>
+              <a:off x="9413141" y="4900740"/>
+              <a:ext cx="720673" cy="316720"/>
+            </a:xfrm>
+            <a:prstGeom prst="rect">
+              <a:avLst/>
+            </a:prstGeom>
+            <a:solidFill>
+              <a:schemeClr val="bg1"/>
+            </a:solidFill>
+            <a:ln>
+              <a:solidFill>
+                <a:schemeClr val="bg1"/>
+              </a:solidFill>
+            </a:ln>
+          </p:spPr>
+          <p:style>
+            <a:lnRef idx="2">
+              <a:schemeClr val="accent1">
+                <a:shade val="50000"/>
+              </a:schemeClr>
+            </a:lnRef>
+            <a:fillRef idx="1">
+              <a:schemeClr val="accent1"/>
+            </a:fillRef>
+            <a:effectRef idx="0">
+              <a:schemeClr val="accent1"/>
+            </a:effectRef>
+            <a:fontRef idx="minor">
+              <a:schemeClr val="lt1"/>
+            </a:fontRef>
+          </p:style>
+          <p:txBody>
+            <a:bodyPr rtlCol="0" anchor="ctr"/>
+            <a:lstStyle/>
+            <a:p>
+              <a:pPr algn="ctr"/>
+              <a:endParaRPr lang="en-US"/>
+            </a:p>
+          </p:txBody>
+        </p:sp>
+      </p:grpSp>
+      <p:sp>
+        <p:nvSpPr>
+          <p:cNvPr id="16" name="TextBox 15">
+            <a:extLst>
+              <a:ext uri="{FF2B5EF4-FFF2-40B4-BE49-F238E27FC236}">
+                <a16:creationId xmlns:a16="http://schemas.microsoft.com/office/drawing/2014/main" id="{87C05353-5EFD-4AF1-8269-41A090562BE0}"/>
+              </a:ext>
+            </a:extLst>
+          </p:cNvPr>
+          <p:cNvSpPr txBox="1"/>
+          <p:nvPr/>
+        </p:nvSpPr>
+        <p:spPr>
+          <a:xfrm>
+            <a:off x="6686230" y="3960302"/>
+            <a:ext cx="3514566" cy="461665"/>
+          </a:xfrm>
+          <a:prstGeom prst="rect">
+            <a:avLst/>
+          </a:prstGeom>
+          <a:noFill/>
+        </p:spPr>
+        <p:txBody>
+          <a:bodyPr wrap="square" rtlCol="0">
+            <a:spAutoFit/>
+          </a:bodyPr>
+          <a:lstStyle/>
+          <a:p>
+            <a:pPr algn="ctr"/>
+            <a:r>
+              <a:rPr lang="en-US" sz="2400" dirty="0">
+                <a:solidFill>
+                  <a:srgbClr val="C00000"/>
+                </a:solidFill>
+              </a:rPr>
+              <a:t>Gradients not reliable</a:t>
+            </a:r>
+          </a:p>
+        </p:txBody>
+      </p:sp>
+    </p:spTree>
+    <p:extLst>
+      <p:ext uri="{BB962C8B-B14F-4D97-AF65-F5344CB8AC3E}">
+        <p14:creationId xmlns:p14="http://schemas.microsoft.com/office/powerpoint/2010/main" val="911574183"/>
+      </p:ext>
+    </p:extLst>
+  </p:cSld>
+  <p:clrMapOvr>
+    <a:masterClrMapping/>
+  </p:clrMapOvr>
+</p:sld>
+</file>
+
+<file path=ppt/slides/slide11.xml><?xml version="1.0" encoding="utf-8"?>
+<p:sld xmlns:a="http://schemas.openxmlformats.org/drawingml/2006/main" xmlns:r="http://schemas.openxmlformats.org/officeDocument/2006/relationships" xmlns:p="http://schemas.openxmlformats.org/presentationml/2006/main">
+  <p:cSld>
+    <p:spTree>
+      <p:nvGrpSpPr>
+        <p:cNvPr id="1" name=""/>
+        <p:cNvGrpSpPr/>
+        <p:nvPr/>
+      </p:nvGrpSpPr>
+      <p:grpSpPr>
+        <a:xfrm>
+          <a:off x="0" y="0"/>
+          <a:ext cx="0" cy="0"/>
+          <a:chOff x="0" y="0"/>
+          <a:chExt cx="0" cy="0"/>
+        </a:xfrm>
+      </p:grpSpPr>
+      <p:sp>
+        <p:nvSpPr>
+          <p:cNvPr id="2" name="Title 1">
+            <a:extLst>
+              <a:ext uri="{FF2B5EF4-FFF2-40B4-BE49-F238E27FC236}">
+                <a16:creationId xmlns:a16="http://schemas.microsoft.com/office/drawing/2014/main" id="{4226F266-0208-4453-A3F0-73810FC97DCB}"/>
+              </a:ext>
+            </a:extLst>
+          </p:cNvPr>
+          <p:cNvSpPr>
+            <a:spLocks noGrp="1"/>
+          </p:cNvSpPr>
+          <p:nvPr>
+            <p:ph type="title"/>
+          </p:nvPr>
+        </p:nvSpPr>
+        <p:spPr/>
+        <p:txBody>
+          <a:bodyPr/>
+          <a:lstStyle/>
+          <a:p>
+            <a:r>
+              <a:rPr lang="en-US" dirty="0"/>
+              <a:t>Genetic Algorithms- Black box attack</a:t>
+            </a:r>
+          </a:p>
+        </p:txBody>
+      </p:sp>
+      <p:pic>
+        <p:nvPicPr>
+          <p:cNvPr id="4" name="Picture 3">
+            <a:extLst>
+              <a:ext uri="{FF2B5EF4-FFF2-40B4-BE49-F238E27FC236}">
+                <a16:creationId xmlns:a16="http://schemas.microsoft.com/office/drawing/2014/main" id="{65991146-DCC9-422A-9410-8B9A5E68D2BF}"/>
+              </a:ext>
+            </a:extLst>
+          </p:cNvPr>
+          <p:cNvPicPr>
+            <a:picLocks noChangeAspect="1"/>
+          </p:cNvPicPr>
+          <p:nvPr/>
+        </p:nvPicPr>
+        <p:blipFill>
+          <a:blip r:embed="rId2"/>
+          <a:stretch>
+            <a:fillRect/>
+          </a:stretch>
+        </p:blipFill>
+        <p:spPr>
+          <a:xfrm>
+            <a:off x="2376457" y="1833454"/>
+            <a:ext cx="5802059" cy="4365564"/>
+          </a:xfrm>
+          <a:prstGeom prst="rect">
+            <a:avLst/>
+          </a:prstGeom>
+        </p:spPr>
+      </p:pic>
+    </p:spTree>
+    <p:extLst>
+      <p:ext uri="{BB962C8B-B14F-4D97-AF65-F5344CB8AC3E}">
+        <p14:creationId xmlns:p14="http://schemas.microsoft.com/office/powerpoint/2010/main" val="223271797"/>
+      </p:ext>
+    </p:extLst>
+  </p:cSld>
+  <p:clrMapOvr>
+    <a:masterClrMapping/>
+  </p:clrMapOvr>
+</p:sld>
+</file>
+
+<file path=ppt/slides/slide12.xml><?xml version="1.0" encoding="utf-8"?>
+<p:sld xmlns:a="http://schemas.openxmlformats.org/drawingml/2006/main" xmlns:r="http://schemas.openxmlformats.org/officeDocument/2006/relationships" xmlns:p="http://schemas.openxmlformats.org/presentationml/2006/main">
+  <p:cSld>
+    <p:spTree>
+      <p:nvGrpSpPr>
+        <p:cNvPr id="1" name=""/>
+        <p:cNvGrpSpPr/>
+        <p:nvPr/>
+      </p:nvGrpSpPr>
+      <p:grpSpPr>
+        <a:xfrm>
+          <a:off x="0" y="0"/>
+          <a:ext cx="0" cy="0"/>
+          <a:chOff x="0" y="0"/>
+          <a:chExt cx="0" cy="0"/>
+        </a:xfrm>
+      </p:grpSpPr>
+      <p:sp>
+        <p:nvSpPr>
+          <p:cNvPr id="2" name="Title 1">
+            <a:extLst>
+              <a:ext uri="{FF2B5EF4-FFF2-40B4-BE49-F238E27FC236}">
+                <a16:creationId xmlns:a16="http://schemas.microsoft.com/office/drawing/2014/main" id="{3B078ED8-20E6-4CC4-A58F-1859DD33ED7E}"/>
+              </a:ext>
+            </a:extLst>
+          </p:cNvPr>
+          <p:cNvSpPr>
+            <a:spLocks noGrp="1"/>
+          </p:cNvSpPr>
+          <p:nvPr>
+            <p:ph type="title"/>
+          </p:nvPr>
+        </p:nvSpPr>
+        <p:spPr/>
+        <p:txBody>
+          <a:bodyPr/>
+          <a:lstStyle/>
+          <a:p>
             <a:pPr algn="ctr"/>
             <a:r>
               <a:rPr lang="en-US" dirty="0"/>
@@ -3447,8 +3932,8 @@
           </a:p>
         </p:txBody>
       </p:sp>
-      <mc:AlternateContent xmlns:mc="http://schemas.openxmlformats.org/markup-compatibility/2006" xmlns:a14="http://schemas.microsoft.com/office/drawing/2010/main">
-        <mc:Choice Requires="a14">
+      <mc:AlternateContent xmlns:mc="http://schemas.openxmlformats.org/markup-compatibility/2006">
+        <mc:Choice xmlns:a14="http://schemas.microsoft.com/office/drawing/2010/main" Requires="a14">
           <p:sp>
             <p:nvSpPr>
               <p:cNvPr id="3" name="Content Placeholder 2">
@@ -3654,7 +4139,7 @@
                 </a14:m>
                 <a:r>
                   <a:rPr lang="en-US" dirty="0"/>
-                  <a:t> after taking </a:t>
+                  <a:t> before taking </a:t>
                 </a:r>
                 <a14:m>
                   <m:oMath xmlns:m="http://schemas.openxmlformats.org/officeDocument/2006/math">
@@ -3774,7 +4259,7 @@
             </p:txBody>
           </p:sp>
         </mc:Choice>
-        <mc:Fallback xmlns="">
+        <mc:Fallback>
           <p:sp>
             <p:nvSpPr>
               <p:cNvPr id="3" name="Content Placeholder 2">
@@ -3891,7 +4376,7 @@
 </p:sld>
 </file>
 
-<file path=ppt/slides/slide11.xml><?xml version="1.0" encoding="utf-8"?>
+<file path=ppt/slides/slide13.xml><?xml version="1.0" encoding="utf-8"?>
 <p:sld xmlns:a="http://schemas.openxmlformats.org/drawingml/2006/main" xmlns:r="http://schemas.openxmlformats.org/officeDocument/2006/relationships" xmlns:p="http://schemas.openxmlformats.org/presentationml/2006/main">
   <p:cSld>
     <p:spTree>
@@ -4105,7 +4590,7 @@
 </p:sld>
 </file>
 
-<file path=ppt/slides/slide12.xml><?xml version="1.0" encoding="utf-8"?>
+<file path=ppt/slides/slide14.xml><?xml version="1.0" encoding="utf-8"?>
 <p:sld xmlns:a="http://schemas.openxmlformats.org/drawingml/2006/main" xmlns:r="http://schemas.openxmlformats.org/officeDocument/2006/relationships" xmlns:p="http://schemas.openxmlformats.org/presentationml/2006/main">
   <p:cSld>
     <p:spTree>
@@ -4256,7 +4741,7 @@
 </p:sld>
 </file>
 
-<file path=ppt/slides/slide13.xml><?xml version="1.0" encoding="utf-8"?>
+<file path=ppt/slides/slide15.xml><?xml version="1.0" encoding="utf-8"?>
 <p:sld xmlns:a="http://schemas.openxmlformats.org/drawingml/2006/main" xmlns:r="http://schemas.openxmlformats.org/officeDocument/2006/relationships" xmlns:p="http://schemas.openxmlformats.org/presentationml/2006/main">
   <p:cSld>
     <p:spTree>
@@ -4562,7 +5047,95 @@
 </p:sld>
 </file>
 
-<file path=ppt/slides/slide14.xml><?xml version="1.0" encoding="utf-8"?>
+<file path=ppt/slides/slide16.xml><?xml version="1.0" encoding="utf-8"?>
+<p:sld xmlns:a="http://schemas.openxmlformats.org/drawingml/2006/main" xmlns:r="http://schemas.openxmlformats.org/officeDocument/2006/relationships" xmlns:p="http://schemas.openxmlformats.org/presentationml/2006/main">
+  <p:cSld>
+    <p:spTree>
+      <p:nvGrpSpPr>
+        <p:cNvPr id="1" name=""/>
+        <p:cNvGrpSpPr/>
+        <p:nvPr/>
+      </p:nvGrpSpPr>
+      <p:grpSpPr>
+        <a:xfrm>
+          <a:off x="0" y="0"/>
+          <a:ext cx="0" cy="0"/>
+          <a:chOff x="0" y="0"/>
+          <a:chExt cx="0" cy="0"/>
+        </a:xfrm>
+      </p:grpSpPr>
+      <p:sp>
+        <p:nvSpPr>
+          <p:cNvPr id="2" name="Title 1">
+            <a:extLst>
+              <a:ext uri="{FF2B5EF4-FFF2-40B4-BE49-F238E27FC236}">
+                <a16:creationId xmlns:a16="http://schemas.microsoft.com/office/drawing/2014/main" id="{30462E04-DA6E-4EF3-BD2F-A65CC67419D5}"/>
+              </a:ext>
+            </a:extLst>
+          </p:cNvPr>
+          <p:cNvSpPr>
+            <a:spLocks noGrp="1"/>
+          </p:cNvSpPr>
+          <p:nvPr>
+            <p:ph type="title"/>
+          </p:nvPr>
+        </p:nvSpPr>
+        <p:spPr/>
+        <p:txBody>
+          <a:bodyPr/>
+          <a:lstStyle/>
+          <a:p>
+            <a:r>
+              <a:rPr lang="en-US" dirty="0"/>
+              <a:t>Visualization of Adversarial Graphs</a:t>
+            </a:r>
+          </a:p>
+        </p:txBody>
+      </p:sp>
+      <p:pic>
+        <p:nvPicPr>
+          <p:cNvPr id="4" name="Picture 3">
+            <a:extLst>
+              <a:ext uri="{FF2B5EF4-FFF2-40B4-BE49-F238E27FC236}">
+                <a16:creationId xmlns:a16="http://schemas.microsoft.com/office/drawing/2014/main" id="{C30A12D6-E19E-4BCD-8E9E-4CD29BB2FB3B}"/>
+              </a:ext>
+            </a:extLst>
+          </p:cNvPr>
+          <p:cNvPicPr>
+            <a:picLocks noChangeAspect="1"/>
+          </p:cNvPicPr>
+          <p:nvPr/>
+        </p:nvPicPr>
+        <p:blipFill>
+          <a:blip r:embed="rId2"/>
+          <a:stretch>
+            <a:fillRect/>
+          </a:stretch>
+        </p:blipFill>
+        <p:spPr>
+          <a:xfrm>
+            <a:off x="939942" y="2348880"/>
+            <a:ext cx="9808089" cy="2640428"/>
+          </a:xfrm>
+          <a:prstGeom prst="rect">
+            <a:avLst/>
+          </a:prstGeom>
+        </p:spPr>
+      </p:pic>
+    </p:spTree>
+    <p:extLst>
+      <p:ext uri="{BB962C8B-B14F-4D97-AF65-F5344CB8AC3E}">
+        <p14:creationId xmlns:p14="http://schemas.microsoft.com/office/powerpoint/2010/main" val="3743821056"/>
+      </p:ext>
+    </p:extLst>
+  </p:cSld>
+  <p:clrMapOvr>
+    <a:masterClrMapping/>
+  </p:clrMapOvr>
+</p:sld>
+</file>
+
+<file path=ppt/slides/slide17.xml><?xml version="1.0" encoding="utf-8"?>
 <p:sld xmlns:a="http://schemas.openxmlformats.org/drawingml/2006/main" xmlns:r="http://schemas.openxmlformats.org/officeDocument/2006/relationships" xmlns:p="http://schemas.openxmlformats.org/presentationml/2006/main">
   <p:cSld>
     <p:spTree>
@@ -4922,7 +5495,7 @@
 </p:sld>
 </file>
 
-<file path=ppt/slides/slide15.xml><?xml version="1.0" encoding="utf-8"?>
+<file path=ppt/slides/slide18.xml><?xml version="1.0" encoding="utf-8"?>
 <p:sld xmlns:a="http://schemas.openxmlformats.org/drawingml/2006/main" xmlns:r="http://schemas.openxmlformats.org/officeDocument/2006/relationships" xmlns:p="http://schemas.openxmlformats.org/presentationml/2006/main">
   <p:cSld>
     <p:spTree>
@@ -4982,7 +5555,7 @@
 </p:sld>
 </file>
 
-<file path=ppt/slides/slide16.xml><?xml version="1.0" encoding="utf-8"?>
+<file path=ppt/slides/slide19.xml><?xml version="1.0" encoding="utf-8"?>
 <p:sld xmlns:a="http://schemas.openxmlformats.org/drawingml/2006/main" xmlns:r="http://schemas.openxmlformats.org/officeDocument/2006/relationships" xmlns:p="http://schemas.openxmlformats.org/presentationml/2006/main">
   <p:cSld>
     <p:spTree>
@@ -5673,3351 +6246,7 @@
 </p:sld>
 </file>
 
-<file path=ppt/slides/slide17.xml><?xml version="1.0" encoding="utf-8"?>
-<p:sld xmlns:a="http://schemas.openxmlformats.org/drawingml/2006/main" xmlns:r="http://schemas.openxmlformats.org/officeDocument/2006/relationships" xmlns:p="http://schemas.openxmlformats.org/presentationml/2006/main">
-  <p:cSld>
-    <p:spTree>
-      <p:nvGrpSpPr>
-        <p:cNvPr id="1" name=""/>
-        <p:cNvGrpSpPr/>
-        <p:nvPr/>
-      </p:nvGrpSpPr>
-      <p:grpSpPr>
-        <a:xfrm>
-          <a:off x="0" y="0"/>
-          <a:ext cx="0" cy="0"/>
-          <a:chOff x="0" y="0"/>
-          <a:chExt cx="0" cy="0"/>
-        </a:xfrm>
-      </p:grpSpPr>
-      <p:sp>
-        <p:nvSpPr>
-          <p:cNvPr id="2" name="Title 1">
-            <a:extLst>
-              <a:ext uri="{FF2B5EF4-FFF2-40B4-BE49-F238E27FC236}">
-                <a16:creationId xmlns:a16="http://schemas.microsoft.com/office/drawing/2014/main" id="{24D6261E-C9C4-4F27-8FE7-01FCDEA944CC}"/>
-              </a:ext>
-            </a:extLst>
-          </p:cNvPr>
-          <p:cNvSpPr>
-            <a:spLocks noGrp="1"/>
-          </p:cNvSpPr>
-          <p:nvPr>
-            <p:ph type="title"/>
-          </p:nvPr>
-        </p:nvSpPr>
-        <p:spPr/>
-        <p:txBody>
-          <a:bodyPr/>
-          <a:lstStyle/>
-          <a:p>
-            <a:r>
-              <a:rPr lang="en-US" dirty="0"/>
-              <a:t>Data poisoning attack</a:t>
-            </a:r>
-          </a:p>
-        </p:txBody>
-      </p:sp>
-      <mc:AlternateContent xmlns:mc="http://schemas.openxmlformats.org/markup-compatibility/2006">
-        <mc:Choice xmlns:a14="http://schemas.microsoft.com/office/drawing/2010/main" Requires="a14">
-          <p:sp>
-            <p:nvSpPr>
-              <p:cNvPr id="3" name="Content Placeholder 2">
-                <a:extLst>
-                  <a:ext uri="{FF2B5EF4-FFF2-40B4-BE49-F238E27FC236}">
-                    <a16:creationId xmlns:a16="http://schemas.microsoft.com/office/drawing/2014/main" id="{3D804293-6EB7-4096-88EB-ECD309FFD342}"/>
-                  </a:ext>
-                </a:extLst>
-              </p:cNvPr>
-              <p:cNvSpPr>
-                <a:spLocks noGrp="1"/>
-              </p:cNvSpPr>
-              <p:nvPr>
-                <p:ph idx="1"/>
-              </p:nvPr>
-            </p:nvSpPr>
-            <p:spPr>
-              <a:xfrm>
-                <a:off x="838200" y="1512080"/>
-                <a:ext cx="10515600" cy="4664883"/>
-              </a:xfrm>
-            </p:spPr>
-            <p:txBody>
-              <a:bodyPr/>
-              <a:lstStyle/>
-              <a:p>
-                <a:pPr marL="0" indent="0">
-                  <a:buNone/>
-                </a:pPr>
-                <a:r>
-                  <a:rPr lang="en-US" dirty="0"/>
-                  <a:t>Aim: Misclassify target node </a:t>
-                </a:r>
-                <a14:m>
-                  <m:oMath xmlns:m="http://schemas.openxmlformats.org/officeDocument/2006/math">
-                    <m:sSub>
-                      <m:sSubPr>
-                        <m:ctrlPr>
-                          <a:rPr lang="en-US" b="0" i="1" smtClean="0">
-                            <a:latin typeface="Cambria Math" panose="02040503050406030204" pitchFamily="18" charset="0"/>
-                          </a:rPr>
-                        </m:ctrlPr>
-                      </m:sSubPr>
-                      <m:e>
-                        <m:r>
-                          <a:rPr lang="en-US" b="0" i="1" smtClean="0">
-                            <a:latin typeface="Cambria Math" panose="02040503050406030204" pitchFamily="18" charset="0"/>
-                          </a:rPr>
-                          <m:t>𝑣</m:t>
-                        </m:r>
-                      </m:e>
-                      <m:sub>
-                        <m:r>
-                          <a:rPr lang="en-US" b="0" i="1" smtClean="0">
-                            <a:latin typeface="Cambria Math" panose="02040503050406030204" pitchFamily="18" charset="0"/>
-                          </a:rPr>
-                          <m:t>𝑜</m:t>
-                        </m:r>
-                      </m:sub>
-                    </m:sSub>
-                  </m:oMath>
-                </a14:m>
-                <a:r>
-                  <a:rPr lang="en-US" b="0" dirty="0"/>
-                  <a:t>, </a:t>
-                </a:r>
-                <a:r>
-                  <a:rPr lang="en-US" dirty="0"/>
-                  <a:t>Attacker has access to nodes in </a:t>
-                </a:r>
-                <a:r>
-                  <a:rPr lang="en-US" dirty="0">
-                    <a:latin typeface="Cambria Math" panose="02040503050406030204" pitchFamily="18" charset="0"/>
-                    <a:ea typeface="Cambria Math" panose="02040503050406030204" pitchFamily="18" charset="0"/>
-                  </a:rPr>
-                  <a:t>𝒜. </a:t>
-                </a:r>
-              </a:p>
-              <a:p>
-                <a:pPr marL="0" indent="0">
-                  <a:buNone/>
-                </a:pPr>
-                <a:endParaRPr lang="en-US" dirty="0"/>
-              </a:p>
-            </p:txBody>
-          </p:sp>
-        </mc:Choice>
-        <mc:Fallback>
-          <p:sp>
-            <p:nvSpPr>
-              <p:cNvPr id="3" name="Content Placeholder 2">
-                <a:extLst>
-                  <a:ext uri="{FF2B5EF4-FFF2-40B4-BE49-F238E27FC236}">
-                    <a16:creationId xmlns:a16="http://schemas.microsoft.com/office/drawing/2014/main" id="{3D804293-6EB7-4096-88EB-ECD309FFD342}"/>
-                  </a:ext>
-                </a:extLst>
-              </p:cNvPr>
-              <p:cNvSpPr>
-                <a:spLocks noGrp="1" noRot="1" noChangeAspect="1" noMove="1" noResize="1" noEditPoints="1" noAdjustHandles="1" noChangeArrowheads="1" noChangeShapeType="1" noTextEdit="1"/>
-              </p:cNvSpPr>
-              <p:nvPr>
-                <p:ph idx="1"/>
-              </p:nvPr>
-            </p:nvSpPr>
-            <p:spPr>
-              <a:xfrm>
-                <a:off x="838200" y="1512080"/>
-                <a:ext cx="10515600" cy="4664883"/>
-              </a:xfrm>
-              <a:blipFill>
-                <a:blip r:embed="rId2"/>
-                <a:stretch>
-                  <a:fillRect l="-1217" t="-2484"/>
-                </a:stretch>
-              </a:blipFill>
-            </p:spPr>
-            <p:txBody>
-              <a:bodyPr/>
-              <a:lstStyle/>
-              <a:p>
-                <a:r>
-                  <a:rPr lang="en-US">
-                    <a:noFill/>
-                  </a:rPr>
-                  <a:t> </a:t>
-                </a:r>
-              </a:p>
-            </p:txBody>
-          </p:sp>
-        </mc:Fallback>
-      </mc:AlternateContent>
-      <p:grpSp>
-        <p:nvGrpSpPr>
-          <p:cNvPr id="24" name="Group 23">
-            <a:extLst>
-              <a:ext uri="{FF2B5EF4-FFF2-40B4-BE49-F238E27FC236}">
-                <a16:creationId xmlns:a16="http://schemas.microsoft.com/office/drawing/2014/main" id="{B7A8EC7B-A6A5-4887-A774-7052D71E3808}"/>
-              </a:ext>
-            </a:extLst>
-          </p:cNvPr>
-          <p:cNvGrpSpPr/>
-          <p:nvPr/>
-        </p:nvGrpSpPr>
-        <p:grpSpPr>
-          <a:xfrm>
-            <a:off x="1991686" y="4640313"/>
-            <a:ext cx="3022751" cy="1867001"/>
-            <a:chOff x="2163319" y="2890318"/>
-            <a:chExt cx="3022751" cy="1867001"/>
-          </a:xfrm>
-        </p:grpSpPr>
-        <mc:AlternateContent xmlns:mc="http://schemas.openxmlformats.org/markup-compatibility/2006" xmlns:a14="http://schemas.microsoft.com/office/drawing/2010/main">
-          <mc:Choice Requires="a14">
-            <p:sp>
-              <p:nvSpPr>
-                <p:cNvPr id="6" name="TextBox 5">
-                  <a:extLst>
-                    <a:ext uri="{FF2B5EF4-FFF2-40B4-BE49-F238E27FC236}">
-                      <a16:creationId xmlns:a16="http://schemas.microsoft.com/office/drawing/2014/main" id="{F89C3B1A-5B77-499A-8119-E810464E9869}"/>
-                    </a:ext>
-                  </a:extLst>
-                </p:cNvPr>
-                <p:cNvSpPr txBox="1"/>
-                <p:nvPr/>
-              </p:nvSpPr>
-              <p:spPr>
-                <a:xfrm>
-                  <a:off x="2163319" y="2890318"/>
-                  <a:ext cx="3022751" cy="830997"/>
-                </a:xfrm>
-                <a:prstGeom prst="rect">
-                  <a:avLst/>
-                </a:prstGeom>
-                <a:noFill/>
-              </p:spPr>
-              <p:txBody>
-                <a:bodyPr wrap="none" rtlCol="0">
-                  <a:spAutoFit/>
-                </a:bodyPr>
-                <a:lstStyle/>
-                <a:p>
-                  <a:r>
-                    <a:rPr lang="en-US" sz="2400" b="0" dirty="0"/>
-                    <a:t>Direct Attack : </a:t>
-                  </a:r>
-                  <a14:m>
-                    <m:oMath xmlns:m="http://schemas.openxmlformats.org/officeDocument/2006/math">
-                      <m:sSub>
-                        <m:sSubPr>
-                          <m:ctrlPr>
-                            <a:rPr lang="en-US" sz="2400" b="0" i="1" smtClean="0">
-                              <a:latin typeface="Cambria Math" panose="02040503050406030204" pitchFamily="18" charset="0"/>
-                            </a:rPr>
-                          </m:ctrlPr>
-                        </m:sSubPr>
-                        <m:e>
-                          <m:r>
-                            <a:rPr lang="en-US" sz="2400" b="0" i="1" smtClean="0">
-                              <a:latin typeface="Cambria Math" panose="02040503050406030204" pitchFamily="18" charset="0"/>
-                            </a:rPr>
-                            <m:t>𝑣</m:t>
-                          </m:r>
-                        </m:e>
-                        <m:sub>
-                          <m:r>
-                            <a:rPr lang="en-US" sz="2400" b="0" i="1" smtClean="0">
-                              <a:latin typeface="Cambria Math" panose="02040503050406030204" pitchFamily="18" charset="0"/>
-                            </a:rPr>
-                            <m:t>𝑜</m:t>
-                          </m:r>
-                        </m:sub>
-                      </m:sSub>
-                      <m:r>
-                        <a:rPr lang="en-US" sz="2400" b="0" i="1" smtClean="0">
-                          <a:latin typeface="Cambria Math" panose="02040503050406030204" pitchFamily="18" charset="0"/>
-                        </a:rPr>
-                        <m:t>∈</m:t>
-                      </m:r>
-                      <m:r>
-                        <a:rPr lang="en-US" sz="2400" b="0" i="1" smtClean="0">
-                          <a:latin typeface="Cambria Math" panose="02040503050406030204" pitchFamily="18" charset="0"/>
-                          <a:ea typeface="Cambria Math" panose="02040503050406030204" pitchFamily="18" charset="0"/>
-                        </a:rPr>
-                        <m:t>𝒜</m:t>
-                      </m:r>
-                    </m:oMath>
-                  </a14:m>
-                  <a:r>
-                    <a:rPr lang="en-US" sz="2400" dirty="0">
-                      <a:latin typeface="Cambria Math" panose="02040503050406030204" pitchFamily="18" charset="0"/>
-                      <a:ea typeface="Cambria Math" panose="02040503050406030204" pitchFamily="18" charset="0"/>
-                    </a:rPr>
-                    <a:t> </a:t>
-                  </a:r>
-                </a:p>
-                <a:p>
-                  <a:endParaRPr lang="en-US" sz="2400" dirty="0"/>
-                </a:p>
-              </p:txBody>
-            </p:sp>
-          </mc:Choice>
-          <mc:Fallback xmlns="">
-            <p:sp>
-              <p:nvSpPr>
-                <p:cNvPr id="6" name="TextBox 5">
-                  <a:extLst>
-                    <a:ext uri="{FF2B5EF4-FFF2-40B4-BE49-F238E27FC236}">
-                      <a16:creationId xmlns:a16="http://schemas.microsoft.com/office/drawing/2014/main" id="{F89C3B1A-5B77-499A-8119-E810464E9869}"/>
-                    </a:ext>
-                  </a:extLst>
-                </p:cNvPr>
-                <p:cNvSpPr txBox="1">
-                  <a:spLocks noRot="1" noChangeAspect="1" noMove="1" noResize="1" noEditPoints="1" noAdjustHandles="1" noChangeArrowheads="1" noChangeShapeType="1" noTextEdit="1"/>
-                </p:cNvSpPr>
-                <p:nvPr/>
-              </p:nvSpPr>
-              <p:spPr>
-                <a:xfrm>
-                  <a:off x="2163319" y="2890318"/>
-                  <a:ext cx="3022751" cy="830997"/>
-                </a:xfrm>
-                <a:prstGeom prst="rect">
-                  <a:avLst/>
-                </a:prstGeom>
-                <a:blipFill>
-                  <a:blip r:embed="rId3"/>
-                  <a:stretch>
-                    <a:fillRect l="-3024" t="-5882"/>
-                  </a:stretch>
-                </a:blipFill>
-              </p:spPr>
-              <p:txBody>
-                <a:bodyPr/>
-                <a:lstStyle/>
-                <a:p>
-                  <a:r>
-                    <a:rPr lang="en-US">
-                      <a:noFill/>
-                    </a:rPr>
-                    <a:t> </a:t>
-                  </a:r>
-                </a:p>
-              </p:txBody>
-            </p:sp>
-          </mc:Fallback>
-        </mc:AlternateContent>
-        <p:pic>
-          <p:nvPicPr>
-            <p:cNvPr id="10" name="Picture 9">
-              <a:extLst>
-                <a:ext uri="{FF2B5EF4-FFF2-40B4-BE49-F238E27FC236}">
-                  <a16:creationId xmlns:a16="http://schemas.microsoft.com/office/drawing/2014/main" id="{A38CC1F2-D49E-4B81-99D7-8CF26811E8BB}"/>
-                </a:ext>
-              </a:extLst>
-            </p:cNvPr>
-            <p:cNvPicPr>
-              <a:picLocks noChangeAspect="1"/>
-            </p:cNvPicPr>
-            <p:nvPr/>
-          </p:nvPicPr>
-          <p:blipFill>
-            <a:blip r:embed="rId4"/>
-            <a:stretch>
-              <a:fillRect/>
-            </a:stretch>
-          </p:blipFill>
-          <p:spPr>
-            <a:xfrm>
-              <a:off x="2689482" y="3305816"/>
-              <a:ext cx="1529800" cy="1451503"/>
-            </a:xfrm>
-            <a:prstGeom prst="rect">
-              <a:avLst/>
-            </a:prstGeom>
-          </p:spPr>
-        </p:pic>
-      </p:grpSp>
-      <p:grpSp>
-        <p:nvGrpSpPr>
-          <p:cNvPr id="25" name="Group 24">
-            <a:extLst>
-              <a:ext uri="{FF2B5EF4-FFF2-40B4-BE49-F238E27FC236}">
-                <a16:creationId xmlns:a16="http://schemas.microsoft.com/office/drawing/2014/main" id="{01376043-9112-4185-8C8B-A90023E4ECF2}"/>
-              </a:ext>
-            </a:extLst>
-          </p:cNvPr>
-          <p:cNvGrpSpPr/>
-          <p:nvPr/>
-        </p:nvGrpSpPr>
-        <p:grpSpPr>
-          <a:xfrm>
-            <a:off x="6920729" y="4651649"/>
-            <a:ext cx="3549177" cy="1776290"/>
-            <a:chOff x="6513429" y="2868859"/>
-            <a:chExt cx="3549177" cy="1776290"/>
-          </a:xfrm>
-        </p:grpSpPr>
-        <mc:AlternateContent xmlns:mc="http://schemas.openxmlformats.org/markup-compatibility/2006" xmlns:a14="http://schemas.microsoft.com/office/drawing/2010/main">
-          <mc:Choice Requires="a14">
-            <p:sp>
-              <p:nvSpPr>
-                <p:cNvPr id="7" name="TextBox 6">
-                  <a:extLst>
-                    <a:ext uri="{FF2B5EF4-FFF2-40B4-BE49-F238E27FC236}">
-                      <a16:creationId xmlns:a16="http://schemas.microsoft.com/office/drawing/2014/main" id="{1D772390-8635-4569-AA4E-7C0E32C1C904}"/>
-                    </a:ext>
-                  </a:extLst>
-                </p:cNvPr>
-                <p:cNvSpPr txBox="1"/>
-                <p:nvPr/>
-              </p:nvSpPr>
-              <p:spPr>
-                <a:xfrm>
-                  <a:off x="6513429" y="2868859"/>
-                  <a:ext cx="3549177" cy="830997"/>
-                </a:xfrm>
-                <a:prstGeom prst="rect">
-                  <a:avLst/>
-                </a:prstGeom>
-                <a:noFill/>
-              </p:spPr>
-              <p:txBody>
-                <a:bodyPr wrap="none" rtlCol="0">
-                  <a:spAutoFit/>
-                </a:bodyPr>
-                <a:lstStyle/>
-                <a:p>
-                  <a:r>
-                    <a:rPr lang="en-US" sz="2400" dirty="0"/>
-                    <a:t>Influencer</a:t>
-                  </a:r>
-                  <a:r>
-                    <a:rPr lang="en-US" sz="2400" b="0" dirty="0"/>
-                    <a:t> Attack : </a:t>
-                  </a:r>
-                  <a14:m>
-                    <m:oMath xmlns:m="http://schemas.openxmlformats.org/officeDocument/2006/math">
-                      <m:sSub>
-                        <m:sSubPr>
-                          <m:ctrlPr>
-                            <a:rPr lang="en-US" sz="2400" b="0" i="1" smtClean="0">
-                              <a:latin typeface="Cambria Math" panose="02040503050406030204" pitchFamily="18" charset="0"/>
-                            </a:rPr>
-                          </m:ctrlPr>
-                        </m:sSubPr>
-                        <m:e>
-                          <m:r>
-                            <a:rPr lang="en-US" sz="2400" b="0" i="1" smtClean="0">
-                              <a:latin typeface="Cambria Math" panose="02040503050406030204" pitchFamily="18" charset="0"/>
-                            </a:rPr>
-                            <m:t>𝑣</m:t>
-                          </m:r>
-                        </m:e>
-                        <m:sub>
-                          <m:r>
-                            <a:rPr lang="en-US" sz="2400" b="0" i="1" smtClean="0">
-                              <a:latin typeface="Cambria Math" panose="02040503050406030204" pitchFamily="18" charset="0"/>
-                            </a:rPr>
-                            <m:t>𝑜</m:t>
-                          </m:r>
-                        </m:sub>
-                      </m:sSub>
-                      <m:r>
-                        <a:rPr lang="en-US" sz="2400" b="0" i="1" smtClean="0">
-                          <a:latin typeface="Cambria Math" panose="02040503050406030204" pitchFamily="18" charset="0"/>
-                        </a:rPr>
-                        <m:t>∉</m:t>
-                      </m:r>
-                      <m:r>
-                        <a:rPr lang="en-US" sz="2400" b="0" i="1" smtClean="0">
-                          <a:latin typeface="Cambria Math" panose="02040503050406030204" pitchFamily="18" charset="0"/>
-                          <a:ea typeface="Cambria Math" panose="02040503050406030204" pitchFamily="18" charset="0"/>
-                        </a:rPr>
-                        <m:t>𝒜</m:t>
-                      </m:r>
-                    </m:oMath>
-                  </a14:m>
-                  <a:r>
-                    <a:rPr lang="en-US" sz="2400" dirty="0">
-                      <a:latin typeface="Cambria Math" panose="02040503050406030204" pitchFamily="18" charset="0"/>
-                      <a:ea typeface="Cambria Math" panose="02040503050406030204" pitchFamily="18" charset="0"/>
-                    </a:rPr>
-                    <a:t> </a:t>
-                  </a:r>
-                </a:p>
-                <a:p>
-                  <a:endParaRPr lang="en-US" sz="2400" dirty="0"/>
-                </a:p>
-              </p:txBody>
-            </p:sp>
-          </mc:Choice>
-          <mc:Fallback xmlns="">
-            <p:sp>
-              <p:nvSpPr>
-                <p:cNvPr id="7" name="TextBox 6">
-                  <a:extLst>
-                    <a:ext uri="{FF2B5EF4-FFF2-40B4-BE49-F238E27FC236}">
-                      <a16:creationId xmlns:a16="http://schemas.microsoft.com/office/drawing/2014/main" id="{1D772390-8635-4569-AA4E-7C0E32C1C904}"/>
-                    </a:ext>
-                  </a:extLst>
-                </p:cNvPr>
-                <p:cNvSpPr txBox="1">
-                  <a:spLocks noRot="1" noChangeAspect="1" noMove="1" noResize="1" noEditPoints="1" noAdjustHandles="1" noChangeArrowheads="1" noChangeShapeType="1" noTextEdit="1"/>
-                </p:cNvSpPr>
-                <p:nvPr/>
-              </p:nvSpPr>
-              <p:spPr>
-                <a:xfrm>
-                  <a:off x="6513429" y="2868859"/>
-                  <a:ext cx="3549177" cy="830997"/>
-                </a:xfrm>
-                <a:prstGeom prst="rect">
-                  <a:avLst/>
-                </a:prstGeom>
-                <a:blipFill>
-                  <a:blip r:embed="rId5"/>
-                  <a:stretch>
-                    <a:fillRect l="-2749" t="-5882"/>
-                  </a:stretch>
-                </a:blipFill>
-              </p:spPr>
-              <p:txBody>
-                <a:bodyPr/>
-                <a:lstStyle/>
-                <a:p>
-                  <a:r>
-                    <a:rPr lang="en-US">
-                      <a:noFill/>
-                    </a:rPr>
-                    <a:t> </a:t>
-                  </a:r>
-                </a:p>
-              </p:txBody>
-            </p:sp>
-          </mc:Fallback>
-        </mc:AlternateContent>
-        <p:pic>
-          <p:nvPicPr>
-            <p:cNvPr id="11" name="Picture 10">
-              <a:extLst>
-                <a:ext uri="{FF2B5EF4-FFF2-40B4-BE49-F238E27FC236}">
-                  <a16:creationId xmlns:a16="http://schemas.microsoft.com/office/drawing/2014/main" id="{74A059F4-95BE-4476-9F73-C4852B6FEACA}"/>
-                </a:ext>
-              </a:extLst>
-            </p:cNvPr>
-            <p:cNvPicPr>
-              <a:picLocks noChangeAspect="1"/>
-            </p:cNvPicPr>
-            <p:nvPr/>
-          </p:nvPicPr>
-          <p:blipFill>
-            <a:blip r:embed="rId6"/>
-            <a:stretch>
-              <a:fillRect/>
-            </a:stretch>
-          </p:blipFill>
-          <p:spPr>
-            <a:xfrm>
-              <a:off x="7345266" y="3329399"/>
-              <a:ext cx="1674591" cy="1315750"/>
-            </a:xfrm>
-            <a:prstGeom prst="rect">
-              <a:avLst/>
-            </a:prstGeom>
-          </p:spPr>
-        </p:pic>
-      </p:grpSp>
-      <p:grpSp>
-        <p:nvGrpSpPr>
-          <p:cNvPr id="23" name="Group 22">
-            <a:extLst>
-              <a:ext uri="{FF2B5EF4-FFF2-40B4-BE49-F238E27FC236}">
-                <a16:creationId xmlns:a16="http://schemas.microsoft.com/office/drawing/2014/main" id="{E5FBBAEB-0C0E-4BFB-912D-16ABE8B2F8FE}"/>
-              </a:ext>
-            </a:extLst>
-          </p:cNvPr>
-          <p:cNvGrpSpPr/>
-          <p:nvPr/>
-        </p:nvGrpSpPr>
-        <p:grpSpPr>
-          <a:xfrm>
-            <a:off x="793449" y="2418865"/>
-            <a:ext cx="10272952" cy="1835142"/>
-            <a:chOff x="342261" y="4757319"/>
-            <a:chExt cx="10272952" cy="1835142"/>
-          </a:xfrm>
-        </p:grpSpPr>
-        <p:grpSp>
-          <p:nvGrpSpPr>
-            <p:cNvPr id="12" name="Group 11">
-              <a:extLst>
-                <a:ext uri="{FF2B5EF4-FFF2-40B4-BE49-F238E27FC236}">
-                  <a16:creationId xmlns:a16="http://schemas.microsoft.com/office/drawing/2014/main" id="{13023630-2FA8-4ADD-BF82-51F7B8B4C024}"/>
-                </a:ext>
-              </a:extLst>
-            </p:cNvPr>
-            <p:cNvGrpSpPr/>
-            <p:nvPr/>
-          </p:nvGrpSpPr>
-          <p:grpSpPr>
-            <a:xfrm>
-              <a:off x="6072161" y="4793505"/>
-              <a:ext cx="4343941" cy="1218119"/>
-              <a:chOff x="838200" y="4263366"/>
-              <a:chExt cx="4343941" cy="1218119"/>
-            </a:xfrm>
-          </p:grpSpPr>
-          <p:pic>
-            <p:nvPicPr>
-              <p:cNvPr id="8" name="Picture 7">
-                <a:extLst>
-                  <a:ext uri="{FF2B5EF4-FFF2-40B4-BE49-F238E27FC236}">
-                    <a16:creationId xmlns:a16="http://schemas.microsoft.com/office/drawing/2014/main" id="{19165CC7-B423-449F-AAFB-284947FB3C5B}"/>
-                  </a:ext>
-                </a:extLst>
-              </p:cNvPr>
-              <p:cNvPicPr>
-                <a:picLocks noChangeAspect="1"/>
-              </p:cNvPicPr>
-              <p:nvPr/>
-            </p:nvPicPr>
-            <p:blipFill>
-              <a:blip r:embed="rId7"/>
-              <a:stretch>
-                <a:fillRect/>
-              </a:stretch>
-            </p:blipFill>
-            <p:spPr>
-              <a:xfrm>
-                <a:off x="838200" y="4802614"/>
-                <a:ext cx="4343941" cy="678871"/>
-              </a:xfrm>
-              <a:prstGeom prst="rect">
-                <a:avLst/>
-              </a:prstGeom>
-            </p:spPr>
-          </p:pic>
-          <p:sp>
-            <p:nvSpPr>
-              <p:cNvPr id="9" name="TextBox 8">
-                <a:extLst>
-                  <a:ext uri="{FF2B5EF4-FFF2-40B4-BE49-F238E27FC236}">
-                    <a16:creationId xmlns:a16="http://schemas.microsoft.com/office/drawing/2014/main" id="{07744033-BE64-4FCE-93A4-BC3FE7DF4A10}"/>
-                  </a:ext>
-                </a:extLst>
-              </p:cNvPr>
-              <p:cNvSpPr txBox="1"/>
-              <p:nvPr/>
-            </p:nvSpPr>
-            <p:spPr>
-              <a:xfrm>
-                <a:off x="1104776" y="4263366"/>
-                <a:ext cx="3810787" cy="830997"/>
-              </a:xfrm>
-              <a:prstGeom prst="rect">
-                <a:avLst/>
-              </a:prstGeom>
-              <a:noFill/>
-            </p:spPr>
-            <p:txBody>
-              <a:bodyPr wrap="none" rtlCol="0">
-                <a:spAutoFit/>
-              </a:bodyPr>
-              <a:lstStyle/>
-              <a:p>
-                <a:pPr algn="ctr"/>
-                <a:r>
-                  <a:rPr lang="en-US" sz="2400" dirty="0">
-                    <a:latin typeface="Cambria Math" panose="02040503050406030204" pitchFamily="18" charset="0"/>
-                    <a:ea typeface="Cambria Math" panose="02040503050406030204" pitchFamily="18" charset="0"/>
-                  </a:rPr>
-                  <a:t>Unnoticeable perturbations</a:t>
-                </a:r>
-              </a:p>
-              <a:p>
-                <a:endParaRPr lang="en-US" sz="2400" dirty="0"/>
-              </a:p>
-            </p:txBody>
-          </p:sp>
-        </p:grpSp>
-        <p:pic>
-          <p:nvPicPr>
-            <p:cNvPr id="13" name="Picture 12">
-              <a:extLst>
-                <a:ext uri="{FF2B5EF4-FFF2-40B4-BE49-F238E27FC236}">
-                  <a16:creationId xmlns:a16="http://schemas.microsoft.com/office/drawing/2014/main" id="{E0080F1C-48E2-48CE-A9B7-026C476BF184}"/>
-                </a:ext>
-              </a:extLst>
-            </p:cNvPr>
-            <p:cNvPicPr>
-              <a:picLocks noChangeAspect="1"/>
-            </p:cNvPicPr>
-            <p:nvPr/>
-          </p:nvPicPr>
-          <p:blipFill>
-            <a:blip r:embed="rId8"/>
-            <a:stretch>
-              <a:fillRect/>
-            </a:stretch>
-          </p:blipFill>
-          <p:spPr>
-            <a:xfrm>
-              <a:off x="511528" y="5346604"/>
-              <a:ext cx="5441813" cy="1146271"/>
-            </a:xfrm>
-            <a:prstGeom prst="rect">
-              <a:avLst/>
-            </a:prstGeom>
-          </p:spPr>
-        </p:pic>
-        <p:sp>
-          <p:nvSpPr>
-            <p:cNvPr id="14" name="TextBox 13">
-              <a:extLst>
-                <a:ext uri="{FF2B5EF4-FFF2-40B4-BE49-F238E27FC236}">
-                  <a16:creationId xmlns:a16="http://schemas.microsoft.com/office/drawing/2014/main" id="{6FFB8C42-79FB-437D-A875-91CA337978A1}"/>
-                </a:ext>
-              </a:extLst>
-            </p:cNvPr>
-            <p:cNvSpPr txBox="1"/>
-            <p:nvPr/>
-          </p:nvSpPr>
-          <p:spPr>
-            <a:xfrm>
-              <a:off x="1775625" y="4796168"/>
-              <a:ext cx="2958439" cy="830997"/>
-            </a:xfrm>
-            <a:prstGeom prst="rect">
-              <a:avLst/>
-            </a:prstGeom>
-            <a:noFill/>
-          </p:spPr>
-          <p:txBody>
-            <a:bodyPr wrap="none" rtlCol="0">
-              <a:spAutoFit/>
-            </a:bodyPr>
-            <a:lstStyle/>
-            <a:p>
-              <a:r>
-                <a:rPr lang="en-US" sz="2400" dirty="0">
-                  <a:latin typeface="Cambria Math" panose="02040503050406030204" pitchFamily="18" charset="0"/>
-                  <a:ea typeface="Cambria Math" panose="02040503050406030204" pitchFamily="18" charset="0"/>
-                </a:rPr>
-                <a:t>Bi-level Optimization</a:t>
-              </a:r>
-            </a:p>
-            <a:p>
-              <a:endParaRPr lang="en-US" sz="2400" dirty="0"/>
-            </a:p>
-          </p:txBody>
-        </p:sp>
-        <p:cxnSp>
-          <p:nvCxnSpPr>
-            <p:cNvPr id="18" name="Straight Arrow Connector 17">
-              <a:extLst>
-                <a:ext uri="{FF2B5EF4-FFF2-40B4-BE49-F238E27FC236}">
-                  <a16:creationId xmlns:a16="http://schemas.microsoft.com/office/drawing/2014/main" id="{3D9EB3BC-2EAE-43F7-A57C-2E9DC50BFF2F}"/>
-                </a:ext>
-              </a:extLst>
-            </p:cNvPr>
-            <p:cNvCxnSpPr>
-              <a:cxnSpLocks/>
-            </p:cNvCxnSpPr>
-            <p:nvPr/>
-          </p:nvCxnSpPr>
-          <p:spPr>
-            <a:xfrm flipV="1">
-              <a:off x="2700762" y="5726495"/>
-              <a:ext cx="3208063" cy="105677"/>
-            </a:xfrm>
-            <a:prstGeom prst="straightConnector1">
-              <a:avLst/>
-            </a:prstGeom>
-            <a:ln w="38100">
-              <a:tailEnd type="triangle"/>
-            </a:ln>
-          </p:spPr>
-          <p:style>
-            <a:lnRef idx="1">
-              <a:schemeClr val="accent1"/>
-            </a:lnRef>
-            <a:fillRef idx="0">
-              <a:schemeClr val="accent1"/>
-            </a:fillRef>
-            <a:effectRef idx="0">
-              <a:schemeClr val="accent1"/>
-            </a:effectRef>
-            <a:fontRef idx="minor">
-              <a:schemeClr val="tx1"/>
-            </a:fontRef>
-          </p:style>
-        </p:cxnSp>
-        <p:sp>
-          <p:nvSpPr>
-            <p:cNvPr id="20" name="Oval 19">
-              <a:extLst>
-                <a:ext uri="{FF2B5EF4-FFF2-40B4-BE49-F238E27FC236}">
-                  <a16:creationId xmlns:a16="http://schemas.microsoft.com/office/drawing/2014/main" id="{C270AF17-231A-4792-8B44-E843A6E06140}"/>
-                </a:ext>
-              </a:extLst>
-            </p:cNvPr>
-            <p:cNvSpPr/>
-            <p:nvPr/>
-          </p:nvSpPr>
-          <p:spPr>
-            <a:xfrm>
-              <a:off x="2094436" y="5666014"/>
-              <a:ext cx="475079" cy="280140"/>
-            </a:xfrm>
-            <a:prstGeom prst="ellipse">
-              <a:avLst/>
-            </a:prstGeom>
-            <a:noFill/>
-          </p:spPr>
-          <p:style>
-            <a:lnRef idx="2">
-              <a:schemeClr val="accent1">
-                <a:shade val="50000"/>
-              </a:schemeClr>
-            </a:lnRef>
-            <a:fillRef idx="1">
-              <a:schemeClr val="accent1"/>
-            </a:fillRef>
-            <a:effectRef idx="0">
-              <a:schemeClr val="accent1"/>
-            </a:effectRef>
-            <a:fontRef idx="minor">
-              <a:schemeClr val="lt1"/>
-            </a:fontRef>
-          </p:style>
-          <p:txBody>
-            <a:bodyPr rtlCol="0" anchor="ctr"/>
-            <a:lstStyle/>
-            <a:p>
-              <a:pPr algn="ctr"/>
-              <a:endParaRPr lang="en-US"/>
-            </a:p>
-          </p:txBody>
-        </p:sp>
-        <p:sp>
-          <p:nvSpPr>
-            <p:cNvPr id="21" name="Rectangle: Rounded Corners 20">
-              <a:extLst>
-                <a:ext uri="{FF2B5EF4-FFF2-40B4-BE49-F238E27FC236}">
-                  <a16:creationId xmlns:a16="http://schemas.microsoft.com/office/drawing/2014/main" id="{AEF28FC0-B44D-40B8-B687-B01B4D17B97B}"/>
-                </a:ext>
-              </a:extLst>
-            </p:cNvPr>
-            <p:cNvSpPr/>
-            <p:nvPr/>
-          </p:nvSpPr>
-          <p:spPr>
-            <a:xfrm>
-              <a:off x="342261" y="4757319"/>
-              <a:ext cx="10272952" cy="1835142"/>
-            </a:xfrm>
-            <a:prstGeom prst="roundRect">
-              <a:avLst/>
-            </a:prstGeom>
-            <a:noFill/>
-            <a:ln w="28575">
-              <a:solidFill>
-                <a:srgbClr val="C00000"/>
-              </a:solidFill>
-            </a:ln>
-          </p:spPr>
-          <p:style>
-            <a:lnRef idx="2">
-              <a:schemeClr val="accent1">
-                <a:shade val="50000"/>
-              </a:schemeClr>
-            </a:lnRef>
-            <a:fillRef idx="1">
-              <a:schemeClr val="accent1"/>
-            </a:fillRef>
-            <a:effectRef idx="0">
-              <a:schemeClr val="accent1"/>
-            </a:effectRef>
-            <a:fontRef idx="minor">
-              <a:schemeClr val="lt1"/>
-            </a:fontRef>
-          </p:style>
-          <p:txBody>
-            <a:bodyPr rtlCol="0" anchor="ctr"/>
-            <a:lstStyle/>
-            <a:p>
-              <a:pPr algn="ctr"/>
-              <a:endParaRPr lang="en-US"/>
-            </a:p>
-          </p:txBody>
-        </p:sp>
-      </p:grpSp>
-    </p:spTree>
-    <p:extLst>
-      <p:ext uri="{BB962C8B-B14F-4D97-AF65-F5344CB8AC3E}">
-        <p14:creationId xmlns:p14="http://schemas.microsoft.com/office/powerpoint/2010/main" val="1946024651"/>
-      </p:ext>
-    </p:extLst>
-  </p:cSld>
-  <p:clrMapOvr>
-    <a:masterClrMapping/>
-  </p:clrMapOvr>
-</p:sld>
-</file>
-
-<file path=ppt/slides/slide18.xml><?xml version="1.0" encoding="utf-8"?>
-<p:sld xmlns:a="http://schemas.openxmlformats.org/drawingml/2006/main" xmlns:r="http://schemas.openxmlformats.org/officeDocument/2006/relationships" xmlns:p="http://schemas.openxmlformats.org/presentationml/2006/main">
-  <p:cSld>
-    <p:spTree>
-      <p:nvGrpSpPr>
-        <p:cNvPr id="1" name=""/>
-        <p:cNvGrpSpPr/>
-        <p:nvPr/>
-      </p:nvGrpSpPr>
-      <p:grpSpPr>
-        <a:xfrm>
-          <a:off x="0" y="0"/>
-          <a:ext cx="0" cy="0"/>
-          <a:chOff x="0" y="0"/>
-          <a:chExt cx="0" cy="0"/>
-        </a:xfrm>
-      </p:grpSpPr>
-      <p:sp>
-        <p:nvSpPr>
-          <p:cNvPr id="2" name="Title 1">
-            <a:extLst>
-              <a:ext uri="{FF2B5EF4-FFF2-40B4-BE49-F238E27FC236}">
-                <a16:creationId xmlns:a16="http://schemas.microsoft.com/office/drawing/2014/main" id="{0D7ABF33-DAFA-4C10-900B-DDD4372E3F91}"/>
-              </a:ext>
-            </a:extLst>
-          </p:cNvPr>
-          <p:cNvSpPr>
-            <a:spLocks noGrp="1"/>
-          </p:cNvSpPr>
-          <p:nvPr>
-            <p:ph type="title"/>
-          </p:nvPr>
-        </p:nvSpPr>
-        <p:spPr/>
-        <p:txBody>
-          <a:bodyPr/>
-          <a:lstStyle/>
-          <a:p>
-            <a:r>
-              <a:rPr lang="en-US" dirty="0"/>
-              <a:t>Other constraints for unnoticeability</a:t>
-            </a:r>
-          </a:p>
-        </p:txBody>
-      </p:sp>
-      <mc:AlternateContent xmlns:mc="http://schemas.openxmlformats.org/markup-compatibility/2006" xmlns:a14="http://schemas.microsoft.com/office/drawing/2010/main">
-        <mc:Choice Requires="a14">
-          <p:sp>
-            <p:nvSpPr>
-              <p:cNvPr id="5" name="Content Placeholder 4">
-                <a:extLst>
-                  <a:ext uri="{FF2B5EF4-FFF2-40B4-BE49-F238E27FC236}">
-                    <a16:creationId xmlns:a16="http://schemas.microsoft.com/office/drawing/2014/main" id="{2972E615-8B9C-4FCF-B30B-C3F6D7ED842B}"/>
-                  </a:ext>
-                </a:extLst>
-              </p:cNvPr>
-              <p:cNvSpPr>
-                <a:spLocks noGrp="1"/>
-              </p:cNvSpPr>
-              <p:nvPr>
-                <p:ph idx="1"/>
-              </p:nvPr>
-            </p:nvSpPr>
-            <p:spPr/>
-            <p:txBody>
-              <a:bodyPr/>
-              <a:lstStyle/>
-              <a:p>
-                <a:r>
-                  <a:rPr lang="en-US" dirty="0"/>
-                  <a:t>Graph structure preserving</a:t>
-                </a:r>
-              </a:p>
-              <a:p>
-                <a:pPr lvl="1"/>
-                <a:r>
-                  <a:rPr lang="en-US" dirty="0"/>
-                  <a:t>Check if the degree distributions of the original graph and the perturbed graph are significantly different using likelihood ratio tests. </a:t>
-                </a:r>
-              </a:p>
-              <a:p>
-                <a:pPr lvl="1"/>
-                <a:r>
-                  <a:rPr lang="en-US" dirty="0"/>
-                  <a:t>Degree distribution can be found empirically, or using a fit from Power-law distribution family. </a:t>
-                </a:r>
-              </a:p>
-              <a:p>
-                <a:r>
-                  <a:rPr lang="en-US" dirty="0"/>
-                  <a:t>Feature statistics preserving</a:t>
-                </a:r>
-              </a:p>
-              <a:p>
-                <a:pPr lvl="1"/>
-                <a:r>
-                  <a:rPr lang="en-US" dirty="0"/>
-                  <a:t>Construct a feature co-occurrence graph </a:t>
-                </a:r>
-                <a14:m>
-                  <m:oMath xmlns:m="http://schemas.openxmlformats.org/officeDocument/2006/math">
-                    <m:r>
-                      <a:rPr lang="en-US" b="0" i="1" smtClean="0">
-                        <a:latin typeface="Cambria Math" panose="02040503050406030204" pitchFamily="18" charset="0"/>
-                      </a:rPr>
-                      <m:t>𝐶</m:t>
-                    </m:r>
-                    <m:r>
-                      <a:rPr lang="en-US" b="0" i="1" smtClean="0">
-                        <a:latin typeface="Cambria Math" panose="02040503050406030204" pitchFamily="18" charset="0"/>
-                      </a:rPr>
-                      <m:t>=</m:t>
-                    </m:r>
-                    <m:d>
-                      <m:dPr>
-                        <m:ctrlPr>
-                          <a:rPr lang="en-US" b="0" i="1" smtClean="0">
-                            <a:latin typeface="Cambria Math" panose="02040503050406030204" pitchFamily="18" charset="0"/>
-                            <a:ea typeface="Cambria Math" panose="02040503050406030204" pitchFamily="18" charset="0"/>
-                          </a:rPr>
-                        </m:ctrlPr>
-                      </m:dPr>
-                      <m:e>
-                        <m:r>
-                          <a:rPr lang="en-US" b="0" i="1" smtClean="0">
-                            <a:latin typeface="Cambria Math" panose="02040503050406030204" pitchFamily="18" charset="0"/>
-                            <a:ea typeface="Cambria Math" panose="02040503050406030204" pitchFamily="18" charset="0"/>
-                          </a:rPr>
-                          <m:t>𝓕</m:t>
-                        </m:r>
-                        <m:r>
-                          <a:rPr lang="en-US" b="0" i="1" smtClean="0">
-                            <a:latin typeface="Cambria Math" panose="02040503050406030204" pitchFamily="18" charset="0"/>
-                            <a:ea typeface="Cambria Math" panose="02040503050406030204" pitchFamily="18" charset="0"/>
-                          </a:rPr>
-                          <m:t>, </m:t>
-                        </m:r>
-                        <m:r>
-                          <a:rPr lang="en-US" b="0" i="1" smtClean="0">
-                            <a:latin typeface="Cambria Math" panose="02040503050406030204" pitchFamily="18" charset="0"/>
-                            <a:ea typeface="Cambria Math" panose="02040503050406030204" pitchFamily="18" charset="0"/>
-                          </a:rPr>
-                          <m:t>𝐸</m:t>
-                        </m:r>
-                      </m:e>
-                    </m:d>
-                  </m:oMath>
-                </a14:m>
-                <a:r>
-                  <a:rPr lang="en-US" dirty="0"/>
-                  <a:t>, where </a:t>
-                </a:r>
-                <a14:m>
-                  <m:oMath xmlns:m="http://schemas.openxmlformats.org/officeDocument/2006/math">
-                    <m:r>
-                      <a:rPr lang="en-US" b="0" i="1" smtClean="0">
-                        <a:latin typeface="Cambria Math" panose="02040503050406030204" pitchFamily="18" charset="0"/>
-                      </a:rPr>
-                      <m:t>𝐸</m:t>
-                    </m:r>
-                  </m:oMath>
-                </a14:m>
-                <a:r>
-                  <a:rPr lang="en-US" dirty="0"/>
-                  <a:t> denotes features which have co-</a:t>
-                </a:r>
-                <a:r>
-                  <a:rPr lang="en-US" dirty="0" err="1"/>
-                  <a:t>occured</a:t>
-                </a:r>
-                <a:r>
-                  <a:rPr lang="en-US" dirty="0"/>
-                  <a:t> together in </a:t>
-                </a:r>
-                <a14:m>
-                  <m:oMath xmlns:m="http://schemas.openxmlformats.org/officeDocument/2006/math">
-                    <m:sSub>
-                      <m:sSubPr>
-                        <m:ctrlPr>
-                          <a:rPr lang="en-US" b="0" i="1" smtClean="0">
-                            <a:latin typeface="Cambria Math" panose="02040503050406030204" pitchFamily="18" charset="0"/>
-                          </a:rPr>
-                        </m:ctrlPr>
-                      </m:sSubPr>
-                      <m:e>
-                        <m:r>
-                          <a:rPr lang="en-US" b="0" i="1" smtClean="0">
-                            <a:latin typeface="Cambria Math" panose="02040503050406030204" pitchFamily="18" charset="0"/>
-                          </a:rPr>
-                          <m:t>𝐺</m:t>
-                        </m:r>
-                      </m:e>
-                      <m:sub>
-                        <m:r>
-                          <a:rPr lang="en-US" b="0" i="1" smtClean="0">
-                            <a:latin typeface="Cambria Math" panose="02040503050406030204" pitchFamily="18" charset="0"/>
-                          </a:rPr>
-                          <m:t>0</m:t>
-                        </m:r>
-                      </m:sub>
-                    </m:sSub>
-                  </m:oMath>
-                </a14:m>
-                <a:endParaRPr lang="en-US" dirty="0"/>
-              </a:p>
-              <a:p>
-                <a:pPr lvl="1"/>
-                <a:r>
-                  <a:rPr lang="en-US" dirty="0"/>
-                  <a:t>Add a feature to a node if it has a significantly high probability of co-occurring with other features for that node. </a:t>
-                </a:r>
-              </a:p>
-              <a:p>
-                <a:pPr lvl="1"/>
-                <a:endParaRPr lang="en-US" dirty="0"/>
-              </a:p>
-            </p:txBody>
-          </p:sp>
-        </mc:Choice>
-        <mc:Fallback xmlns="">
-          <p:sp>
-            <p:nvSpPr>
-              <p:cNvPr id="5" name="Content Placeholder 4">
-                <a:extLst>
-                  <a:ext uri="{FF2B5EF4-FFF2-40B4-BE49-F238E27FC236}">
-                    <a16:creationId xmlns:a16="http://schemas.microsoft.com/office/drawing/2014/main" id="{2972E615-8B9C-4FCF-B30B-C3F6D7ED842B}"/>
-                  </a:ext>
-                </a:extLst>
-              </p:cNvPr>
-              <p:cNvSpPr>
-                <a:spLocks noGrp="1" noRot="1" noChangeAspect="1" noMove="1" noResize="1" noEditPoints="1" noAdjustHandles="1" noChangeArrowheads="1" noChangeShapeType="1" noTextEdit="1"/>
-              </p:cNvSpPr>
-              <p:nvPr>
-                <p:ph idx="1"/>
-              </p:nvPr>
-            </p:nvSpPr>
-            <p:spPr>
-              <a:blipFill>
-                <a:blip r:embed="rId2"/>
-                <a:stretch>
-                  <a:fillRect l="-1043" t="-2241" r="-870"/>
-                </a:stretch>
-              </a:blipFill>
-            </p:spPr>
-            <p:txBody>
-              <a:bodyPr/>
-              <a:lstStyle/>
-              <a:p>
-                <a:r>
-                  <a:rPr lang="en-US">
-                    <a:noFill/>
-                  </a:rPr>
-                  <a:t> </a:t>
-                </a:r>
-              </a:p>
-            </p:txBody>
-          </p:sp>
-        </mc:Fallback>
-      </mc:AlternateContent>
-    </p:spTree>
-    <p:extLst>
-      <p:ext uri="{BB962C8B-B14F-4D97-AF65-F5344CB8AC3E}">
-        <p14:creationId xmlns:p14="http://schemas.microsoft.com/office/powerpoint/2010/main" val="1299029335"/>
-      </p:ext>
-    </p:extLst>
-  </p:cSld>
-  <p:clrMapOvr>
-    <a:masterClrMapping/>
-  </p:clrMapOvr>
-</p:sld>
-</file>
-
-<file path=ppt/slides/slide19.xml><?xml version="1.0" encoding="utf-8"?>
-<p:sld xmlns:a="http://schemas.openxmlformats.org/drawingml/2006/main" xmlns:r="http://schemas.openxmlformats.org/officeDocument/2006/relationships" xmlns:p="http://schemas.openxmlformats.org/presentationml/2006/main">
-  <p:cSld>
-    <p:spTree>
-      <p:nvGrpSpPr>
-        <p:cNvPr id="1" name=""/>
-        <p:cNvGrpSpPr/>
-        <p:nvPr/>
-      </p:nvGrpSpPr>
-      <p:grpSpPr>
-        <a:xfrm>
-          <a:off x="0" y="0"/>
-          <a:ext cx="0" cy="0"/>
-          <a:chOff x="0" y="0"/>
-          <a:chExt cx="0" cy="0"/>
-        </a:xfrm>
-      </p:grpSpPr>
-      <p:sp>
-        <p:nvSpPr>
-          <p:cNvPr id="2" name="Title 1">
-            <a:extLst>
-              <a:ext uri="{FF2B5EF4-FFF2-40B4-BE49-F238E27FC236}">
-                <a16:creationId xmlns:a16="http://schemas.microsoft.com/office/drawing/2014/main" id="{F301111F-C40B-45C8-84E5-E9F237F97508}"/>
-              </a:ext>
-            </a:extLst>
-          </p:cNvPr>
-          <p:cNvSpPr>
-            <a:spLocks noGrp="1"/>
-          </p:cNvSpPr>
-          <p:nvPr>
-            <p:ph type="title"/>
-          </p:nvPr>
-        </p:nvSpPr>
-        <p:spPr/>
-        <p:txBody>
-          <a:bodyPr/>
-          <a:lstStyle/>
-          <a:p>
-            <a:r>
-              <a:rPr lang="en-US" dirty="0"/>
-              <a:t>Generating Adversarial Graphs</a:t>
-            </a:r>
-          </a:p>
-        </p:txBody>
-      </p:sp>
-      <p:sp>
-        <p:nvSpPr>
-          <p:cNvPr id="3" name="Content Placeholder 2">
-            <a:extLst>
-              <a:ext uri="{FF2B5EF4-FFF2-40B4-BE49-F238E27FC236}">
-                <a16:creationId xmlns:a16="http://schemas.microsoft.com/office/drawing/2014/main" id="{FE6BDF7A-99A7-463D-A7BF-EDC8E048CE0B}"/>
-              </a:ext>
-            </a:extLst>
-          </p:cNvPr>
-          <p:cNvSpPr>
-            <a:spLocks noGrp="1"/>
-          </p:cNvSpPr>
-          <p:nvPr>
-            <p:ph idx="1"/>
-          </p:nvPr>
-        </p:nvSpPr>
-        <p:spPr/>
-        <p:txBody>
-          <a:bodyPr/>
-          <a:lstStyle/>
-          <a:p>
-            <a:r>
-              <a:rPr lang="en-US" dirty="0"/>
-              <a:t>Solving the Bi-level optimization problem is intractable.  Used a </a:t>
-            </a:r>
-            <a:r>
-              <a:rPr lang="en-US" i="1" dirty="0"/>
-              <a:t>tractable</a:t>
-            </a:r>
-            <a:r>
-              <a:rPr lang="en-US" dirty="0"/>
-              <a:t> surrogate model to generate the adversarial graphs.</a:t>
-            </a:r>
-          </a:p>
-          <a:p>
-            <a:endParaRPr lang="en-US" dirty="0"/>
-          </a:p>
-          <a:p>
-            <a:endParaRPr lang="en-US" dirty="0"/>
-          </a:p>
-          <a:p>
-            <a:endParaRPr lang="en-US" dirty="0"/>
-          </a:p>
-          <a:p>
-            <a:pPr marL="0" indent="0">
-              <a:buNone/>
-            </a:pPr>
-            <a:endParaRPr lang="en-US" dirty="0"/>
-          </a:p>
-        </p:txBody>
-      </p:sp>
-      <p:grpSp>
-        <p:nvGrpSpPr>
-          <p:cNvPr id="18" name="Group 17">
-            <a:extLst>
-              <a:ext uri="{FF2B5EF4-FFF2-40B4-BE49-F238E27FC236}">
-                <a16:creationId xmlns:a16="http://schemas.microsoft.com/office/drawing/2014/main" id="{D03484ED-F2DF-4055-B5F4-262795ABC57D}"/>
-              </a:ext>
-            </a:extLst>
-          </p:cNvPr>
-          <p:cNvGrpSpPr/>
-          <p:nvPr/>
-        </p:nvGrpSpPr>
-        <p:grpSpPr>
-          <a:xfrm>
-            <a:off x="1034021" y="3224664"/>
-            <a:ext cx="5061979" cy="2149352"/>
-            <a:chOff x="889284" y="3111004"/>
-            <a:chExt cx="5736285" cy="2467348"/>
-          </a:xfrm>
-        </p:grpSpPr>
-        <p:pic>
-          <p:nvPicPr>
-            <p:cNvPr id="4" name="Picture 3">
-              <a:extLst>
-                <a:ext uri="{FF2B5EF4-FFF2-40B4-BE49-F238E27FC236}">
-                  <a16:creationId xmlns:a16="http://schemas.microsoft.com/office/drawing/2014/main" id="{48958CC3-4D19-4715-AFB0-8C3087992542}"/>
-                </a:ext>
-              </a:extLst>
-            </p:cNvPr>
-            <p:cNvPicPr>
-              <a:picLocks noChangeAspect="1"/>
-            </p:cNvPicPr>
-            <p:nvPr/>
-          </p:nvPicPr>
-          <p:blipFill>
-            <a:blip r:embed="rId2"/>
-            <a:stretch>
-              <a:fillRect/>
-            </a:stretch>
-          </p:blipFill>
-          <p:spPr>
-            <a:xfrm>
-              <a:off x="889284" y="3291438"/>
-              <a:ext cx="5534425" cy="493872"/>
-            </a:xfrm>
-            <a:prstGeom prst="rect">
-              <a:avLst/>
-            </a:prstGeom>
-          </p:spPr>
-        </p:pic>
-        <p:pic>
-          <p:nvPicPr>
-            <p:cNvPr id="5" name="Picture 4">
-              <a:extLst>
-                <a:ext uri="{FF2B5EF4-FFF2-40B4-BE49-F238E27FC236}">
-                  <a16:creationId xmlns:a16="http://schemas.microsoft.com/office/drawing/2014/main" id="{D05EAF2B-74D0-4B7F-A9AF-F08CCBC1DA28}"/>
-                </a:ext>
-              </a:extLst>
-            </p:cNvPr>
-            <p:cNvPicPr>
-              <a:picLocks noChangeAspect="1"/>
-            </p:cNvPicPr>
-            <p:nvPr/>
-          </p:nvPicPr>
-          <p:blipFill>
-            <a:blip r:embed="rId3"/>
-            <a:stretch>
-              <a:fillRect/>
-            </a:stretch>
-          </p:blipFill>
-          <p:spPr>
-            <a:xfrm>
-              <a:off x="912879" y="4676721"/>
-              <a:ext cx="5689093" cy="645924"/>
-            </a:xfrm>
-            <a:prstGeom prst="rect">
-              <a:avLst/>
-            </a:prstGeom>
-          </p:spPr>
-        </p:pic>
-        <p:grpSp>
-          <p:nvGrpSpPr>
-            <p:cNvPr id="8" name="Group 7">
-              <a:extLst>
-                <a:ext uri="{FF2B5EF4-FFF2-40B4-BE49-F238E27FC236}">
-                  <a16:creationId xmlns:a16="http://schemas.microsoft.com/office/drawing/2014/main" id="{51FE84DE-826B-416C-96A8-14E19771BC64}"/>
-                </a:ext>
-              </a:extLst>
-            </p:cNvPr>
-            <p:cNvGrpSpPr/>
-            <p:nvPr/>
-          </p:nvGrpSpPr>
-          <p:grpSpPr>
-            <a:xfrm>
-              <a:off x="1834451" y="3986184"/>
-              <a:ext cx="3674737" cy="586272"/>
-              <a:chOff x="3208062" y="4846028"/>
-              <a:chExt cx="3674737" cy="586272"/>
-            </a:xfrm>
-          </p:grpSpPr>
-          <p:pic>
-            <p:nvPicPr>
-              <p:cNvPr id="6" name="Picture 5">
-                <a:extLst>
-                  <a:ext uri="{FF2B5EF4-FFF2-40B4-BE49-F238E27FC236}">
-                    <a16:creationId xmlns:a16="http://schemas.microsoft.com/office/drawing/2014/main" id="{44FD9492-33E3-41A5-A68C-14939A1BB2C7}"/>
-                  </a:ext>
-                </a:extLst>
-              </p:cNvPr>
-              <p:cNvPicPr>
-                <a:picLocks noChangeAspect="1"/>
-              </p:cNvPicPr>
-              <p:nvPr/>
-            </p:nvPicPr>
-            <p:blipFill>
-              <a:blip r:embed="rId4"/>
-              <a:stretch>
-                <a:fillRect/>
-              </a:stretch>
-            </p:blipFill>
-            <p:spPr>
-              <a:xfrm>
-                <a:off x="4077070" y="4846028"/>
-                <a:ext cx="2805729" cy="586272"/>
-              </a:xfrm>
-              <a:prstGeom prst="rect">
-                <a:avLst/>
-              </a:prstGeom>
-            </p:spPr>
-          </p:pic>
-          <mc:AlternateContent xmlns:mc="http://schemas.openxmlformats.org/markup-compatibility/2006" xmlns:a14="http://schemas.microsoft.com/office/drawing/2010/main">
-            <mc:Choice Requires="a14">
-              <p:sp>
-                <p:nvSpPr>
-                  <p:cNvPr id="7" name="TextBox 6">
-                    <a:extLst>
-                      <a:ext uri="{FF2B5EF4-FFF2-40B4-BE49-F238E27FC236}">
-                        <a16:creationId xmlns:a16="http://schemas.microsoft.com/office/drawing/2014/main" id="{C82D08E4-7286-4705-BB8C-86FC3D1F9B77}"/>
-                      </a:ext>
-                    </a:extLst>
-                  </p:cNvPr>
-                  <p:cNvSpPr txBox="1"/>
-                  <p:nvPr/>
-                </p:nvSpPr>
-                <p:spPr>
-                  <a:xfrm>
-                    <a:off x="3208062" y="4846028"/>
-                    <a:ext cx="989951" cy="276999"/>
-                  </a:xfrm>
-                  <a:prstGeom prst="rect">
-                    <a:avLst/>
-                  </a:prstGeom>
-                  <a:noFill/>
-                </p:spPr>
-                <p:txBody>
-                  <a:bodyPr wrap="none" lIns="0" tIns="0" rIns="0" bIns="0" rtlCol="0">
-                    <a:spAutoFit/>
-                  </a:bodyPr>
-                  <a:lstStyle/>
-                  <a:p>
-                    <a:pPr/>
-                    <a14:m>
-                      <m:oMathPara xmlns:m="http://schemas.openxmlformats.org/officeDocument/2006/math">
-                        <m:oMathParaPr>
-                          <m:jc m:val="centerGroup"/>
-                        </m:oMathParaPr>
-                        <m:oMath xmlns:m="http://schemas.openxmlformats.org/officeDocument/2006/math">
-                          <m:sSup>
-                            <m:sSupPr>
-                              <m:ctrlPr>
-                                <a:rPr lang="en-US" b="0" i="1" smtClean="0">
-                                  <a:latin typeface="Cambria Math" panose="02040503050406030204" pitchFamily="18" charset="0"/>
-                                </a:rPr>
-                              </m:ctrlPr>
-                            </m:sSupPr>
-                            <m:e>
-                              <m:r>
-                                <a:rPr lang="en-US" b="0" i="1" smtClean="0">
-                                  <a:latin typeface="Cambria Math" panose="02040503050406030204" pitchFamily="18" charset="0"/>
-                                </a:rPr>
-                                <m:t>(</m:t>
-                              </m:r>
-                              <m:r>
-                                <a:rPr lang="en-US" b="0" i="1" smtClean="0">
-                                  <a:latin typeface="Cambria Math" panose="02040503050406030204" pitchFamily="18" charset="0"/>
-                                </a:rPr>
-                                <m:t>𝐴</m:t>
-                              </m:r>
-                            </m:e>
-                            <m:sup>
-                              <m:r>
-                                <a:rPr lang="en-US" b="0" i="1" smtClean="0">
-                                  <a:latin typeface="Cambria Math" panose="02040503050406030204" pitchFamily="18" charset="0"/>
-                                </a:rPr>
-                                <m:t>′</m:t>
-                              </m:r>
-                            </m:sup>
-                          </m:sSup>
-                          <m:r>
-                            <a:rPr lang="en-US" b="0" i="1" smtClean="0">
-                              <a:latin typeface="Cambria Math" panose="02040503050406030204" pitchFamily="18" charset="0"/>
-                            </a:rPr>
-                            <m:t>,</m:t>
-                          </m:r>
-                          <m:r>
-                            <a:rPr lang="en-US" b="0" i="1" smtClean="0">
-                              <a:latin typeface="Cambria Math" panose="02040503050406030204" pitchFamily="18" charset="0"/>
-                            </a:rPr>
-                            <m:t>𝑋</m:t>
-                          </m:r>
-                          <m:r>
-                            <a:rPr lang="en-US" b="0" i="1" smtClean="0">
-                              <a:latin typeface="Cambria Math" panose="02040503050406030204" pitchFamily="18" charset="0"/>
-                            </a:rPr>
-                            <m:t>′)=</m:t>
-                          </m:r>
-                        </m:oMath>
-                      </m:oMathPara>
-                    </a14:m>
-                    <a:endParaRPr lang="en-US" dirty="0"/>
-                  </a:p>
-                </p:txBody>
-              </p:sp>
-            </mc:Choice>
-            <mc:Fallback xmlns="">
-              <p:sp>
-                <p:nvSpPr>
-                  <p:cNvPr id="7" name="TextBox 6">
-                    <a:extLst>
-                      <a:ext uri="{FF2B5EF4-FFF2-40B4-BE49-F238E27FC236}">
-                        <a16:creationId xmlns:a16="http://schemas.microsoft.com/office/drawing/2014/main" id="{C82D08E4-7286-4705-BB8C-86FC3D1F9B77}"/>
-                      </a:ext>
-                    </a:extLst>
-                  </p:cNvPr>
-                  <p:cNvSpPr txBox="1">
-                    <a:spLocks noRot="1" noChangeAspect="1" noMove="1" noResize="1" noEditPoints="1" noAdjustHandles="1" noChangeArrowheads="1" noChangeShapeType="1" noTextEdit="1"/>
-                  </p:cNvSpPr>
-                  <p:nvPr/>
-                </p:nvSpPr>
-                <p:spPr>
-                  <a:xfrm>
-                    <a:off x="3208062" y="4846028"/>
-                    <a:ext cx="989951" cy="276999"/>
-                  </a:xfrm>
-                  <a:prstGeom prst="rect">
-                    <a:avLst/>
-                  </a:prstGeom>
-                  <a:blipFill>
-                    <a:blip r:embed="rId5"/>
-                    <a:stretch>
-                      <a:fillRect l="-12500" t="-5000" r="-11806" b="-52500"/>
-                    </a:stretch>
-                  </a:blipFill>
-                </p:spPr>
-                <p:txBody>
-                  <a:bodyPr/>
-                  <a:lstStyle/>
-                  <a:p>
-                    <a:r>
-                      <a:rPr lang="en-US">
-                        <a:noFill/>
-                      </a:rPr>
-                      <a:t> </a:t>
-                    </a:r>
-                  </a:p>
-                </p:txBody>
-              </p:sp>
-            </mc:Fallback>
-          </mc:AlternateContent>
-        </p:grpSp>
-        <p:sp>
-          <p:nvSpPr>
-            <p:cNvPr id="12" name="Rectangle: Rounded Corners 11">
-              <a:extLst>
-                <a:ext uri="{FF2B5EF4-FFF2-40B4-BE49-F238E27FC236}">
-                  <a16:creationId xmlns:a16="http://schemas.microsoft.com/office/drawing/2014/main" id="{9530F6F4-B289-4137-95BC-780EF50D49C3}"/>
-                </a:ext>
-              </a:extLst>
-            </p:cNvPr>
-            <p:cNvSpPr/>
-            <p:nvPr/>
-          </p:nvSpPr>
-          <p:spPr>
-            <a:xfrm>
-              <a:off x="889284" y="3111004"/>
-              <a:ext cx="5736285" cy="2467348"/>
-            </a:xfrm>
-            <a:prstGeom prst="roundRect">
-              <a:avLst/>
-            </a:prstGeom>
-            <a:noFill/>
-            <a:ln w="28575">
-              <a:solidFill>
-                <a:srgbClr val="C00000"/>
-              </a:solidFill>
-            </a:ln>
-          </p:spPr>
-          <p:style>
-            <a:lnRef idx="2">
-              <a:schemeClr val="accent1">
-                <a:shade val="50000"/>
-              </a:schemeClr>
-            </a:lnRef>
-            <a:fillRef idx="1">
-              <a:schemeClr val="accent1"/>
-            </a:fillRef>
-            <a:effectRef idx="0">
-              <a:schemeClr val="accent1"/>
-            </a:effectRef>
-            <a:fontRef idx="minor">
-              <a:schemeClr val="lt1"/>
-            </a:fontRef>
-          </p:style>
-          <p:txBody>
-            <a:bodyPr rtlCol="0" anchor="ctr"/>
-            <a:lstStyle/>
-            <a:p>
-              <a:pPr algn="ctr"/>
-              <a:endParaRPr lang="en-US"/>
-            </a:p>
-          </p:txBody>
-        </p:sp>
-      </p:grpSp>
-      <p:grpSp>
-        <p:nvGrpSpPr>
-          <p:cNvPr id="19" name="Group 18">
-            <a:extLst>
-              <a:ext uri="{FF2B5EF4-FFF2-40B4-BE49-F238E27FC236}">
-                <a16:creationId xmlns:a16="http://schemas.microsoft.com/office/drawing/2014/main" id="{61E33512-BCB7-4E6C-9C6B-528D72622B8F}"/>
-              </a:ext>
-            </a:extLst>
-          </p:cNvPr>
-          <p:cNvGrpSpPr/>
-          <p:nvPr/>
-        </p:nvGrpSpPr>
-        <p:grpSpPr>
-          <a:xfrm>
-            <a:off x="6842031" y="3224664"/>
-            <a:ext cx="4439182" cy="2149352"/>
-            <a:chOff x="7095540" y="3111004"/>
-            <a:chExt cx="4638409" cy="2467348"/>
-          </a:xfrm>
-        </p:grpSpPr>
-        <p:grpSp>
-          <p:nvGrpSpPr>
-            <p:cNvPr id="17" name="Group 16">
-              <a:extLst>
-                <a:ext uri="{FF2B5EF4-FFF2-40B4-BE49-F238E27FC236}">
-                  <a16:creationId xmlns:a16="http://schemas.microsoft.com/office/drawing/2014/main" id="{38A57B7D-89C9-4F51-9969-E79E071AF0F3}"/>
-                </a:ext>
-              </a:extLst>
-            </p:cNvPr>
-            <p:cNvGrpSpPr/>
-            <p:nvPr/>
-          </p:nvGrpSpPr>
-          <p:grpSpPr>
-            <a:xfrm>
-              <a:off x="7245066" y="3364091"/>
-              <a:ext cx="4359044" cy="1798183"/>
-              <a:chOff x="7142899" y="3169042"/>
-              <a:chExt cx="4359044" cy="1798183"/>
-            </a:xfrm>
-          </p:grpSpPr>
-          <p:pic>
-            <p:nvPicPr>
-              <p:cNvPr id="9" name="Picture 8">
-                <a:extLst>
-                  <a:ext uri="{FF2B5EF4-FFF2-40B4-BE49-F238E27FC236}">
-                    <a16:creationId xmlns:a16="http://schemas.microsoft.com/office/drawing/2014/main" id="{1C49593F-D689-45EC-BBBB-A5B049A00B79}"/>
-                  </a:ext>
-                </a:extLst>
-              </p:cNvPr>
-              <p:cNvPicPr>
-                <a:picLocks noChangeAspect="1"/>
-              </p:cNvPicPr>
-              <p:nvPr/>
-            </p:nvPicPr>
-            <p:blipFill>
-              <a:blip r:embed="rId6"/>
-              <a:stretch>
-                <a:fillRect/>
-              </a:stretch>
-            </p:blipFill>
-            <p:spPr>
-              <a:xfrm>
-                <a:off x="7142899" y="3808297"/>
-                <a:ext cx="4359044" cy="813172"/>
-              </a:xfrm>
-              <a:prstGeom prst="rect">
-                <a:avLst/>
-              </a:prstGeom>
-            </p:spPr>
-          </p:pic>
-          <mc:AlternateContent xmlns:mc="http://schemas.openxmlformats.org/markup-compatibility/2006" xmlns:a14="http://schemas.microsoft.com/office/drawing/2010/main">
-            <mc:Choice Requires="a14">
-              <p:sp>
-                <p:nvSpPr>
-                  <p:cNvPr id="13" name="TextBox 12">
-                    <a:extLst>
-                      <a:ext uri="{FF2B5EF4-FFF2-40B4-BE49-F238E27FC236}">
-                        <a16:creationId xmlns:a16="http://schemas.microsoft.com/office/drawing/2014/main" id="{83ADFEB8-49F0-459B-AC1A-06BDCED7D1AE}"/>
-                      </a:ext>
-                    </a:extLst>
-                  </p:cNvPr>
-                  <p:cNvSpPr txBox="1"/>
-                  <p:nvPr/>
-                </p:nvSpPr>
-                <p:spPr>
-                  <a:xfrm>
-                    <a:off x="8313714" y="4690226"/>
-                    <a:ext cx="2355403" cy="276999"/>
-                  </a:xfrm>
-                  <a:prstGeom prst="rect">
-                    <a:avLst/>
-                  </a:prstGeom>
-                  <a:noFill/>
-                </p:spPr>
-                <p:txBody>
-                  <a:bodyPr wrap="square" lIns="0" tIns="0" rIns="0" bIns="0" rtlCol="0">
-                    <a:spAutoFit/>
-                  </a:bodyPr>
-                  <a:lstStyle/>
-                  <a:p>
-                    <a:pPr/>
-                    <a14:m>
-                      <m:oMathPara xmlns:m="http://schemas.openxmlformats.org/officeDocument/2006/math">
-                        <m:oMathParaPr>
-                          <m:jc m:val="centerGroup"/>
-                        </m:oMathParaPr>
-                        <m:oMath xmlns:m="http://schemas.openxmlformats.org/officeDocument/2006/math">
-                          <m:sSup>
-                            <m:sSupPr>
-                              <m:ctrlPr>
-                                <a:rPr lang="en-US" b="0" i="1" smtClean="0">
-                                  <a:latin typeface="Cambria Math" panose="02040503050406030204" pitchFamily="18" charset="0"/>
-                                </a:rPr>
-                              </m:ctrlPr>
-                            </m:sSupPr>
-                            <m:e>
-                              <m:r>
-                                <a:rPr lang="en-US" b="0" i="1" smtClean="0">
-                                  <a:latin typeface="Cambria Math" panose="02040503050406030204" pitchFamily="18" charset="0"/>
-                                </a:rPr>
-                                <m:t>𝐴</m:t>
-                              </m:r>
-                            </m:e>
-                            <m:sup>
-                              <m:r>
-                                <a:rPr lang="en-US" b="0" i="1" smtClean="0">
-                                  <a:latin typeface="Cambria Math" panose="02040503050406030204" pitchFamily="18" charset="0"/>
-                                </a:rPr>
-                                <m:t>′</m:t>
-                              </m:r>
-                            </m:sup>
-                          </m:sSup>
-                          <m:r>
-                            <a:rPr lang="en-US" b="0" i="1" smtClean="0">
-                              <a:latin typeface="Cambria Math" panose="02040503050406030204" pitchFamily="18" charset="0"/>
-                            </a:rPr>
-                            <m:t>=</m:t>
-                          </m:r>
-                          <m:r>
-                            <a:rPr lang="en-US" b="0" i="1" smtClean="0">
-                              <a:latin typeface="Cambria Math" panose="02040503050406030204" pitchFamily="18" charset="0"/>
-                            </a:rPr>
-                            <m:t>𝐴</m:t>
-                          </m:r>
-                          <m:r>
-                            <a:rPr lang="en-US" b="0" i="1" smtClean="0">
-                              <a:latin typeface="Cambria Math" panose="02040503050406030204" pitchFamily="18" charset="0"/>
-                            </a:rPr>
-                            <m:t>±</m:t>
-                          </m:r>
-                          <m:r>
-                            <a:rPr lang="en-US" b="0" i="1" smtClean="0">
-                              <a:latin typeface="Cambria Math" panose="02040503050406030204" pitchFamily="18" charset="0"/>
-                            </a:rPr>
-                            <m:t>𝑒</m:t>
-                          </m:r>
-                          <m:r>
-                            <a:rPr lang="en-US" b="0" i="1" smtClean="0">
-                              <a:latin typeface="Cambria Math" panose="02040503050406030204" pitchFamily="18" charset="0"/>
-                            </a:rPr>
-                            <m:t>, </m:t>
-                          </m:r>
-                          <m:sSup>
-                            <m:sSupPr>
-                              <m:ctrlPr>
-                                <a:rPr lang="en-US" b="0" i="1" smtClean="0">
-                                  <a:latin typeface="Cambria Math" panose="02040503050406030204" pitchFamily="18" charset="0"/>
-                                </a:rPr>
-                              </m:ctrlPr>
-                            </m:sSupPr>
-                            <m:e>
-                              <m:r>
-                                <a:rPr lang="en-US" b="0" i="1" smtClean="0">
-                                  <a:latin typeface="Cambria Math" panose="02040503050406030204" pitchFamily="18" charset="0"/>
-                                </a:rPr>
-                                <m:t>𝑋</m:t>
-                              </m:r>
-                            </m:e>
-                            <m:sup>
-                              <m:r>
-                                <a:rPr lang="en-US" b="0" i="1" smtClean="0">
-                                  <a:latin typeface="Cambria Math" panose="02040503050406030204" pitchFamily="18" charset="0"/>
-                                </a:rPr>
-                                <m:t>′</m:t>
-                              </m:r>
-                            </m:sup>
-                          </m:sSup>
-                          <m:r>
-                            <a:rPr lang="en-US" b="0" i="1" smtClean="0">
-                              <a:latin typeface="Cambria Math" panose="02040503050406030204" pitchFamily="18" charset="0"/>
-                            </a:rPr>
-                            <m:t>=</m:t>
-                          </m:r>
-                          <m:r>
-                            <a:rPr lang="en-US" b="0" i="1" smtClean="0">
-                              <a:latin typeface="Cambria Math" panose="02040503050406030204" pitchFamily="18" charset="0"/>
-                            </a:rPr>
-                            <m:t>𝑋</m:t>
-                          </m:r>
-                          <m:r>
-                            <a:rPr lang="en-US" b="0" i="1" smtClean="0">
-                              <a:latin typeface="Cambria Math" panose="02040503050406030204" pitchFamily="18" charset="0"/>
-                            </a:rPr>
-                            <m:t>±</m:t>
-                          </m:r>
-                          <m:r>
-                            <a:rPr lang="en-US" b="0" i="1" smtClean="0">
-                              <a:latin typeface="Cambria Math" panose="02040503050406030204" pitchFamily="18" charset="0"/>
-                            </a:rPr>
-                            <m:t>𝑓</m:t>
-                          </m:r>
-                        </m:oMath>
-                      </m:oMathPara>
-                    </a14:m>
-                    <a:endParaRPr lang="en-US" dirty="0"/>
-                  </a:p>
-                </p:txBody>
-              </p:sp>
-            </mc:Choice>
-            <mc:Fallback xmlns="">
-              <p:sp>
-                <p:nvSpPr>
-                  <p:cNvPr id="13" name="TextBox 12">
-                    <a:extLst>
-                      <a:ext uri="{FF2B5EF4-FFF2-40B4-BE49-F238E27FC236}">
-                        <a16:creationId xmlns:a16="http://schemas.microsoft.com/office/drawing/2014/main" id="{83ADFEB8-49F0-459B-AC1A-06BDCED7D1AE}"/>
-                      </a:ext>
-                    </a:extLst>
-                  </p:cNvPr>
-                  <p:cNvSpPr txBox="1">
-                    <a:spLocks noRot="1" noChangeAspect="1" noMove="1" noResize="1" noEditPoints="1" noAdjustHandles="1" noChangeArrowheads="1" noChangeShapeType="1" noTextEdit="1"/>
-                  </p:cNvSpPr>
-                  <p:nvPr/>
-                </p:nvSpPr>
-                <p:spPr>
-                  <a:xfrm>
-                    <a:off x="8313714" y="4690226"/>
-                    <a:ext cx="2355403" cy="276999"/>
-                  </a:xfrm>
-                  <a:prstGeom prst="rect">
-                    <a:avLst/>
-                  </a:prstGeom>
-                  <a:blipFill>
-                    <a:blip r:embed="rId7"/>
-                    <a:stretch>
-                      <a:fillRect l="-2981" t="-5128" r="-4065" b="-56410"/>
-                    </a:stretch>
-                  </a:blipFill>
-                </p:spPr>
-                <p:txBody>
-                  <a:bodyPr/>
-                  <a:lstStyle/>
-                  <a:p>
-                    <a:r>
-                      <a:rPr lang="en-US">
-                        <a:noFill/>
-                      </a:rPr>
-                      <a:t> </a:t>
-                    </a:r>
-                  </a:p>
-                </p:txBody>
-              </p:sp>
-            </mc:Fallback>
-          </mc:AlternateContent>
-          <p:sp>
-            <p:nvSpPr>
-              <p:cNvPr id="14" name="TextBox 13">
-                <a:extLst>
-                  <a:ext uri="{FF2B5EF4-FFF2-40B4-BE49-F238E27FC236}">
-                    <a16:creationId xmlns:a16="http://schemas.microsoft.com/office/drawing/2014/main" id="{AB125B32-9121-4A25-915F-FDB097B2A494}"/>
-                  </a:ext>
-                </a:extLst>
-              </p:cNvPr>
-              <p:cNvSpPr txBox="1"/>
-              <p:nvPr/>
-            </p:nvSpPr>
-            <p:spPr>
-              <a:xfrm>
-                <a:off x="7611606" y="3169042"/>
-                <a:ext cx="3125343" cy="369332"/>
-              </a:xfrm>
-              <a:prstGeom prst="rect">
-                <a:avLst/>
-              </a:prstGeom>
-              <a:noFill/>
-            </p:spPr>
-            <p:txBody>
-              <a:bodyPr wrap="none" rtlCol="0">
-                <a:spAutoFit/>
-              </a:bodyPr>
-              <a:lstStyle/>
-              <a:p>
-                <a:r>
-                  <a:rPr lang="en-US" dirty="0"/>
-                  <a:t>Scalable Greedy Approximation</a:t>
-                </a:r>
-              </a:p>
-            </p:txBody>
-          </p:sp>
-        </p:grpSp>
-        <p:sp>
-          <p:nvSpPr>
-            <p:cNvPr id="16" name="Rectangle: Rounded Corners 15">
-              <a:extLst>
-                <a:ext uri="{FF2B5EF4-FFF2-40B4-BE49-F238E27FC236}">
-                  <a16:creationId xmlns:a16="http://schemas.microsoft.com/office/drawing/2014/main" id="{C9741835-7F6E-419D-86A6-A9384723AFAB}"/>
-                </a:ext>
-              </a:extLst>
-            </p:cNvPr>
-            <p:cNvSpPr/>
-            <p:nvPr/>
-          </p:nvSpPr>
-          <p:spPr>
-            <a:xfrm>
-              <a:off x="7095540" y="3111004"/>
-              <a:ext cx="4638409" cy="2467348"/>
-            </a:xfrm>
-            <a:prstGeom prst="roundRect">
-              <a:avLst/>
-            </a:prstGeom>
-            <a:noFill/>
-            <a:ln w="28575">
-              <a:solidFill>
-                <a:srgbClr val="C00000"/>
-              </a:solidFill>
-            </a:ln>
-          </p:spPr>
-          <p:style>
-            <a:lnRef idx="2">
-              <a:schemeClr val="accent1">
-                <a:shade val="50000"/>
-              </a:schemeClr>
-            </a:lnRef>
-            <a:fillRef idx="1">
-              <a:schemeClr val="accent1"/>
-            </a:fillRef>
-            <a:effectRef idx="0">
-              <a:schemeClr val="accent1"/>
-            </a:effectRef>
-            <a:fontRef idx="minor">
-              <a:schemeClr val="lt1"/>
-            </a:fontRef>
-          </p:style>
-          <p:txBody>
-            <a:bodyPr rtlCol="0" anchor="ctr"/>
-            <a:lstStyle/>
-            <a:p>
-              <a:pPr algn="ctr"/>
-              <a:endParaRPr lang="en-US"/>
-            </a:p>
-          </p:txBody>
-        </p:sp>
-      </p:grpSp>
-      <p:sp>
-        <p:nvSpPr>
-          <p:cNvPr id="20" name="Arrow: Right 19">
-            <a:extLst>
-              <a:ext uri="{FF2B5EF4-FFF2-40B4-BE49-F238E27FC236}">
-                <a16:creationId xmlns:a16="http://schemas.microsoft.com/office/drawing/2014/main" id="{36C7425A-8B78-4646-BF59-6D23F9A01E65}"/>
-              </a:ext>
-            </a:extLst>
-          </p:cNvPr>
-          <p:cNvSpPr/>
-          <p:nvPr/>
-        </p:nvSpPr>
-        <p:spPr>
-          <a:xfrm>
-            <a:off x="6200965" y="4107698"/>
-            <a:ext cx="475079" cy="183341"/>
-          </a:xfrm>
-          <a:prstGeom prst="rightArrow">
-            <a:avLst/>
-          </a:prstGeom>
-          <a:noFill/>
-          <a:ln w="28575">
-            <a:solidFill>
-              <a:schemeClr val="accent1"/>
-            </a:solidFill>
-          </a:ln>
-        </p:spPr>
-        <p:style>
-          <a:lnRef idx="2">
-            <a:schemeClr val="accent1">
-              <a:shade val="50000"/>
-            </a:schemeClr>
-          </a:lnRef>
-          <a:fillRef idx="1">
-            <a:schemeClr val="accent1"/>
-          </a:fillRef>
-          <a:effectRef idx="0">
-            <a:schemeClr val="accent1"/>
-          </a:effectRef>
-          <a:fontRef idx="minor">
-            <a:schemeClr val="lt1"/>
-          </a:fontRef>
-        </p:style>
-        <p:txBody>
-          <a:bodyPr rtlCol="0" anchor="ctr"/>
-          <a:lstStyle/>
-          <a:p>
-            <a:pPr algn="ctr"/>
-            <a:endParaRPr lang="en-US"/>
-          </a:p>
-        </p:txBody>
-      </p:sp>
-    </p:spTree>
-    <p:extLst>
-      <p:ext uri="{BB962C8B-B14F-4D97-AF65-F5344CB8AC3E}">
-        <p14:creationId xmlns:p14="http://schemas.microsoft.com/office/powerpoint/2010/main" val="308939988"/>
-      </p:ext>
-    </p:extLst>
-  </p:cSld>
-  <p:clrMapOvr>
-    <a:masterClrMapping/>
-  </p:clrMapOvr>
-</p:sld>
-</file>
-
 <file path=ppt/slides/slide2.xml><?xml version="1.0" encoding="utf-8"?>
-<p:sld xmlns:a="http://schemas.openxmlformats.org/drawingml/2006/main" xmlns:r="http://schemas.openxmlformats.org/officeDocument/2006/relationships" xmlns:p="http://schemas.openxmlformats.org/presentationml/2006/main">
-  <p:cSld>
-    <p:spTree>
-      <p:nvGrpSpPr>
-        <p:cNvPr id="1" name=""/>
-        <p:cNvGrpSpPr/>
-        <p:nvPr/>
-      </p:nvGrpSpPr>
-      <p:grpSpPr>
-        <a:xfrm>
-          <a:off x="0" y="0"/>
-          <a:ext cx="0" cy="0"/>
-          <a:chOff x="0" y="0"/>
-          <a:chExt cx="0" cy="0"/>
-        </a:xfrm>
-      </p:grpSpPr>
-      <p:sp>
-        <p:nvSpPr>
-          <p:cNvPr id="2" name="Title 1">
-            <a:extLst>
-              <a:ext uri="{FF2B5EF4-FFF2-40B4-BE49-F238E27FC236}">
-                <a16:creationId xmlns:a16="http://schemas.microsoft.com/office/drawing/2014/main" id="{A86304F5-D66C-48FB-9ABD-9C1BA1698F42}"/>
-              </a:ext>
-            </a:extLst>
-          </p:cNvPr>
-          <p:cNvSpPr>
-            <a:spLocks noGrp="1"/>
-          </p:cNvSpPr>
-          <p:nvPr>
-            <p:ph type="title"/>
-          </p:nvPr>
-        </p:nvSpPr>
-        <p:spPr/>
-        <p:txBody>
-          <a:bodyPr/>
-          <a:lstStyle/>
-          <a:p>
-            <a:r>
-              <a:rPr lang="en-US" dirty="0"/>
-              <a:t>Overview</a:t>
-            </a:r>
-          </a:p>
-        </p:txBody>
-      </p:sp>
-      <p:sp>
-        <p:nvSpPr>
-          <p:cNvPr id="3" name="Content Placeholder 2">
-            <a:extLst>
-              <a:ext uri="{FF2B5EF4-FFF2-40B4-BE49-F238E27FC236}">
-                <a16:creationId xmlns:a16="http://schemas.microsoft.com/office/drawing/2014/main" id="{D0AB8B1E-0847-4CD4-A776-7DAF36F8393A}"/>
-              </a:ext>
-            </a:extLst>
-          </p:cNvPr>
-          <p:cNvSpPr>
-            <a:spLocks noGrp="1"/>
-          </p:cNvSpPr>
-          <p:nvPr>
-            <p:ph idx="1"/>
-          </p:nvPr>
-        </p:nvSpPr>
-        <p:spPr/>
-        <p:txBody>
-          <a:bodyPr/>
-          <a:lstStyle/>
-          <a:p>
-            <a:r>
-              <a:rPr lang="en-US" dirty="0"/>
-              <a:t>Adversarial Attacks on Graph Structured Data</a:t>
-            </a:r>
-          </a:p>
-          <a:p>
-            <a:pPr lvl="1"/>
-            <a:r>
-              <a:rPr lang="en-US" dirty="0"/>
-              <a:t>Evasion attacks on Graph Neural Networks (GNN).</a:t>
-            </a:r>
-          </a:p>
-          <a:p>
-            <a:pPr lvl="1"/>
-            <a:r>
-              <a:rPr lang="en-US" dirty="0"/>
-              <a:t>Graph level and Node level attacks.</a:t>
-            </a:r>
-          </a:p>
-          <a:p>
-            <a:pPr marL="457200" lvl="1" indent="0">
-              <a:buNone/>
-            </a:pPr>
-            <a:endParaRPr lang="en-US" dirty="0"/>
-          </a:p>
-          <a:p>
-            <a:pPr marL="457200" lvl="1" indent="0">
-              <a:buNone/>
-            </a:pPr>
-            <a:endParaRPr lang="en-US" dirty="0"/>
-          </a:p>
-          <a:p>
-            <a:r>
-              <a:rPr lang="en-US" dirty="0"/>
-              <a:t>Adversarial Attacks on Neural Networks for Graph Data</a:t>
-            </a:r>
-          </a:p>
-          <a:p>
-            <a:pPr lvl="1"/>
-            <a:r>
-              <a:rPr lang="en-US" dirty="0"/>
-              <a:t>Poisoning attacks on Graph Convolutional Networks (GCN).</a:t>
-            </a:r>
-          </a:p>
-          <a:p>
-            <a:pPr lvl="1"/>
-            <a:r>
-              <a:rPr lang="en-US" dirty="0"/>
-              <a:t>Target Node Misclassification.</a:t>
-            </a:r>
-          </a:p>
-          <a:p>
-            <a:pPr lvl="1"/>
-            <a:endParaRPr lang="en-US" dirty="0"/>
-          </a:p>
-          <a:p>
-            <a:pPr lvl="1"/>
-            <a:endParaRPr lang="en-US" dirty="0"/>
-          </a:p>
-        </p:txBody>
-      </p:sp>
-    </p:spTree>
-    <p:extLst>
-      <p:ext uri="{BB962C8B-B14F-4D97-AF65-F5344CB8AC3E}">
-        <p14:creationId xmlns:p14="http://schemas.microsoft.com/office/powerpoint/2010/main" val="3925321287"/>
-      </p:ext>
-    </p:extLst>
-  </p:cSld>
-  <p:clrMapOvr>
-    <a:masterClrMapping/>
-  </p:clrMapOvr>
-</p:sld>
-</file>
-
-<file path=ppt/slides/slide20.xml><?xml version="1.0" encoding="utf-8"?>
-<p:sld xmlns:a="http://schemas.openxmlformats.org/drawingml/2006/main" xmlns:r="http://schemas.openxmlformats.org/officeDocument/2006/relationships" xmlns:p="http://schemas.openxmlformats.org/presentationml/2006/main">
-  <p:cSld>
-    <p:spTree>
-      <p:nvGrpSpPr>
-        <p:cNvPr id="1" name=""/>
-        <p:cNvGrpSpPr/>
-        <p:nvPr/>
-      </p:nvGrpSpPr>
-      <p:grpSpPr>
-        <a:xfrm>
-          <a:off x="0" y="0"/>
-          <a:ext cx="0" cy="0"/>
-          <a:chOff x="0" y="0"/>
-          <a:chExt cx="0" cy="0"/>
-        </a:xfrm>
-      </p:grpSpPr>
-      <p:sp>
-        <p:nvSpPr>
-          <p:cNvPr id="2" name="Title 1">
-            <a:extLst>
-              <a:ext uri="{FF2B5EF4-FFF2-40B4-BE49-F238E27FC236}">
-                <a16:creationId xmlns:a16="http://schemas.microsoft.com/office/drawing/2014/main" id="{FDAA4140-18F5-46CC-8B5F-FD31B0870961}"/>
-              </a:ext>
-            </a:extLst>
-          </p:cNvPr>
-          <p:cNvSpPr>
-            <a:spLocks noGrp="1"/>
-          </p:cNvSpPr>
-          <p:nvPr>
-            <p:ph type="title"/>
-          </p:nvPr>
-        </p:nvSpPr>
-        <p:spPr/>
-        <p:txBody>
-          <a:bodyPr/>
-          <a:lstStyle/>
-          <a:p>
-            <a:r>
-              <a:rPr lang="en-US" dirty="0" err="1"/>
-              <a:t>Nettack</a:t>
-            </a:r>
-            <a:r>
-              <a:rPr lang="en-US" dirty="0"/>
-              <a:t> Algorithm</a:t>
-            </a:r>
-          </a:p>
-        </p:txBody>
-      </p:sp>
-      <p:pic>
-        <p:nvPicPr>
-          <p:cNvPr id="4" name="Picture 3">
-            <a:extLst>
-              <a:ext uri="{FF2B5EF4-FFF2-40B4-BE49-F238E27FC236}">
-                <a16:creationId xmlns:a16="http://schemas.microsoft.com/office/drawing/2014/main" id="{6D747ADA-4FE9-4B3B-A55E-940591B15634}"/>
-              </a:ext>
-            </a:extLst>
-          </p:cNvPr>
-          <p:cNvPicPr>
-            <a:picLocks noChangeAspect="1"/>
-          </p:cNvPicPr>
-          <p:nvPr/>
-        </p:nvPicPr>
-        <p:blipFill>
-          <a:blip r:embed="rId2"/>
-          <a:stretch>
-            <a:fillRect/>
-          </a:stretch>
-        </p:blipFill>
-        <p:spPr>
-          <a:xfrm>
-            <a:off x="1032842" y="1618289"/>
-            <a:ext cx="5454801" cy="4874586"/>
-          </a:xfrm>
-          <a:prstGeom prst="rect">
-            <a:avLst/>
-          </a:prstGeom>
-        </p:spPr>
-      </p:pic>
-      <p:sp>
-        <p:nvSpPr>
-          <p:cNvPr id="5" name="TextBox 4">
-            <a:extLst>
-              <a:ext uri="{FF2B5EF4-FFF2-40B4-BE49-F238E27FC236}">
-                <a16:creationId xmlns:a16="http://schemas.microsoft.com/office/drawing/2014/main" id="{F9A31353-6C62-49D4-AEB5-8BB2ECD733D9}"/>
-              </a:ext>
-            </a:extLst>
-          </p:cNvPr>
-          <p:cNvSpPr txBox="1"/>
-          <p:nvPr/>
-        </p:nvSpPr>
-        <p:spPr>
-          <a:xfrm>
-            <a:off x="6985710" y="2572764"/>
-            <a:ext cx="3961974" cy="2862322"/>
-          </a:xfrm>
-          <a:prstGeom prst="rect">
-            <a:avLst/>
-          </a:prstGeom>
-          <a:noFill/>
-          <a:ln>
-            <a:solidFill>
-              <a:schemeClr val="bg1">
-                <a:lumMod val="50000"/>
-              </a:schemeClr>
-            </a:solidFill>
-          </a:ln>
-        </p:spPr>
-        <p:txBody>
-          <a:bodyPr wrap="square" rtlCol="0">
-            <a:spAutoFit/>
-          </a:bodyPr>
-          <a:lstStyle/>
-          <a:p>
-            <a:pPr marL="285750" indent="-285750">
-              <a:buFont typeface="Arial" panose="020B0604020202020204" pitchFamily="34" charset="0"/>
-              <a:buChar char="•"/>
-            </a:pPr>
-            <a:r>
-              <a:rPr lang="en-US" dirty="0"/>
-              <a:t>Sequentially manipulate an entry from the adjacency matrix or a feature entry and pick one which increases the surrogate loss most.</a:t>
-            </a:r>
-          </a:p>
-          <a:p>
-            <a:endParaRPr lang="en-US" dirty="0"/>
-          </a:p>
-          <a:p>
-            <a:pPr marL="285750" indent="-285750">
-              <a:buFont typeface="Arial" panose="020B0604020202020204" pitchFamily="34" charset="0"/>
-              <a:buChar char="•"/>
-            </a:pPr>
-            <a:r>
-              <a:rPr lang="en-US" dirty="0"/>
-              <a:t>Efficient computation needed for the score functions and candidate edge/feature perturbations (refer to the paper for details). </a:t>
-            </a:r>
-          </a:p>
-          <a:p>
-            <a:endParaRPr lang="en-US" dirty="0"/>
-          </a:p>
-        </p:txBody>
-      </p:sp>
-    </p:spTree>
-    <p:extLst>
-      <p:ext uri="{BB962C8B-B14F-4D97-AF65-F5344CB8AC3E}">
-        <p14:creationId xmlns:p14="http://schemas.microsoft.com/office/powerpoint/2010/main" val="3316262587"/>
-      </p:ext>
-    </p:extLst>
-  </p:cSld>
-  <p:clrMapOvr>
-    <a:masterClrMapping/>
-  </p:clrMapOvr>
-</p:sld>
-</file>
-
-<file path=ppt/slides/slide21.xml><?xml version="1.0" encoding="utf-8"?>
-<p:sld xmlns:a="http://schemas.openxmlformats.org/drawingml/2006/main" xmlns:r="http://schemas.openxmlformats.org/officeDocument/2006/relationships" xmlns:p="http://schemas.openxmlformats.org/presentationml/2006/main">
-  <p:cSld>
-    <p:spTree>
-      <p:nvGrpSpPr>
-        <p:cNvPr id="1" name=""/>
-        <p:cNvGrpSpPr/>
-        <p:nvPr/>
-      </p:nvGrpSpPr>
-      <p:grpSpPr>
-        <a:xfrm>
-          <a:off x="0" y="0"/>
-          <a:ext cx="0" cy="0"/>
-          <a:chOff x="0" y="0"/>
-          <a:chExt cx="0" cy="0"/>
-        </a:xfrm>
-      </p:grpSpPr>
-      <p:sp>
-        <p:nvSpPr>
-          <p:cNvPr id="2" name="Title 1">
-            <a:extLst>
-              <a:ext uri="{FF2B5EF4-FFF2-40B4-BE49-F238E27FC236}">
-                <a16:creationId xmlns:a16="http://schemas.microsoft.com/office/drawing/2014/main" id="{0AE86E7A-094C-472F-BABC-990ABAA97D5A}"/>
-              </a:ext>
-            </a:extLst>
-          </p:cNvPr>
-          <p:cNvSpPr>
-            <a:spLocks noGrp="1"/>
-          </p:cNvSpPr>
-          <p:nvPr>
-            <p:ph type="title"/>
-          </p:nvPr>
-        </p:nvSpPr>
-        <p:spPr>
-          <a:xfrm>
-            <a:off x="705382" y="479693"/>
-            <a:ext cx="10515600" cy="1325563"/>
-          </a:xfrm>
-        </p:spPr>
-        <p:txBody>
-          <a:bodyPr/>
-          <a:lstStyle/>
-          <a:p>
-            <a:r>
-              <a:rPr lang="en-US" dirty="0"/>
-              <a:t>Experimental results : Attack on surrogate</a:t>
-            </a:r>
-          </a:p>
-        </p:txBody>
-      </p:sp>
-      <p:pic>
-        <p:nvPicPr>
-          <p:cNvPr id="4" name="Picture 3">
-            <a:extLst>
-              <a:ext uri="{FF2B5EF4-FFF2-40B4-BE49-F238E27FC236}">
-                <a16:creationId xmlns:a16="http://schemas.microsoft.com/office/drawing/2014/main" id="{76C13D42-9B4D-40AE-8C43-86DD7A793B95}"/>
-              </a:ext>
-            </a:extLst>
-          </p:cNvPr>
-          <p:cNvPicPr>
-            <a:picLocks noChangeAspect="1"/>
-          </p:cNvPicPr>
-          <p:nvPr/>
-        </p:nvPicPr>
-        <p:blipFill>
-          <a:blip r:embed="rId2"/>
-          <a:stretch>
-            <a:fillRect/>
-          </a:stretch>
-        </p:blipFill>
-        <p:spPr>
-          <a:xfrm>
-            <a:off x="531271" y="3679310"/>
-            <a:ext cx="3545216" cy="3029548"/>
-          </a:xfrm>
-          <a:prstGeom prst="rect">
-            <a:avLst/>
-          </a:prstGeom>
-        </p:spPr>
-      </p:pic>
-      <p:pic>
-        <p:nvPicPr>
-          <p:cNvPr id="5" name="Picture 4">
-            <a:extLst>
-              <a:ext uri="{FF2B5EF4-FFF2-40B4-BE49-F238E27FC236}">
-                <a16:creationId xmlns:a16="http://schemas.microsoft.com/office/drawing/2014/main" id="{7C0159E8-1806-457F-A0E6-AFBC3479AC27}"/>
-              </a:ext>
-            </a:extLst>
-          </p:cNvPr>
-          <p:cNvPicPr>
-            <a:picLocks noChangeAspect="1"/>
-          </p:cNvPicPr>
-          <p:nvPr/>
-        </p:nvPicPr>
-        <p:blipFill>
-          <a:blip r:embed="rId3"/>
-          <a:stretch>
-            <a:fillRect/>
-          </a:stretch>
-        </p:blipFill>
-        <p:spPr>
-          <a:xfrm>
-            <a:off x="4476946" y="4021045"/>
-            <a:ext cx="7262490" cy="2605274"/>
-          </a:xfrm>
-          <a:prstGeom prst="rect">
-            <a:avLst/>
-          </a:prstGeom>
-        </p:spPr>
-      </p:pic>
-      <p:sp>
-        <p:nvSpPr>
-          <p:cNvPr id="6" name="TextBox 5">
-            <a:extLst>
-              <a:ext uri="{FF2B5EF4-FFF2-40B4-BE49-F238E27FC236}">
-                <a16:creationId xmlns:a16="http://schemas.microsoft.com/office/drawing/2014/main" id="{BD3FD7B2-3D2A-46AF-AA92-50813CE67BCF}"/>
-              </a:ext>
-            </a:extLst>
-          </p:cNvPr>
-          <p:cNvSpPr txBox="1"/>
-          <p:nvPr/>
-        </p:nvSpPr>
-        <p:spPr>
-          <a:xfrm>
-            <a:off x="531271" y="1704323"/>
-            <a:ext cx="6195723" cy="2308324"/>
-          </a:xfrm>
-          <a:prstGeom prst="rect">
-            <a:avLst/>
-          </a:prstGeom>
-          <a:noFill/>
-        </p:spPr>
-        <p:txBody>
-          <a:bodyPr wrap="square" rtlCol="0">
-            <a:spAutoFit/>
-          </a:bodyPr>
-          <a:lstStyle/>
-          <a:p>
-            <a:pPr marL="457200" indent="-457200">
-              <a:buFont typeface="Arial" panose="020B0604020202020204" pitchFamily="34" charset="0"/>
-              <a:buChar char="•"/>
-            </a:pPr>
-            <a:r>
-              <a:rPr lang="en-US" sz="2400" dirty="0"/>
-              <a:t>Surrogate model trained on Cora-ML, </a:t>
-            </a:r>
-            <a:r>
-              <a:rPr lang="en-US" sz="2400" dirty="0" err="1"/>
-              <a:t>Citeseer</a:t>
-            </a:r>
-            <a:r>
-              <a:rPr lang="en-US" sz="2400" dirty="0"/>
-              <a:t>, </a:t>
-            </a:r>
-            <a:r>
-              <a:rPr lang="en-US" sz="2400" dirty="0" err="1"/>
-              <a:t>Polblogs</a:t>
-            </a:r>
-            <a:r>
-              <a:rPr lang="en-US" sz="2400" dirty="0"/>
-              <a:t> graphs. </a:t>
-            </a:r>
-          </a:p>
-          <a:p>
-            <a:pPr marL="457200" indent="-457200">
-              <a:buFont typeface="Arial" panose="020B0604020202020204" pitchFamily="34" charset="0"/>
-              <a:buChar char="•"/>
-            </a:pPr>
-            <a:r>
-              <a:rPr lang="en-US" sz="2400" dirty="0"/>
-              <a:t>Adversarial graphs using </a:t>
-            </a:r>
-            <a:r>
-              <a:rPr lang="en-US" sz="2400" dirty="0" err="1"/>
-              <a:t>Nettack</a:t>
-            </a:r>
-            <a:r>
-              <a:rPr lang="en-US" sz="2400" dirty="0"/>
-              <a:t> (Direct) successful than </a:t>
-            </a:r>
-            <a:r>
-              <a:rPr lang="en-US" sz="2400" dirty="0" err="1"/>
-              <a:t>Nettack</a:t>
-            </a:r>
-            <a:r>
-              <a:rPr lang="en-US" sz="2400" dirty="0"/>
-              <a:t>-In(influence).</a:t>
-            </a:r>
-          </a:p>
-          <a:p>
-            <a:pPr marL="457200" indent="-457200">
-              <a:buFont typeface="Arial" panose="020B0604020202020204" pitchFamily="34" charset="0"/>
-              <a:buChar char="•"/>
-            </a:pPr>
-            <a:r>
-              <a:rPr lang="en-US" sz="2400" dirty="0"/>
-              <a:t>Unconstrained perturbations are detectable.</a:t>
-            </a:r>
-          </a:p>
-          <a:p>
-            <a:pPr marL="457200" indent="-457200">
-              <a:buFont typeface="Arial" panose="020B0604020202020204" pitchFamily="34" charset="0"/>
-              <a:buChar char="•"/>
-            </a:pPr>
-            <a:endParaRPr lang="en-US" sz="2400" dirty="0"/>
-          </a:p>
-        </p:txBody>
-      </p:sp>
-      <p:pic>
-        <p:nvPicPr>
-          <p:cNvPr id="7" name="Picture 6">
-            <a:extLst>
-              <a:ext uri="{FF2B5EF4-FFF2-40B4-BE49-F238E27FC236}">
-                <a16:creationId xmlns:a16="http://schemas.microsoft.com/office/drawing/2014/main" id="{533F7C3E-7C93-44B8-8D07-8600F7D28DAC}"/>
-              </a:ext>
-            </a:extLst>
-          </p:cNvPr>
-          <p:cNvPicPr>
-            <a:picLocks noChangeAspect="1"/>
-          </p:cNvPicPr>
-          <p:nvPr/>
-        </p:nvPicPr>
-        <p:blipFill>
-          <a:blip r:embed="rId4"/>
-          <a:stretch>
-            <a:fillRect/>
-          </a:stretch>
-        </p:blipFill>
-        <p:spPr>
-          <a:xfrm>
-            <a:off x="7127453" y="1499395"/>
-            <a:ext cx="3979563" cy="2521650"/>
-          </a:xfrm>
-          <a:prstGeom prst="rect">
-            <a:avLst/>
-          </a:prstGeom>
-        </p:spPr>
-      </p:pic>
-    </p:spTree>
-    <p:extLst>
-      <p:ext uri="{BB962C8B-B14F-4D97-AF65-F5344CB8AC3E}">
-        <p14:creationId xmlns:p14="http://schemas.microsoft.com/office/powerpoint/2010/main" val="971289627"/>
-      </p:ext>
-    </p:extLst>
-  </p:cSld>
-  <p:clrMapOvr>
-    <a:masterClrMapping/>
-  </p:clrMapOvr>
-</p:sld>
-</file>
-
-<file path=ppt/slides/slide22.xml><?xml version="1.0" encoding="utf-8"?>
-<p:sld xmlns:a="http://schemas.openxmlformats.org/drawingml/2006/main" xmlns:r="http://schemas.openxmlformats.org/officeDocument/2006/relationships" xmlns:p="http://schemas.openxmlformats.org/presentationml/2006/main">
-  <p:cSld>
-    <p:spTree>
-      <p:nvGrpSpPr>
-        <p:cNvPr id="1" name=""/>
-        <p:cNvGrpSpPr/>
-        <p:nvPr/>
-      </p:nvGrpSpPr>
-      <p:grpSpPr>
-        <a:xfrm>
-          <a:off x="0" y="0"/>
-          <a:ext cx="0" cy="0"/>
-          <a:chOff x="0" y="0"/>
-          <a:chExt cx="0" cy="0"/>
-        </a:xfrm>
-      </p:grpSpPr>
-      <p:sp>
-        <p:nvSpPr>
-          <p:cNvPr id="2" name="Title 1">
-            <a:extLst>
-              <a:ext uri="{FF2B5EF4-FFF2-40B4-BE49-F238E27FC236}">
-                <a16:creationId xmlns:a16="http://schemas.microsoft.com/office/drawing/2014/main" id="{EF0004AB-9055-4653-A73D-30D076F3CD6F}"/>
-              </a:ext>
-            </a:extLst>
-          </p:cNvPr>
-          <p:cNvSpPr>
-            <a:spLocks noGrp="1"/>
-          </p:cNvSpPr>
-          <p:nvPr>
-            <p:ph type="title"/>
-          </p:nvPr>
-        </p:nvSpPr>
-        <p:spPr/>
-        <p:txBody>
-          <a:bodyPr/>
-          <a:lstStyle/>
-          <a:p>
-            <a:r>
-              <a:rPr lang="en-US" dirty="0"/>
-              <a:t>Experimental result: Transfer to actual models</a:t>
-            </a:r>
-          </a:p>
-        </p:txBody>
-      </p:sp>
-      <p:pic>
-        <p:nvPicPr>
-          <p:cNvPr id="4" name="Content Placeholder 3">
-            <a:extLst>
-              <a:ext uri="{FF2B5EF4-FFF2-40B4-BE49-F238E27FC236}">
-                <a16:creationId xmlns:a16="http://schemas.microsoft.com/office/drawing/2014/main" id="{3BBD33EF-BFBC-46D2-AF23-C76B5935CA0F}"/>
-              </a:ext>
-            </a:extLst>
-          </p:cNvPr>
-          <p:cNvPicPr>
-            <a:picLocks noGrp="1" noChangeAspect="1"/>
-          </p:cNvPicPr>
-          <p:nvPr>
-            <p:ph idx="1"/>
-          </p:nvPr>
-        </p:nvPicPr>
-        <p:blipFill>
-          <a:blip r:embed="rId2"/>
-          <a:stretch>
-            <a:fillRect/>
-          </a:stretch>
-        </p:blipFill>
-        <p:spPr>
-          <a:xfrm>
-            <a:off x="1434565" y="3728185"/>
-            <a:ext cx="3180713" cy="2647072"/>
-          </a:xfrm>
-          <a:prstGeom prst="rect">
-            <a:avLst/>
-          </a:prstGeom>
-        </p:spPr>
-      </p:pic>
-      <p:grpSp>
-        <p:nvGrpSpPr>
-          <p:cNvPr id="7" name="Group 6">
-            <a:extLst>
-              <a:ext uri="{FF2B5EF4-FFF2-40B4-BE49-F238E27FC236}">
-                <a16:creationId xmlns:a16="http://schemas.microsoft.com/office/drawing/2014/main" id="{1875FC23-12F1-42CF-9EF6-6632EF54D358}"/>
-              </a:ext>
-            </a:extLst>
-          </p:cNvPr>
-          <p:cNvGrpSpPr/>
-          <p:nvPr/>
-        </p:nvGrpSpPr>
-        <p:grpSpPr>
-          <a:xfrm>
-            <a:off x="6876384" y="3793033"/>
-            <a:ext cx="3238208" cy="2740584"/>
-            <a:chOff x="7060286" y="2189003"/>
-            <a:chExt cx="3238208" cy="2740584"/>
-          </a:xfrm>
-        </p:grpSpPr>
-        <p:pic>
-          <p:nvPicPr>
-            <p:cNvPr id="5" name="Picture 4">
-              <a:extLst>
-                <a:ext uri="{FF2B5EF4-FFF2-40B4-BE49-F238E27FC236}">
-                  <a16:creationId xmlns:a16="http://schemas.microsoft.com/office/drawing/2014/main" id="{652395C3-474F-4410-99A3-AFE8A050005C}"/>
-                </a:ext>
-              </a:extLst>
-            </p:cNvPr>
-            <p:cNvPicPr>
-              <a:picLocks noChangeAspect="1"/>
-            </p:cNvPicPr>
-            <p:nvPr/>
-          </p:nvPicPr>
-          <p:blipFill>
-            <a:blip r:embed="rId3"/>
-            <a:stretch>
-              <a:fillRect/>
-            </a:stretch>
-          </p:blipFill>
-          <p:spPr>
-            <a:xfrm>
-              <a:off x="7060286" y="2189003"/>
-              <a:ext cx="3069631" cy="2673914"/>
-            </a:xfrm>
-            <a:prstGeom prst="rect">
-              <a:avLst/>
-            </a:prstGeom>
-          </p:spPr>
-        </p:pic>
-        <p:sp>
-          <p:nvSpPr>
-            <p:cNvPr id="6" name="Rectangle 5">
-              <a:extLst>
-                <a:ext uri="{FF2B5EF4-FFF2-40B4-BE49-F238E27FC236}">
-                  <a16:creationId xmlns:a16="http://schemas.microsoft.com/office/drawing/2014/main" id="{FC2B6175-910D-495B-9858-6E999351BA38}"/>
-                </a:ext>
-              </a:extLst>
-            </p:cNvPr>
-            <p:cNvSpPr/>
-            <p:nvPr/>
-          </p:nvSpPr>
-          <p:spPr>
-            <a:xfrm>
-              <a:off x="9930691" y="4612867"/>
-              <a:ext cx="367803" cy="316720"/>
-            </a:xfrm>
-            <a:prstGeom prst="rect">
-              <a:avLst/>
-            </a:prstGeom>
-            <a:solidFill>
-              <a:schemeClr val="bg1"/>
-            </a:solidFill>
-            <a:ln>
-              <a:solidFill>
-                <a:schemeClr val="bg1"/>
-              </a:solidFill>
-            </a:ln>
-          </p:spPr>
-          <p:style>
-            <a:lnRef idx="2">
-              <a:schemeClr val="accent1">
-                <a:shade val="50000"/>
-              </a:schemeClr>
-            </a:lnRef>
-            <a:fillRef idx="1">
-              <a:schemeClr val="accent1"/>
-            </a:fillRef>
-            <a:effectRef idx="0">
-              <a:schemeClr val="accent1"/>
-            </a:effectRef>
-            <a:fontRef idx="minor">
-              <a:schemeClr val="lt1"/>
-            </a:fontRef>
-          </p:style>
-          <p:txBody>
-            <a:bodyPr rtlCol="0" anchor="ctr"/>
-            <a:lstStyle/>
-            <a:p>
-              <a:pPr algn="ctr"/>
-              <a:endParaRPr lang="en-US"/>
-            </a:p>
-          </p:txBody>
-        </p:sp>
-      </p:grpSp>
-      <p:sp>
-        <p:nvSpPr>
-          <p:cNvPr id="8" name="TextBox 7">
-            <a:extLst>
-              <a:ext uri="{FF2B5EF4-FFF2-40B4-BE49-F238E27FC236}">
-                <a16:creationId xmlns:a16="http://schemas.microsoft.com/office/drawing/2014/main" id="{AFB94E67-7B52-4177-A2EC-39F76C95223A}"/>
-              </a:ext>
-            </a:extLst>
-          </p:cNvPr>
-          <p:cNvSpPr txBox="1"/>
-          <p:nvPr/>
-        </p:nvSpPr>
-        <p:spPr>
-          <a:xfrm>
-            <a:off x="740715" y="1632118"/>
-            <a:ext cx="10413858" cy="1938992"/>
-          </a:xfrm>
-          <a:prstGeom prst="rect">
-            <a:avLst/>
-          </a:prstGeom>
-          <a:noFill/>
-        </p:spPr>
-        <p:txBody>
-          <a:bodyPr wrap="square" rtlCol="0">
-            <a:spAutoFit/>
-          </a:bodyPr>
-          <a:lstStyle/>
-          <a:p>
-            <a:pPr marL="285750" indent="-285750">
-              <a:buFont typeface="Arial" panose="020B0604020202020204" pitchFamily="34" charset="0"/>
-              <a:buChar char="•"/>
-            </a:pPr>
-            <a:r>
-              <a:rPr lang="en-US" sz="2400" dirty="0"/>
-              <a:t>Adversarial Graphs from surrogate model evaluated on GCN for both Evasion attacks and Poisoning attacks.</a:t>
-            </a:r>
-          </a:p>
-          <a:p>
-            <a:pPr marL="285750" indent="-285750">
-              <a:buFont typeface="Arial" panose="020B0604020202020204" pitchFamily="34" charset="0"/>
-              <a:buChar char="•"/>
-            </a:pPr>
-            <a:r>
-              <a:rPr lang="en-US" sz="2400" dirty="0"/>
-              <a:t>Surrogate model is a good approximator for true models. </a:t>
-            </a:r>
-          </a:p>
-          <a:p>
-            <a:pPr marL="285750" indent="-285750">
-              <a:buFont typeface="Arial" panose="020B0604020202020204" pitchFamily="34" charset="0"/>
-              <a:buChar char="•"/>
-            </a:pPr>
-            <a:r>
-              <a:rPr lang="en-US" sz="2400" dirty="0"/>
-              <a:t>Both Evasion and poisoning attacks are successful.  </a:t>
-            </a:r>
-          </a:p>
-          <a:p>
-            <a:pPr marL="285750" indent="-285750">
-              <a:buFont typeface="Arial" panose="020B0604020202020204" pitchFamily="34" charset="0"/>
-              <a:buChar char="•"/>
-            </a:pPr>
-            <a:r>
-              <a:rPr lang="en-US" sz="2400" dirty="0"/>
-              <a:t>Direct attacks much successful than gradient attacks </a:t>
-            </a:r>
-          </a:p>
-        </p:txBody>
-      </p:sp>
-    </p:spTree>
-    <p:extLst>
-      <p:ext uri="{BB962C8B-B14F-4D97-AF65-F5344CB8AC3E}">
-        <p14:creationId xmlns:p14="http://schemas.microsoft.com/office/powerpoint/2010/main" val="2685169693"/>
-      </p:ext>
-    </p:extLst>
-  </p:cSld>
-  <p:clrMapOvr>
-    <a:masterClrMapping/>
-  </p:clrMapOvr>
-</p:sld>
-</file>
-
-<file path=ppt/slides/slide23.xml><?xml version="1.0" encoding="utf-8"?>
-<p:sld xmlns:a="http://schemas.openxmlformats.org/drawingml/2006/main" xmlns:r="http://schemas.openxmlformats.org/officeDocument/2006/relationships" xmlns:p="http://schemas.openxmlformats.org/presentationml/2006/main">
-  <p:cSld>
-    <p:spTree>
-      <p:nvGrpSpPr>
-        <p:cNvPr id="1" name=""/>
-        <p:cNvGrpSpPr/>
-        <p:nvPr/>
-      </p:nvGrpSpPr>
-      <p:grpSpPr>
-        <a:xfrm>
-          <a:off x="0" y="0"/>
-          <a:ext cx="0" cy="0"/>
-          <a:chOff x="0" y="0"/>
-          <a:chExt cx="0" cy="0"/>
-        </a:xfrm>
-      </p:grpSpPr>
-      <p:sp>
-        <p:nvSpPr>
-          <p:cNvPr id="2" name="Title 1">
-            <a:extLst>
-              <a:ext uri="{FF2B5EF4-FFF2-40B4-BE49-F238E27FC236}">
-                <a16:creationId xmlns:a16="http://schemas.microsoft.com/office/drawing/2014/main" id="{F929B5C6-06A9-4117-ACE8-3026A277D8A5}"/>
-              </a:ext>
-            </a:extLst>
-          </p:cNvPr>
-          <p:cNvSpPr>
-            <a:spLocks noGrp="1"/>
-          </p:cNvSpPr>
-          <p:nvPr>
-            <p:ph type="title"/>
-          </p:nvPr>
-        </p:nvSpPr>
-        <p:spPr>
-          <a:xfrm>
-            <a:off x="838199" y="365125"/>
-            <a:ext cx="10814015" cy="1325563"/>
-          </a:xfrm>
-        </p:spPr>
-        <p:txBody>
-          <a:bodyPr/>
-          <a:lstStyle/>
-          <a:p>
-            <a:r>
-              <a:rPr lang="en-US" dirty="0"/>
-              <a:t>Experimental results: Limited Graph knowledge</a:t>
-            </a:r>
-          </a:p>
-        </p:txBody>
-      </p:sp>
-      <p:pic>
-        <p:nvPicPr>
-          <p:cNvPr id="4" name="Picture 3">
-            <a:extLst>
-              <a:ext uri="{FF2B5EF4-FFF2-40B4-BE49-F238E27FC236}">
-                <a16:creationId xmlns:a16="http://schemas.microsoft.com/office/drawing/2014/main" id="{3057B196-BF73-42E4-9E54-37FC042EE379}"/>
-              </a:ext>
-            </a:extLst>
-          </p:cNvPr>
-          <p:cNvPicPr>
-            <a:picLocks noChangeAspect="1"/>
-          </p:cNvPicPr>
-          <p:nvPr/>
-        </p:nvPicPr>
-        <p:blipFill>
-          <a:blip r:embed="rId2"/>
-          <a:stretch>
-            <a:fillRect/>
-          </a:stretch>
-        </p:blipFill>
-        <p:spPr>
-          <a:xfrm>
-            <a:off x="2859269" y="3949806"/>
-            <a:ext cx="6340923" cy="2386990"/>
-          </a:xfrm>
-          <a:prstGeom prst="rect">
-            <a:avLst/>
-          </a:prstGeom>
-        </p:spPr>
-      </p:pic>
-      <p:sp>
-        <p:nvSpPr>
-          <p:cNvPr id="5" name="TextBox 4">
-            <a:extLst>
-              <a:ext uri="{FF2B5EF4-FFF2-40B4-BE49-F238E27FC236}">
-                <a16:creationId xmlns:a16="http://schemas.microsoft.com/office/drawing/2014/main" id="{9D18A9B8-FCD3-4831-ABEF-B1BA93E3F720}"/>
-              </a:ext>
-            </a:extLst>
-          </p:cNvPr>
-          <p:cNvSpPr txBox="1"/>
-          <p:nvPr/>
-        </p:nvSpPr>
-        <p:spPr>
-          <a:xfrm>
-            <a:off x="950158" y="1604032"/>
-            <a:ext cx="9757006" cy="2246769"/>
-          </a:xfrm>
-          <a:prstGeom prst="rect">
-            <a:avLst/>
-          </a:prstGeom>
-          <a:noFill/>
-        </p:spPr>
-        <p:txBody>
-          <a:bodyPr wrap="square" rtlCol="0">
-            <a:spAutoFit/>
-          </a:bodyPr>
-          <a:lstStyle/>
-          <a:p>
-            <a:pPr marL="285750" indent="-285750">
-              <a:buFont typeface="Arial" panose="020B0604020202020204" pitchFamily="34" charset="0"/>
-              <a:buChar char="•"/>
-            </a:pPr>
-            <a:r>
-              <a:rPr lang="en-US" sz="2000" dirty="0"/>
-              <a:t>Assume that attacker does not know the complete graph but only a subset of the graph. </a:t>
-            </a:r>
-          </a:p>
-          <a:p>
-            <a:pPr marL="285750" indent="-285750">
-              <a:buFont typeface="Arial" panose="020B0604020202020204" pitchFamily="34" charset="0"/>
-              <a:buChar char="•"/>
-            </a:pPr>
-            <a:endParaRPr lang="en-US" sz="2000" dirty="0"/>
-          </a:p>
-          <a:p>
-            <a:pPr marL="285750" indent="-285750">
-              <a:buFont typeface="Arial" panose="020B0604020202020204" pitchFamily="34" charset="0"/>
-              <a:buChar char="•"/>
-            </a:pPr>
-            <a:r>
-              <a:rPr lang="en-US" sz="2000" dirty="0"/>
-              <a:t>Used subgraphs of increasing size from the target node (1-hop, 2 hop etc.) to generate the adversarial subgraphs. </a:t>
-            </a:r>
-          </a:p>
-          <a:p>
-            <a:pPr marL="285750" indent="-285750">
-              <a:buFont typeface="Arial" panose="020B0604020202020204" pitchFamily="34" charset="0"/>
-              <a:buChar char="•"/>
-            </a:pPr>
-            <a:endParaRPr lang="en-US" sz="2000" dirty="0"/>
-          </a:p>
-          <a:p>
-            <a:pPr marL="285750" indent="-285750">
-              <a:buFont typeface="Arial" panose="020B0604020202020204" pitchFamily="34" charset="0"/>
-              <a:buChar char="•"/>
-            </a:pPr>
-            <a:r>
-              <a:rPr lang="en-US" sz="2000" dirty="0"/>
-              <a:t>Direct attack successful for even 10% of the graph access, with expense of slightly more perturbations. </a:t>
-            </a:r>
-          </a:p>
-        </p:txBody>
-      </p:sp>
-    </p:spTree>
-    <p:extLst>
-      <p:ext uri="{BB962C8B-B14F-4D97-AF65-F5344CB8AC3E}">
-        <p14:creationId xmlns:p14="http://schemas.microsoft.com/office/powerpoint/2010/main" val="4047901213"/>
-      </p:ext>
-    </p:extLst>
-  </p:cSld>
-  <p:clrMapOvr>
-    <a:masterClrMapping/>
-  </p:clrMapOvr>
-</p:sld>
-</file>
-
-<file path=ppt/slides/slide3.xml><?xml version="1.0" encoding="utf-8"?>
-<p:sld xmlns:a="http://schemas.openxmlformats.org/drawingml/2006/main" xmlns:r="http://schemas.openxmlformats.org/officeDocument/2006/relationships" xmlns:p="http://schemas.openxmlformats.org/presentationml/2006/main">
-  <p:cSld>
-    <p:spTree>
-      <p:nvGrpSpPr>
-        <p:cNvPr id="1" name=""/>
-        <p:cNvGrpSpPr/>
-        <p:nvPr/>
-      </p:nvGrpSpPr>
-      <p:grpSpPr>
-        <a:xfrm>
-          <a:off x="0" y="0"/>
-          <a:ext cx="0" cy="0"/>
-          <a:chOff x="0" y="0"/>
-          <a:chExt cx="0" cy="0"/>
-        </a:xfrm>
-      </p:grpSpPr>
-      <p:sp>
-        <p:nvSpPr>
-          <p:cNvPr id="2" name="Title 1">
-            <a:extLst>
-              <a:ext uri="{FF2B5EF4-FFF2-40B4-BE49-F238E27FC236}">
-                <a16:creationId xmlns:a16="http://schemas.microsoft.com/office/drawing/2014/main" id="{DE77978A-0D93-4519-AE9A-E8E546AC7980}"/>
-              </a:ext>
-            </a:extLst>
-          </p:cNvPr>
-          <p:cNvSpPr>
-            <a:spLocks noGrp="1"/>
-          </p:cNvSpPr>
-          <p:nvPr>
-            <p:ph type="title"/>
-          </p:nvPr>
-        </p:nvSpPr>
-        <p:spPr>
-          <a:xfrm>
-            <a:off x="838200" y="365125"/>
-            <a:ext cx="10515600" cy="1325563"/>
-          </a:xfrm>
-        </p:spPr>
-        <p:txBody>
-          <a:bodyPr/>
-          <a:lstStyle/>
-          <a:p>
-            <a:pPr algn="ctr"/>
-            <a:r>
-              <a:rPr lang="en-US"/>
-              <a:t>Graph Neural Networks (GNNs)</a:t>
-            </a:r>
-            <a:endParaRPr lang="en-US" dirty="0"/>
-          </a:p>
-        </p:txBody>
-      </p:sp>
-      <p:pic>
-        <p:nvPicPr>
-          <p:cNvPr id="5" name="Picture 4">
-            <a:extLst>
-              <a:ext uri="{FF2B5EF4-FFF2-40B4-BE49-F238E27FC236}">
-                <a16:creationId xmlns:a16="http://schemas.microsoft.com/office/drawing/2014/main" id="{C95D1410-FB71-4E1E-AE8D-9C00632052A3}"/>
-              </a:ext>
-            </a:extLst>
-          </p:cNvPr>
-          <p:cNvPicPr>
-            <a:picLocks noChangeAspect="1"/>
-          </p:cNvPicPr>
-          <p:nvPr/>
-        </p:nvPicPr>
-        <p:blipFill>
-          <a:blip r:embed="rId2"/>
-          <a:stretch>
-            <a:fillRect/>
-          </a:stretch>
-        </p:blipFill>
-        <p:spPr>
-          <a:xfrm>
-            <a:off x="934078" y="4739160"/>
-            <a:ext cx="4464090" cy="1027136"/>
-          </a:xfrm>
-          <a:prstGeom prst="rect">
-            <a:avLst/>
-          </a:prstGeom>
-        </p:spPr>
-      </p:pic>
-      <p:pic>
-        <p:nvPicPr>
-          <p:cNvPr id="10" name="Picture 9">
-            <a:extLst>
-              <a:ext uri="{FF2B5EF4-FFF2-40B4-BE49-F238E27FC236}">
-                <a16:creationId xmlns:a16="http://schemas.microsoft.com/office/drawing/2014/main" id="{354327C7-1791-4599-8D93-5F1C9B425F52}"/>
-              </a:ext>
-            </a:extLst>
-          </p:cNvPr>
-          <p:cNvPicPr>
-            <a:picLocks noChangeAspect="1"/>
-          </p:cNvPicPr>
-          <p:nvPr/>
-        </p:nvPicPr>
-        <p:blipFill>
-          <a:blip r:embed="rId3"/>
-          <a:stretch>
-            <a:fillRect/>
-          </a:stretch>
-        </p:blipFill>
-        <p:spPr>
-          <a:xfrm>
-            <a:off x="5604961" y="1696146"/>
-            <a:ext cx="5542046" cy="4070150"/>
-          </a:xfrm>
-          <a:prstGeom prst="rect">
-            <a:avLst/>
-          </a:prstGeom>
-        </p:spPr>
-      </p:pic>
-      <p:pic>
-        <p:nvPicPr>
-          <p:cNvPr id="12" name="Picture 11">
-            <a:extLst>
-              <a:ext uri="{FF2B5EF4-FFF2-40B4-BE49-F238E27FC236}">
-                <a16:creationId xmlns:a16="http://schemas.microsoft.com/office/drawing/2014/main" id="{F4E39B50-5023-45D0-9B52-23D62E381EE1}"/>
-              </a:ext>
-            </a:extLst>
-          </p:cNvPr>
-          <p:cNvPicPr>
-            <a:picLocks noChangeAspect="1"/>
-          </p:cNvPicPr>
-          <p:nvPr/>
-        </p:nvPicPr>
-        <p:blipFill>
-          <a:blip r:embed="rId4"/>
-          <a:stretch>
-            <a:fillRect/>
-          </a:stretch>
-        </p:blipFill>
-        <p:spPr>
-          <a:xfrm>
-            <a:off x="1861485" y="1868428"/>
-            <a:ext cx="2609275" cy="2325096"/>
-          </a:xfrm>
-          <a:prstGeom prst="rect">
-            <a:avLst/>
-          </a:prstGeom>
-        </p:spPr>
-      </p:pic>
-    </p:spTree>
-    <p:extLst>
-      <p:ext uri="{BB962C8B-B14F-4D97-AF65-F5344CB8AC3E}">
-        <p14:creationId xmlns:p14="http://schemas.microsoft.com/office/powerpoint/2010/main" val="1228162489"/>
-      </p:ext>
-    </p:extLst>
-  </p:cSld>
-  <p:clrMapOvr>
-    <a:masterClrMapping/>
-  </p:clrMapOvr>
-</p:sld>
-</file>
-
-<file path=ppt/slides/slide4.xml><?xml version="1.0" encoding="utf-8"?>
-<p:sld xmlns:a="http://schemas.openxmlformats.org/drawingml/2006/main" xmlns:r="http://schemas.openxmlformats.org/officeDocument/2006/relationships" xmlns:p="http://schemas.openxmlformats.org/presentationml/2006/main">
-  <p:cSld>
-    <p:spTree>
-      <p:nvGrpSpPr>
-        <p:cNvPr id="1" name=""/>
-        <p:cNvGrpSpPr/>
-        <p:nvPr/>
-      </p:nvGrpSpPr>
-      <p:grpSpPr>
-        <a:xfrm>
-          <a:off x="0" y="0"/>
-          <a:ext cx="0" cy="0"/>
-          <a:chOff x="0" y="0"/>
-          <a:chExt cx="0" cy="0"/>
-        </a:xfrm>
-      </p:grpSpPr>
-      <p:sp>
-        <p:nvSpPr>
-          <p:cNvPr id="2" name="Title 1">
-            <a:extLst>
-              <a:ext uri="{FF2B5EF4-FFF2-40B4-BE49-F238E27FC236}">
-                <a16:creationId xmlns:a16="http://schemas.microsoft.com/office/drawing/2014/main" id="{3729217E-D96B-41E5-87FB-E34337085BAF}"/>
-              </a:ext>
-            </a:extLst>
-          </p:cNvPr>
-          <p:cNvSpPr>
-            <a:spLocks noGrp="1"/>
-          </p:cNvSpPr>
-          <p:nvPr>
-            <p:ph type="title"/>
-          </p:nvPr>
-        </p:nvSpPr>
-        <p:spPr/>
-        <p:txBody>
-          <a:bodyPr/>
-          <a:lstStyle/>
-          <a:p>
-            <a:pPr algn="ctr"/>
-            <a:r>
-              <a:rPr lang="en-US" dirty="0"/>
-              <a:t>GNN unrolled over time</a:t>
-            </a:r>
-          </a:p>
-        </p:txBody>
-      </p:sp>
-      <p:pic>
-        <p:nvPicPr>
-          <p:cNvPr id="4" name="Picture 3">
-            <a:extLst>
-              <a:ext uri="{FF2B5EF4-FFF2-40B4-BE49-F238E27FC236}">
-                <a16:creationId xmlns:a16="http://schemas.microsoft.com/office/drawing/2014/main" id="{487282CD-C42D-4C56-8EE8-2C9E5762A628}"/>
-              </a:ext>
-            </a:extLst>
-          </p:cNvPr>
-          <p:cNvPicPr>
-            <a:picLocks noChangeAspect="1"/>
-          </p:cNvPicPr>
-          <p:nvPr/>
-        </p:nvPicPr>
-        <p:blipFill>
-          <a:blip r:embed="rId2"/>
-          <a:stretch>
-            <a:fillRect/>
-          </a:stretch>
-        </p:blipFill>
-        <p:spPr>
-          <a:xfrm>
-            <a:off x="2887938" y="1578304"/>
-            <a:ext cx="6920151" cy="3913121"/>
-          </a:xfrm>
-          <a:prstGeom prst="rect">
-            <a:avLst/>
-          </a:prstGeom>
-        </p:spPr>
-      </p:pic>
-    </p:spTree>
-    <p:extLst>
-      <p:ext uri="{BB962C8B-B14F-4D97-AF65-F5344CB8AC3E}">
-        <p14:creationId xmlns:p14="http://schemas.microsoft.com/office/powerpoint/2010/main" val="3525249349"/>
-      </p:ext>
-    </p:extLst>
-  </p:cSld>
-  <p:clrMapOvr>
-    <a:masterClrMapping/>
-  </p:clrMapOvr>
-</p:sld>
-</file>
-
-<file path=ppt/slides/slide5.xml><?xml version="1.0" encoding="utf-8"?>
-<p:sld xmlns:a="http://schemas.openxmlformats.org/drawingml/2006/main" xmlns:r="http://schemas.openxmlformats.org/officeDocument/2006/relationships" xmlns:p="http://schemas.openxmlformats.org/presentationml/2006/main">
-  <p:cSld>
-    <p:spTree>
-      <p:nvGrpSpPr>
-        <p:cNvPr id="1" name=""/>
-        <p:cNvGrpSpPr/>
-        <p:nvPr/>
-      </p:nvGrpSpPr>
-      <p:grpSpPr>
-        <a:xfrm>
-          <a:off x="0" y="0"/>
-          <a:ext cx="0" cy="0"/>
-          <a:chOff x="0" y="0"/>
-          <a:chExt cx="0" cy="0"/>
-        </a:xfrm>
-      </p:grpSpPr>
-      <p:sp>
-        <p:nvSpPr>
-          <p:cNvPr id="2" name="Title 1">
-            <a:extLst>
-              <a:ext uri="{FF2B5EF4-FFF2-40B4-BE49-F238E27FC236}">
-                <a16:creationId xmlns:a16="http://schemas.microsoft.com/office/drawing/2014/main" id="{224758A1-DAA1-4587-9194-70267AC5831E}"/>
-              </a:ext>
-            </a:extLst>
-          </p:cNvPr>
-          <p:cNvSpPr>
-            <a:spLocks noGrp="1"/>
-          </p:cNvSpPr>
-          <p:nvPr>
-            <p:ph type="title"/>
-          </p:nvPr>
-        </p:nvSpPr>
-        <p:spPr>
-          <a:xfrm>
-            <a:off x="838200" y="365125"/>
-            <a:ext cx="10515600" cy="1325563"/>
-          </a:xfrm>
-        </p:spPr>
-        <p:txBody>
-          <a:bodyPr/>
-          <a:lstStyle/>
-          <a:p>
-            <a:pPr algn="ctr"/>
-            <a:r>
-              <a:rPr lang="en-US" dirty="0"/>
-              <a:t>Graph Convolutional Networks (GCN)</a:t>
-            </a:r>
-          </a:p>
-        </p:txBody>
-      </p:sp>
-      <p:pic>
-        <p:nvPicPr>
-          <p:cNvPr id="4" name="Picture 3">
-            <a:extLst>
-              <a:ext uri="{FF2B5EF4-FFF2-40B4-BE49-F238E27FC236}">
-                <a16:creationId xmlns:a16="http://schemas.microsoft.com/office/drawing/2014/main" id="{21ABEBD2-53BA-4C34-97F9-89689E295A21}"/>
-              </a:ext>
-            </a:extLst>
-          </p:cNvPr>
-          <p:cNvPicPr>
-            <a:picLocks noChangeAspect="1"/>
-          </p:cNvPicPr>
-          <p:nvPr/>
-        </p:nvPicPr>
-        <p:blipFill>
-          <a:blip r:embed="rId2"/>
-          <a:stretch>
-            <a:fillRect/>
-          </a:stretch>
-        </p:blipFill>
-        <p:spPr>
-          <a:xfrm>
-            <a:off x="2885489" y="1742645"/>
-            <a:ext cx="5926466" cy="2851965"/>
-          </a:xfrm>
-          <a:prstGeom prst="rect">
-            <a:avLst/>
-          </a:prstGeom>
-        </p:spPr>
-      </p:pic>
-      <p:pic>
-        <p:nvPicPr>
-          <p:cNvPr id="5" name="Picture 4">
-            <a:extLst>
-              <a:ext uri="{FF2B5EF4-FFF2-40B4-BE49-F238E27FC236}">
-                <a16:creationId xmlns:a16="http://schemas.microsoft.com/office/drawing/2014/main" id="{5C368282-6027-460C-A562-1F1821DB30A2}"/>
-              </a:ext>
-            </a:extLst>
-          </p:cNvPr>
-          <p:cNvPicPr>
-            <a:picLocks noChangeAspect="1"/>
-          </p:cNvPicPr>
-          <p:nvPr/>
-        </p:nvPicPr>
-        <p:blipFill>
-          <a:blip r:embed="rId3"/>
-          <a:stretch>
-            <a:fillRect/>
-          </a:stretch>
-        </p:blipFill>
-        <p:spPr>
-          <a:xfrm>
-            <a:off x="3300598" y="4924480"/>
-            <a:ext cx="4567113" cy="779454"/>
-          </a:xfrm>
-          <a:prstGeom prst="rect">
-            <a:avLst/>
-          </a:prstGeom>
-        </p:spPr>
-      </p:pic>
-    </p:spTree>
-    <p:extLst>
-      <p:ext uri="{BB962C8B-B14F-4D97-AF65-F5344CB8AC3E}">
-        <p14:creationId xmlns:p14="http://schemas.microsoft.com/office/powerpoint/2010/main" val="1605795002"/>
-      </p:ext>
-    </p:extLst>
-  </p:cSld>
-  <p:clrMapOvr>
-    <a:masterClrMapping/>
-  </p:clrMapOvr>
-</p:sld>
-</file>
-
-<file path=ppt/slides/slide6.xml><?xml version="1.0" encoding="utf-8"?>
 <p:sld xmlns:a="http://schemas.openxmlformats.org/drawingml/2006/main" xmlns:r="http://schemas.openxmlformats.org/officeDocument/2006/relationships" xmlns:p="http://schemas.openxmlformats.org/presentationml/2006/main">
   <p:cSld>
     <p:spTree>
@@ -9484,7 +6713,3431 @@
     </p:spTree>
     <p:extLst>
       <p:ext uri="{BB962C8B-B14F-4D97-AF65-F5344CB8AC3E}">
-        <p14:creationId xmlns:p14="http://schemas.microsoft.com/office/powerpoint/2010/main" val="431219777"/>
+        <p14:creationId xmlns:p14="http://schemas.microsoft.com/office/powerpoint/2010/main" val="2479495207"/>
+      </p:ext>
+    </p:extLst>
+  </p:cSld>
+  <p:clrMapOvr>
+    <a:masterClrMapping/>
+  </p:clrMapOvr>
+</p:sld>
+</file>
+
+<file path=ppt/slides/slide20.xml><?xml version="1.0" encoding="utf-8"?>
+<p:sld xmlns:a="http://schemas.openxmlformats.org/drawingml/2006/main" xmlns:r="http://schemas.openxmlformats.org/officeDocument/2006/relationships" xmlns:p="http://schemas.openxmlformats.org/presentationml/2006/main">
+  <p:cSld>
+    <p:spTree>
+      <p:nvGrpSpPr>
+        <p:cNvPr id="1" name=""/>
+        <p:cNvGrpSpPr/>
+        <p:nvPr/>
+      </p:nvGrpSpPr>
+      <p:grpSpPr>
+        <a:xfrm>
+          <a:off x="0" y="0"/>
+          <a:ext cx="0" cy="0"/>
+          <a:chOff x="0" y="0"/>
+          <a:chExt cx="0" cy="0"/>
+        </a:xfrm>
+      </p:grpSpPr>
+      <p:sp>
+        <p:nvSpPr>
+          <p:cNvPr id="2" name="Title 1">
+            <a:extLst>
+              <a:ext uri="{FF2B5EF4-FFF2-40B4-BE49-F238E27FC236}">
+                <a16:creationId xmlns:a16="http://schemas.microsoft.com/office/drawing/2014/main" id="{24D6261E-C9C4-4F27-8FE7-01FCDEA944CC}"/>
+              </a:ext>
+            </a:extLst>
+          </p:cNvPr>
+          <p:cNvSpPr>
+            <a:spLocks noGrp="1"/>
+          </p:cNvSpPr>
+          <p:nvPr>
+            <p:ph type="title"/>
+          </p:nvPr>
+        </p:nvSpPr>
+        <p:spPr/>
+        <p:txBody>
+          <a:bodyPr/>
+          <a:lstStyle/>
+          <a:p>
+            <a:r>
+              <a:rPr lang="en-US" dirty="0"/>
+              <a:t>Data poisoning attack</a:t>
+            </a:r>
+          </a:p>
+        </p:txBody>
+      </p:sp>
+      <mc:AlternateContent xmlns:mc="http://schemas.openxmlformats.org/markup-compatibility/2006" xmlns:a14="http://schemas.microsoft.com/office/drawing/2010/main">
+        <mc:Choice Requires="a14">
+          <p:sp>
+            <p:nvSpPr>
+              <p:cNvPr id="3" name="Content Placeholder 2">
+                <a:extLst>
+                  <a:ext uri="{FF2B5EF4-FFF2-40B4-BE49-F238E27FC236}">
+                    <a16:creationId xmlns:a16="http://schemas.microsoft.com/office/drawing/2014/main" id="{3D804293-6EB7-4096-88EB-ECD309FFD342}"/>
+                  </a:ext>
+                </a:extLst>
+              </p:cNvPr>
+              <p:cNvSpPr>
+                <a:spLocks noGrp="1"/>
+              </p:cNvSpPr>
+              <p:nvPr>
+                <p:ph idx="1"/>
+              </p:nvPr>
+            </p:nvSpPr>
+            <p:spPr>
+              <a:xfrm>
+                <a:off x="838200" y="1512080"/>
+                <a:ext cx="10515600" cy="4664883"/>
+              </a:xfrm>
+            </p:spPr>
+            <p:txBody>
+              <a:bodyPr/>
+              <a:lstStyle/>
+              <a:p>
+                <a:pPr marL="0" indent="0">
+                  <a:buNone/>
+                </a:pPr>
+                <a:r>
+                  <a:rPr lang="en-US" dirty="0"/>
+                  <a:t>Aim: Misclassify target node </a:t>
+                </a:r>
+                <a14:m>
+                  <m:oMath xmlns:m="http://schemas.openxmlformats.org/officeDocument/2006/math">
+                    <m:sSub>
+                      <m:sSubPr>
+                        <m:ctrlPr>
+                          <a:rPr lang="en-US" b="0" i="1" smtClean="0">
+                            <a:latin typeface="Cambria Math" panose="02040503050406030204" pitchFamily="18" charset="0"/>
+                          </a:rPr>
+                        </m:ctrlPr>
+                      </m:sSubPr>
+                      <m:e>
+                        <m:r>
+                          <a:rPr lang="en-US" b="0" i="1" smtClean="0">
+                            <a:latin typeface="Cambria Math" panose="02040503050406030204" pitchFamily="18" charset="0"/>
+                          </a:rPr>
+                          <m:t>𝑣</m:t>
+                        </m:r>
+                      </m:e>
+                      <m:sub>
+                        <m:r>
+                          <a:rPr lang="en-US" b="0" i="1" smtClean="0">
+                            <a:latin typeface="Cambria Math" panose="02040503050406030204" pitchFamily="18" charset="0"/>
+                          </a:rPr>
+                          <m:t>𝑜</m:t>
+                        </m:r>
+                      </m:sub>
+                    </m:sSub>
+                  </m:oMath>
+                </a14:m>
+                <a:r>
+                  <a:rPr lang="en-US" b="0" dirty="0"/>
+                  <a:t>, </a:t>
+                </a:r>
+                <a:r>
+                  <a:rPr lang="en-US" dirty="0"/>
+                  <a:t>Attacker has access to nodes in </a:t>
+                </a:r>
+                <a:r>
+                  <a:rPr lang="en-US" dirty="0">
+                    <a:latin typeface="Cambria Math" panose="02040503050406030204" pitchFamily="18" charset="0"/>
+                    <a:ea typeface="Cambria Math" panose="02040503050406030204" pitchFamily="18" charset="0"/>
+                  </a:rPr>
+                  <a:t>𝒜. </a:t>
+                </a:r>
+              </a:p>
+              <a:p>
+                <a:pPr marL="0" indent="0">
+                  <a:buNone/>
+                </a:pPr>
+                <a:endParaRPr lang="en-US" dirty="0"/>
+              </a:p>
+            </p:txBody>
+          </p:sp>
+        </mc:Choice>
+        <mc:Fallback xmlns="">
+          <p:sp>
+            <p:nvSpPr>
+              <p:cNvPr id="3" name="Content Placeholder 2">
+                <a:extLst>
+                  <a:ext uri="{FF2B5EF4-FFF2-40B4-BE49-F238E27FC236}">
+                    <a16:creationId xmlns:a16="http://schemas.microsoft.com/office/drawing/2014/main" id="{3D804293-6EB7-4096-88EB-ECD309FFD342}"/>
+                  </a:ext>
+                </a:extLst>
+              </p:cNvPr>
+              <p:cNvSpPr>
+                <a:spLocks noGrp="1" noRot="1" noChangeAspect="1" noMove="1" noResize="1" noEditPoints="1" noAdjustHandles="1" noChangeArrowheads="1" noChangeShapeType="1" noTextEdit="1"/>
+              </p:cNvSpPr>
+              <p:nvPr>
+                <p:ph idx="1"/>
+              </p:nvPr>
+            </p:nvSpPr>
+            <p:spPr>
+              <a:xfrm>
+                <a:off x="838200" y="1512080"/>
+                <a:ext cx="10515600" cy="4664883"/>
+              </a:xfrm>
+              <a:blipFill>
+                <a:blip r:embed="rId2"/>
+                <a:stretch>
+                  <a:fillRect l="-1217" t="-2484"/>
+                </a:stretch>
+              </a:blipFill>
+            </p:spPr>
+            <p:txBody>
+              <a:bodyPr/>
+              <a:lstStyle/>
+              <a:p>
+                <a:r>
+                  <a:rPr lang="en-US">
+                    <a:noFill/>
+                  </a:rPr>
+                  <a:t> </a:t>
+                </a:r>
+              </a:p>
+            </p:txBody>
+          </p:sp>
+        </mc:Fallback>
+      </mc:AlternateContent>
+      <p:grpSp>
+        <p:nvGrpSpPr>
+          <p:cNvPr id="24" name="Group 23">
+            <a:extLst>
+              <a:ext uri="{FF2B5EF4-FFF2-40B4-BE49-F238E27FC236}">
+                <a16:creationId xmlns:a16="http://schemas.microsoft.com/office/drawing/2014/main" id="{B7A8EC7B-A6A5-4887-A774-7052D71E3808}"/>
+              </a:ext>
+            </a:extLst>
+          </p:cNvPr>
+          <p:cNvGrpSpPr/>
+          <p:nvPr/>
+        </p:nvGrpSpPr>
+        <p:grpSpPr>
+          <a:xfrm>
+            <a:off x="1991686" y="4640313"/>
+            <a:ext cx="3022751" cy="1867001"/>
+            <a:chOff x="2163319" y="2890318"/>
+            <a:chExt cx="3022751" cy="1867001"/>
+          </a:xfrm>
+        </p:grpSpPr>
+        <mc:AlternateContent xmlns:mc="http://schemas.openxmlformats.org/markup-compatibility/2006" xmlns:a14="http://schemas.microsoft.com/office/drawing/2010/main">
+          <mc:Choice Requires="a14">
+            <p:sp>
+              <p:nvSpPr>
+                <p:cNvPr id="6" name="TextBox 5">
+                  <a:extLst>
+                    <a:ext uri="{FF2B5EF4-FFF2-40B4-BE49-F238E27FC236}">
+                      <a16:creationId xmlns:a16="http://schemas.microsoft.com/office/drawing/2014/main" id="{F89C3B1A-5B77-499A-8119-E810464E9869}"/>
+                    </a:ext>
+                  </a:extLst>
+                </p:cNvPr>
+                <p:cNvSpPr txBox="1"/>
+                <p:nvPr/>
+              </p:nvSpPr>
+              <p:spPr>
+                <a:xfrm>
+                  <a:off x="2163319" y="2890318"/>
+                  <a:ext cx="3022751" cy="830997"/>
+                </a:xfrm>
+                <a:prstGeom prst="rect">
+                  <a:avLst/>
+                </a:prstGeom>
+                <a:noFill/>
+              </p:spPr>
+              <p:txBody>
+                <a:bodyPr wrap="none" rtlCol="0">
+                  <a:spAutoFit/>
+                </a:bodyPr>
+                <a:lstStyle/>
+                <a:p>
+                  <a:r>
+                    <a:rPr lang="en-US" sz="2400" b="0" dirty="0"/>
+                    <a:t>Direct Attack : </a:t>
+                  </a:r>
+                  <a14:m>
+                    <m:oMath xmlns:m="http://schemas.openxmlformats.org/officeDocument/2006/math">
+                      <m:sSub>
+                        <m:sSubPr>
+                          <m:ctrlPr>
+                            <a:rPr lang="en-US" sz="2400" b="0" i="1" smtClean="0">
+                              <a:latin typeface="Cambria Math" panose="02040503050406030204" pitchFamily="18" charset="0"/>
+                            </a:rPr>
+                          </m:ctrlPr>
+                        </m:sSubPr>
+                        <m:e>
+                          <m:r>
+                            <a:rPr lang="en-US" sz="2400" b="0" i="1" smtClean="0">
+                              <a:latin typeface="Cambria Math" panose="02040503050406030204" pitchFamily="18" charset="0"/>
+                            </a:rPr>
+                            <m:t>𝑣</m:t>
+                          </m:r>
+                        </m:e>
+                        <m:sub>
+                          <m:r>
+                            <a:rPr lang="en-US" sz="2400" b="0" i="1" smtClean="0">
+                              <a:latin typeface="Cambria Math" panose="02040503050406030204" pitchFamily="18" charset="0"/>
+                            </a:rPr>
+                            <m:t>𝑜</m:t>
+                          </m:r>
+                        </m:sub>
+                      </m:sSub>
+                      <m:r>
+                        <a:rPr lang="en-US" sz="2400" b="0" i="1" smtClean="0">
+                          <a:latin typeface="Cambria Math" panose="02040503050406030204" pitchFamily="18" charset="0"/>
+                        </a:rPr>
+                        <m:t>∈</m:t>
+                      </m:r>
+                      <m:r>
+                        <a:rPr lang="en-US" sz="2400" b="0" i="1" smtClean="0">
+                          <a:latin typeface="Cambria Math" panose="02040503050406030204" pitchFamily="18" charset="0"/>
+                          <a:ea typeface="Cambria Math" panose="02040503050406030204" pitchFamily="18" charset="0"/>
+                        </a:rPr>
+                        <m:t>𝒜</m:t>
+                      </m:r>
+                    </m:oMath>
+                  </a14:m>
+                  <a:r>
+                    <a:rPr lang="en-US" sz="2400" dirty="0">
+                      <a:latin typeface="Cambria Math" panose="02040503050406030204" pitchFamily="18" charset="0"/>
+                      <a:ea typeface="Cambria Math" panose="02040503050406030204" pitchFamily="18" charset="0"/>
+                    </a:rPr>
+                    <a:t> </a:t>
+                  </a:r>
+                </a:p>
+                <a:p>
+                  <a:endParaRPr lang="en-US" sz="2400" dirty="0"/>
+                </a:p>
+              </p:txBody>
+            </p:sp>
+          </mc:Choice>
+          <mc:Fallback xmlns="">
+            <p:sp>
+              <p:nvSpPr>
+                <p:cNvPr id="6" name="TextBox 5">
+                  <a:extLst>
+                    <a:ext uri="{FF2B5EF4-FFF2-40B4-BE49-F238E27FC236}">
+                      <a16:creationId xmlns:a16="http://schemas.microsoft.com/office/drawing/2014/main" id="{F89C3B1A-5B77-499A-8119-E810464E9869}"/>
+                    </a:ext>
+                  </a:extLst>
+                </p:cNvPr>
+                <p:cNvSpPr txBox="1">
+                  <a:spLocks noRot="1" noChangeAspect="1" noMove="1" noResize="1" noEditPoints="1" noAdjustHandles="1" noChangeArrowheads="1" noChangeShapeType="1" noTextEdit="1"/>
+                </p:cNvSpPr>
+                <p:nvPr/>
+              </p:nvSpPr>
+              <p:spPr>
+                <a:xfrm>
+                  <a:off x="2163319" y="2890318"/>
+                  <a:ext cx="3022751" cy="830997"/>
+                </a:xfrm>
+                <a:prstGeom prst="rect">
+                  <a:avLst/>
+                </a:prstGeom>
+                <a:blipFill>
+                  <a:blip r:embed="rId3"/>
+                  <a:stretch>
+                    <a:fillRect l="-3024" t="-5882"/>
+                  </a:stretch>
+                </a:blipFill>
+              </p:spPr>
+              <p:txBody>
+                <a:bodyPr/>
+                <a:lstStyle/>
+                <a:p>
+                  <a:r>
+                    <a:rPr lang="en-US">
+                      <a:noFill/>
+                    </a:rPr>
+                    <a:t> </a:t>
+                  </a:r>
+                </a:p>
+              </p:txBody>
+            </p:sp>
+          </mc:Fallback>
+        </mc:AlternateContent>
+        <p:pic>
+          <p:nvPicPr>
+            <p:cNvPr id="10" name="Picture 9">
+              <a:extLst>
+                <a:ext uri="{FF2B5EF4-FFF2-40B4-BE49-F238E27FC236}">
+                  <a16:creationId xmlns:a16="http://schemas.microsoft.com/office/drawing/2014/main" id="{A38CC1F2-D49E-4B81-99D7-8CF26811E8BB}"/>
+                </a:ext>
+              </a:extLst>
+            </p:cNvPr>
+            <p:cNvPicPr>
+              <a:picLocks noChangeAspect="1"/>
+            </p:cNvPicPr>
+            <p:nvPr/>
+          </p:nvPicPr>
+          <p:blipFill>
+            <a:blip r:embed="rId4"/>
+            <a:stretch>
+              <a:fillRect/>
+            </a:stretch>
+          </p:blipFill>
+          <p:spPr>
+            <a:xfrm>
+              <a:off x="2689482" y="3305816"/>
+              <a:ext cx="1529800" cy="1451503"/>
+            </a:xfrm>
+            <a:prstGeom prst="rect">
+              <a:avLst/>
+            </a:prstGeom>
+          </p:spPr>
+        </p:pic>
+      </p:grpSp>
+      <p:grpSp>
+        <p:nvGrpSpPr>
+          <p:cNvPr id="25" name="Group 24">
+            <a:extLst>
+              <a:ext uri="{FF2B5EF4-FFF2-40B4-BE49-F238E27FC236}">
+                <a16:creationId xmlns:a16="http://schemas.microsoft.com/office/drawing/2014/main" id="{01376043-9112-4185-8C8B-A90023E4ECF2}"/>
+              </a:ext>
+            </a:extLst>
+          </p:cNvPr>
+          <p:cNvGrpSpPr/>
+          <p:nvPr/>
+        </p:nvGrpSpPr>
+        <p:grpSpPr>
+          <a:xfrm>
+            <a:off x="6920729" y="4651649"/>
+            <a:ext cx="3549177" cy="1776290"/>
+            <a:chOff x="6513429" y="2868859"/>
+            <a:chExt cx="3549177" cy="1776290"/>
+          </a:xfrm>
+        </p:grpSpPr>
+        <mc:AlternateContent xmlns:mc="http://schemas.openxmlformats.org/markup-compatibility/2006" xmlns:a14="http://schemas.microsoft.com/office/drawing/2010/main">
+          <mc:Choice Requires="a14">
+            <p:sp>
+              <p:nvSpPr>
+                <p:cNvPr id="7" name="TextBox 6">
+                  <a:extLst>
+                    <a:ext uri="{FF2B5EF4-FFF2-40B4-BE49-F238E27FC236}">
+                      <a16:creationId xmlns:a16="http://schemas.microsoft.com/office/drawing/2014/main" id="{1D772390-8635-4569-AA4E-7C0E32C1C904}"/>
+                    </a:ext>
+                  </a:extLst>
+                </p:cNvPr>
+                <p:cNvSpPr txBox="1"/>
+                <p:nvPr/>
+              </p:nvSpPr>
+              <p:spPr>
+                <a:xfrm>
+                  <a:off x="6513429" y="2868859"/>
+                  <a:ext cx="3549177" cy="830997"/>
+                </a:xfrm>
+                <a:prstGeom prst="rect">
+                  <a:avLst/>
+                </a:prstGeom>
+                <a:noFill/>
+              </p:spPr>
+              <p:txBody>
+                <a:bodyPr wrap="none" rtlCol="0">
+                  <a:spAutoFit/>
+                </a:bodyPr>
+                <a:lstStyle/>
+                <a:p>
+                  <a:r>
+                    <a:rPr lang="en-US" sz="2400" dirty="0"/>
+                    <a:t>Influencer</a:t>
+                  </a:r>
+                  <a:r>
+                    <a:rPr lang="en-US" sz="2400" b="0" dirty="0"/>
+                    <a:t> Attack : </a:t>
+                  </a:r>
+                  <a14:m>
+                    <m:oMath xmlns:m="http://schemas.openxmlformats.org/officeDocument/2006/math">
+                      <m:sSub>
+                        <m:sSubPr>
+                          <m:ctrlPr>
+                            <a:rPr lang="en-US" sz="2400" b="0" i="1" smtClean="0">
+                              <a:latin typeface="Cambria Math" panose="02040503050406030204" pitchFamily="18" charset="0"/>
+                            </a:rPr>
+                          </m:ctrlPr>
+                        </m:sSubPr>
+                        <m:e>
+                          <m:r>
+                            <a:rPr lang="en-US" sz="2400" b="0" i="1" smtClean="0">
+                              <a:latin typeface="Cambria Math" panose="02040503050406030204" pitchFamily="18" charset="0"/>
+                            </a:rPr>
+                            <m:t>𝑣</m:t>
+                          </m:r>
+                        </m:e>
+                        <m:sub>
+                          <m:r>
+                            <a:rPr lang="en-US" sz="2400" b="0" i="1" smtClean="0">
+                              <a:latin typeface="Cambria Math" panose="02040503050406030204" pitchFamily="18" charset="0"/>
+                            </a:rPr>
+                            <m:t>𝑜</m:t>
+                          </m:r>
+                        </m:sub>
+                      </m:sSub>
+                      <m:r>
+                        <a:rPr lang="en-US" sz="2400" b="0" i="1" smtClean="0">
+                          <a:latin typeface="Cambria Math" panose="02040503050406030204" pitchFamily="18" charset="0"/>
+                        </a:rPr>
+                        <m:t>∉</m:t>
+                      </m:r>
+                      <m:r>
+                        <a:rPr lang="en-US" sz="2400" b="0" i="1" smtClean="0">
+                          <a:latin typeface="Cambria Math" panose="02040503050406030204" pitchFamily="18" charset="0"/>
+                          <a:ea typeface="Cambria Math" panose="02040503050406030204" pitchFamily="18" charset="0"/>
+                        </a:rPr>
+                        <m:t>𝒜</m:t>
+                      </m:r>
+                    </m:oMath>
+                  </a14:m>
+                  <a:r>
+                    <a:rPr lang="en-US" sz="2400" dirty="0">
+                      <a:latin typeface="Cambria Math" panose="02040503050406030204" pitchFamily="18" charset="0"/>
+                      <a:ea typeface="Cambria Math" panose="02040503050406030204" pitchFamily="18" charset="0"/>
+                    </a:rPr>
+                    <a:t> </a:t>
+                  </a:r>
+                </a:p>
+                <a:p>
+                  <a:endParaRPr lang="en-US" sz="2400" dirty="0"/>
+                </a:p>
+              </p:txBody>
+            </p:sp>
+          </mc:Choice>
+          <mc:Fallback xmlns="">
+            <p:sp>
+              <p:nvSpPr>
+                <p:cNvPr id="7" name="TextBox 6">
+                  <a:extLst>
+                    <a:ext uri="{FF2B5EF4-FFF2-40B4-BE49-F238E27FC236}">
+                      <a16:creationId xmlns:a16="http://schemas.microsoft.com/office/drawing/2014/main" id="{1D772390-8635-4569-AA4E-7C0E32C1C904}"/>
+                    </a:ext>
+                  </a:extLst>
+                </p:cNvPr>
+                <p:cNvSpPr txBox="1">
+                  <a:spLocks noRot="1" noChangeAspect="1" noMove="1" noResize="1" noEditPoints="1" noAdjustHandles="1" noChangeArrowheads="1" noChangeShapeType="1" noTextEdit="1"/>
+                </p:cNvSpPr>
+                <p:nvPr/>
+              </p:nvSpPr>
+              <p:spPr>
+                <a:xfrm>
+                  <a:off x="6513429" y="2868859"/>
+                  <a:ext cx="3549177" cy="830997"/>
+                </a:xfrm>
+                <a:prstGeom prst="rect">
+                  <a:avLst/>
+                </a:prstGeom>
+                <a:blipFill>
+                  <a:blip r:embed="rId5"/>
+                  <a:stretch>
+                    <a:fillRect l="-2749" t="-5882"/>
+                  </a:stretch>
+                </a:blipFill>
+              </p:spPr>
+              <p:txBody>
+                <a:bodyPr/>
+                <a:lstStyle/>
+                <a:p>
+                  <a:r>
+                    <a:rPr lang="en-US">
+                      <a:noFill/>
+                    </a:rPr>
+                    <a:t> </a:t>
+                  </a:r>
+                </a:p>
+              </p:txBody>
+            </p:sp>
+          </mc:Fallback>
+        </mc:AlternateContent>
+        <p:pic>
+          <p:nvPicPr>
+            <p:cNvPr id="11" name="Picture 10">
+              <a:extLst>
+                <a:ext uri="{FF2B5EF4-FFF2-40B4-BE49-F238E27FC236}">
+                  <a16:creationId xmlns:a16="http://schemas.microsoft.com/office/drawing/2014/main" id="{74A059F4-95BE-4476-9F73-C4852B6FEACA}"/>
+                </a:ext>
+              </a:extLst>
+            </p:cNvPr>
+            <p:cNvPicPr>
+              <a:picLocks noChangeAspect="1"/>
+            </p:cNvPicPr>
+            <p:nvPr/>
+          </p:nvPicPr>
+          <p:blipFill>
+            <a:blip r:embed="rId6"/>
+            <a:stretch>
+              <a:fillRect/>
+            </a:stretch>
+          </p:blipFill>
+          <p:spPr>
+            <a:xfrm>
+              <a:off x="7345266" y="3329399"/>
+              <a:ext cx="1674591" cy="1315750"/>
+            </a:xfrm>
+            <a:prstGeom prst="rect">
+              <a:avLst/>
+            </a:prstGeom>
+          </p:spPr>
+        </p:pic>
+      </p:grpSp>
+      <p:grpSp>
+        <p:nvGrpSpPr>
+          <p:cNvPr id="23" name="Group 22">
+            <a:extLst>
+              <a:ext uri="{FF2B5EF4-FFF2-40B4-BE49-F238E27FC236}">
+                <a16:creationId xmlns:a16="http://schemas.microsoft.com/office/drawing/2014/main" id="{E5FBBAEB-0C0E-4BFB-912D-16ABE8B2F8FE}"/>
+              </a:ext>
+            </a:extLst>
+          </p:cNvPr>
+          <p:cNvGrpSpPr/>
+          <p:nvPr/>
+        </p:nvGrpSpPr>
+        <p:grpSpPr>
+          <a:xfrm>
+            <a:off x="793449" y="2418865"/>
+            <a:ext cx="10272952" cy="1835142"/>
+            <a:chOff x="342261" y="4757319"/>
+            <a:chExt cx="10272952" cy="1835142"/>
+          </a:xfrm>
+        </p:grpSpPr>
+        <p:grpSp>
+          <p:nvGrpSpPr>
+            <p:cNvPr id="12" name="Group 11">
+              <a:extLst>
+                <a:ext uri="{FF2B5EF4-FFF2-40B4-BE49-F238E27FC236}">
+                  <a16:creationId xmlns:a16="http://schemas.microsoft.com/office/drawing/2014/main" id="{13023630-2FA8-4ADD-BF82-51F7B8B4C024}"/>
+                </a:ext>
+              </a:extLst>
+            </p:cNvPr>
+            <p:cNvGrpSpPr/>
+            <p:nvPr/>
+          </p:nvGrpSpPr>
+          <p:grpSpPr>
+            <a:xfrm>
+              <a:off x="6072161" y="4793505"/>
+              <a:ext cx="4343941" cy="1218119"/>
+              <a:chOff x="838200" y="4263366"/>
+              <a:chExt cx="4343941" cy="1218119"/>
+            </a:xfrm>
+          </p:grpSpPr>
+          <p:pic>
+            <p:nvPicPr>
+              <p:cNvPr id="8" name="Picture 7">
+                <a:extLst>
+                  <a:ext uri="{FF2B5EF4-FFF2-40B4-BE49-F238E27FC236}">
+                    <a16:creationId xmlns:a16="http://schemas.microsoft.com/office/drawing/2014/main" id="{19165CC7-B423-449F-AAFB-284947FB3C5B}"/>
+                  </a:ext>
+                </a:extLst>
+              </p:cNvPr>
+              <p:cNvPicPr>
+                <a:picLocks noChangeAspect="1"/>
+              </p:cNvPicPr>
+              <p:nvPr/>
+            </p:nvPicPr>
+            <p:blipFill>
+              <a:blip r:embed="rId7"/>
+              <a:stretch>
+                <a:fillRect/>
+              </a:stretch>
+            </p:blipFill>
+            <p:spPr>
+              <a:xfrm>
+                <a:off x="838200" y="4802614"/>
+                <a:ext cx="4343941" cy="678871"/>
+              </a:xfrm>
+              <a:prstGeom prst="rect">
+                <a:avLst/>
+              </a:prstGeom>
+            </p:spPr>
+          </p:pic>
+          <p:sp>
+            <p:nvSpPr>
+              <p:cNvPr id="9" name="TextBox 8">
+                <a:extLst>
+                  <a:ext uri="{FF2B5EF4-FFF2-40B4-BE49-F238E27FC236}">
+                    <a16:creationId xmlns:a16="http://schemas.microsoft.com/office/drawing/2014/main" id="{07744033-BE64-4FCE-93A4-BC3FE7DF4A10}"/>
+                  </a:ext>
+                </a:extLst>
+              </p:cNvPr>
+              <p:cNvSpPr txBox="1"/>
+              <p:nvPr/>
+            </p:nvSpPr>
+            <p:spPr>
+              <a:xfrm>
+                <a:off x="1104776" y="4263366"/>
+                <a:ext cx="3810787" cy="830997"/>
+              </a:xfrm>
+              <a:prstGeom prst="rect">
+                <a:avLst/>
+              </a:prstGeom>
+              <a:noFill/>
+            </p:spPr>
+            <p:txBody>
+              <a:bodyPr wrap="none" rtlCol="0">
+                <a:spAutoFit/>
+              </a:bodyPr>
+              <a:lstStyle/>
+              <a:p>
+                <a:pPr algn="ctr"/>
+                <a:r>
+                  <a:rPr lang="en-US" sz="2400" dirty="0">
+                    <a:latin typeface="Cambria Math" panose="02040503050406030204" pitchFamily="18" charset="0"/>
+                    <a:ea typeface="Cambria Math" panose="02040503050406030204" pitchFamily="18" charset="0"/>
+                  </a:rPr>
+                  <a:t>Unnoticeable perturbations</a:t>
+                </a:r>
+              </a:p>
+              <a:p>
+                <a:endParaRPr lang="en-US" sz="2400" dirty="0"/>
+              </a:p>
+            </p:txBody>
+          </p:sp>
+        </p:grpSp>
+        <p:pic>
+          <p:nvPicPr>
+            <p:cNvPr id="13" name="Picture 12">
+              <a:extLst>
+                <a:ext uri="{FF2B5EF4-FFF2-40B4-BE49-F238E27FC236}">
+                  <a16:creationId xmlns:a16="http://schemas.microsoft.com/office/drawing/2014/main" id="{E0080F1C-48E2-48CE-A9B7-026C476BF184}"/>
+                </a:ext>
+              </a:extLst>
+            </p:cNvPr>
+            <p:cNvPicPr>
+              <a:picLocks noChangeAspect="1"/>
+            </p:cNvPicPr>
+            <p:nvPr/>
+          </p:nvPicPr>
+          <p:blipFill>
+            <a:blip r:embed="rId8"/>
+            <a:stretch>
+              <a:fillRect/>
+            </a:stretch>
+          </p:blipFill>
+          <p:spPr>
+            <a:xfrm>
+              <a:off x="511528" y="5346604"/>
+              <a:ext cx="5441813" cy="1146271"/>
+            </a:xfrm>
+            <a:prstGeom prst="rect">
+              <a:avLst/>
+            </a:prstGeom>
+          </p:spPr>
+        </p:pic>
+        <p:sp>
+          <p:nvSpPr>
+            <p:cNvPr id="14" name="TextBox 13">
+              <a:extLst>
+                <a:ext uri="{FF2B5EF4-FFF2-40B4-BE49-F238E27FC236}">
+                  <a16:creationId xmlns:a16="http://schemas.microsoft.com/office/drawing/2014/main" id="{6FFB8C42-79FB-437D-A875-91CA337978A1}"/>
+                </a:ext>
+              </a:extLst>
+            </p:cNvPr>
+            <p:cNvSpPr txBox="1"/>
+            <p:nvPr/>
+          </p:nvSpPr>
+          <p:spPr>
+            <a:xfrm>
+              <a:off x="1775625" y="4796168"/>
+              <a:ext cx="2958439" cy="830997"/>
+            </a:xfrm>
+            <a:prstGeom prst="rect">
+              <a:avLst/>
+            </a:prstGeom>
+            <a:noFill/>
+          </p:spPr>
+          <p:txBody>
+            <a:bodyPr wrap="none" rtlCol="0">
+              <a:spAutoFit/>
+            </a:bodyPr>
+            <a:lstStyle/>
+            <a:p>
+              <a:r>
+                <a:rPr lang="en-US" sz="2400" dirty="0">
+                  <a:latin typeface="Cambria Math" panose="02040503050406030204" pitchFamily="18" charset="0"/>
+                  <a:ea typeface="Cambria Math" panose="02040503050406030204" pitchFamily="18" charset="0"/>
+                </a:rPr>
+                <a:t>Bi-level Optimization</a:t>
+              </a:r>
+            </a:p>
+            <a:p>
+              <a:endParaRPr lang="en-US" sz="2400" dirty="0"/>
+            </a:p>
+          </p:txBody>
+        </p:sp>
+        <p:cxnSp>
+          <p:nvCxnSpPr>
+            <p:cNvPr id="18" name="Straight Arrow Connector 17">
+              <a:extLst>
+                <a:ext uri="{FF2B5EF4-FFF2-40B4-BE49-F238E27FC236}">
+                  <a16:creationId xmlns:a16="http://schemas.microsoft.com/office/drawing/2014/main" id="{3D9EB3BC-2EAE-43F7-A57C-2E9DC50BFF2F}"/>
+                </a:ext>
+              </a:extLst>
+            </p:cNvPr>
+            <p:cNvCxnSpPr>
+              <a:cxnSpLocks/>
+            </p:cNvCxnSpPr>
+            <p:nvPr/>
+          </p:nvCxnSpPr>
+          <p:spPr>
+            <a:xfrm flipV="1">
+              <a:off x="2700762" y="5726495"/>
+              <a:ext cx="3208063" cy="105677"/>
+            </a:xfrm>
+            <a:prstGeom prst="straightConnector1">
+              <a:avLst/>
+            </a:prstGeom>
+            <a:ln w="38100">
+              <a:tailEnd type="triangle"/>
+            </a:ln>
+          </p:spPr>
+          <p:style>
+            <a:lnRef idx="1">
+              <a:schemeClr val="accent1"/>
+            </a:lnRef>
+            <a:fillRef idx="0">
+              <a:schemeClr val="accent1"/>
+            </a:fillRef>
+            <a:effectRef idx="0">
+              <a:schemeClr val="accent1"/>
+            </a:effectRef>
+            <a:fontRef idx="minor">
+              <a:schemeClr val="tx1"/>
+            </a:fontRef>
+          </p:style>
+        </p:cxnSp>
+        <p:sp>
+          <p:nvSpPr>
+            <p:cNvPr id="20" name="Oval 19">
+              <a:extLst>
+                <a:ext uri="{FF2B5EF4-FFF2-40B4-BE49-F238E27FC236}">
+                  <a16:creationId xmlns:a16="http://schemas.microsoft.com/office/drawing/2014/main" id="{C270AF17-231A-4792-8B44-E843A6E06140}"/>
+                </a:ext>
+              </a:extLst>
+            </p:cNvPr>
+            <p:cNvSpPr/>
+            <p:nvPr/>
+          </p:nvSpPr>
+          <p:spPr>
+            <a:xfrm>
+              <a:off x="2094436" y="5666014"/>
+              <a:ext cx="475079" cy="280140"/>
+            </a:xfrm>
+            <a:prstGeom prst="ellipse">
+              <a:avLst/>
+            </a:prstGeom>
+            <a:noFill/>
+          </p:spPr>
+          <p:style>
+            <a:lnRef idx="2">
+              <a:schemeClr val="accent1">
+                <a:shade val="50000"/>
+              </a:schemeClr>
+            </a:lnRef>
+            <a:fillRef idx="1">
+              <a:schemeClr val="accent1"/>
+            </a:fillRef>
+            <a:effectRef idx="0">
+              <a:schemeClr val="accent1"/>
+            </a:effectRef>
+            <a:fontRef idx="minor">
+              <a:schemeClr val="lt1"/>
+            </a:fontRef>
+          </p:style>
+          <p:txBody>
+            <a:bodyPr rtlCol="0" anchor="ctr"/>
+            <a:lstStyle/>
+            <a:p>
+              <a:pPr algn="ctr"/>
+              <a:endParaRPr lang="en-US"/>
+            </a:p>
+          </p:txBody>
+        </p:sp>
+        <p:sp>
+          <p:nvSpPr>
+            <p:cNvPr id="21" name="Rectangle: Rounded Corners 20">
+              <a:extLst>
+                <a:ext uri="{FF2B5EF4-FFF2-40B4-BE49-F238E27FC236}">
+                  <a16:creationId xmlns:a16="http://schemas.microsoft.com/office/drawing/2014/main" id="{AEF28FC0-B44D-40B8-B687-B01B4D17B97B}"/>
+                </a:ext>
+              </a:extLst>
+            </p:cNvPr>
+            <p:cNvSpPr/>
+            <p:nvPr/>
+          </p:nvSpPr>
+          <p:spPr>
+            <a:xfrm>
+              <a:off x="342261" y="4757319"/>
+              <a:ext cx="10272952" cy="1835142"/>
+            </a:xfrm>
+            <a:prstGeom prst="roundRect">
+              <a:avLst/>
+            </a:prstGeom>
+            <a:noFill/>
+            <a:ln w="28575">
+              <a:solidFill>
+                <a:srgbClr val="C00000"/>
+              </a:solidFill>
+            </a:ln>
+          </p:spPr>
+          <p:style>
+            <a:lnRef idx="2">
+              <a:schemeClr val="accent1">
+                <a:shade val="50000"/>
+              </a:schemeClr>
+            </a:lnRef>
+            <a:fillRef idx="1">
+              <a:schemeClr val="accent1"/>
+            </a:fillRef>
+            <a:effectRef idx="0">
+              <a:schemeClr val="accent1"/>
+            </a:effectRef>
+            <a:fontRef idx="minor">
+              <a:schemeClr val="lt1"/>
+            </a:fontRef>
+          </p:style>
+          <p:txBody>
+            <a:bodyPr rtlCol="0" anchor="ctr"/>
+            <a:lstStyle/>
+            <a:p>
+              <a:pPr algn="ctr"/>
+              <a:endParaRPr lang="en-US"/>
+            </a:p>
+          </p:txBody>
+        </p:sp>
+      </p:grpSp>
+    </p:spTree>
+    <p:extLst>
+      <p:ext uri="{BB962C8B-B14F-4D97-AF65-F5344CB8AC3E}">
+        <p14:creationId xmlns:p14="http://schemas.microsoft.com/office/powerpoint/2010/main" val="1946024651"/>
+      </p:ext>
+    </p:extLst>
+  </p:cSld>
+  <p:clrMapOvr>
+    <a:masterClrMapping/>
+  </p:clrMapOvr>
+</p:sld>
+</file>
+
+<file path=ppt/slides/slide21.xml><?xml version="1.0" encoding="utf-8"?>
+<p:sld xmlns:a="http://schemas.openxmlformats.org/drawingml/2006/main" xmlns:r="http://schemas.openxmlformats.org/officeDocument/2006/relationships" xmlns:p="http://schemas.openxmlformats.org/presentationml/2006/main">
+  <p:cSld>
+    <p:spTree>
+      <p:nvGrpSpPr>
+        <p:cNvPr id="1" name=""/>
+        <p:cNvGrpSpPr/>
+        <p:nvPr/>
+      </p:nvGrpSpPr>
+      <p:grpSpPr>
+        <a:xfrm>
+          <a:off x="0" y="0"/>
+          <a:ext cx="0" cy="0"/>
+          <a:chOff x="0" y="0"/>
+          <a:chExt cx="0" cy="0"/>
+        </a:xfrm>
+      </p:grpSpPr>
+      <p:sp>
+        <p:nvSpPr>
+          <p:cNvPr id="2" name="Title 1">
+            <a:extLst>
+              <a:ext uri="{FF2B5EF4-FFF2-40B4-BE49-F238E27FC236}">
+                <a16:creationId xmlns:a16="http://schemas.microsoft.com/office/drawing/2014/main" id="{0D7ABF33-DAFA-4C10-900B-DDD4372E3F91}"/>
+              </a:ext>
+            </a:extLst>
+          </p:cNvPr>
+          <p:cNvSpPr>
+            <a:spLocks noGrp="1"/>
+          </p:cNvSpPr>
+          <p:nvPr>
+            <p:ph type="title"/>
+          </p:nvPr>
+        </p:nvSpPr>
+        <p:spPr/>
+        <p:txBody>
+          <a:bodyPr/>
+          <a:lstStyle/>
+          <a:p>
+            <a:r>
+              <a:rPr lang="en-US" dirty="0"/>
+              <a:t>Other Unnoticeability constraints</a:t>
+            </a:r>
+          </a:p>
+        </p:txBody>
+      </p:sp>
+      <mc:AlternateContent xmlns:mc="http://schemas.openxmlformats.org/markup-compatibility/2006" xmlns:a14="http://schemas.microsoft.com/office/drawing/2010/main">
+        <mc:Choice Requires="a14">
+          <p:sp>
+            <p:nvSpPr>
+              <p:cNvPr id="5" name="Content Placeholder 4">
+                <a:extLst>
+                  <a:ext uri="{FF2B5EF4-FFF2-40B4-BE49-F238E27FC236}">
+                    <a16:creationId xmlns:a16="http://schemas.microsoft.com/office/drawing/2014/main" id="{2972E615-8B9C-4FCF-B30B-C3F6D7ED842B}"/>
+                  </a:ext>
+                </a:extLst>
+              </p:cNvPr>
+              <p:cNvSpPr>
+                <a:spLocks noGrp="1"/>
+              </p:cNvSpPr>
+              <p:nvPr>
+                <p:ph idx="1"/>
+              </p:nvPr>
+            </p:nvSpPr>
+            <p:spPr/>
+            <p:txBody>
+              <a:bodyPr/>
+              <a:lstStyle/>
+              <a:p>
+                <a:r>
+                  <a:rPr lang="en-US" dirty="0"/>
+                  <a:t>Graph structure preserving</a:t>
+                </a:r>
+              </a:p>
+              <a:p>
+                <a:pPr lvl="1"/>
+                <a:r>
+                  <a:rPr lang="en-US" dirty="0"/>
+                  <a:t>Check if the degree distributions of the original graph and the perturbed graph are significantly different using likelihood ratio tests. </a:t>
+                </a:r>
+              </a:p>
+              <a:p>
+                <a:pPr lvl="1"/>
+                <a:r>
+                  <a:rPr lang="en-US" dirty="0"/>
+                  <a:t>Degree distribution can be found empirically, or using a fit from Power-law distribution family. </a:t>
+                </a:r>
+              </a:p>
+              <a:p>
+                <a:r>
+                  <a:rPr lang="en-US" dirty="0"/>
+                  <a:t>Feature statistics preserving</a:t>
+                </a:r>
+              </a:p>
+              <a:p>
+                <a:pPr lvl="1"/>
+                <a:r>
+                  <a:rPr lang="en-US" dirty="0"/>
+                  <a:t>Construct a feature co-occurrence graph </a:t>
+                </a:r>
+                <a14:m>
+                  <m:oMath xmlns:m="http://schemas.openxmlformats.org/officeDocument/2006/math">
+                    <m:r>
+                      <a:rPr lang="en-US" b="0" i="1" smtClean="0">
+                        <a:latin typeface="Cambria Math" panose="02040503050406030204" pitchFamily="18" charset="0"/>
+                      </a:rPr>
+                      <m:t>𝐶</m:t>
+                    </m:r>
+                    <m:r>
+                      <a:rPr lang="en-US" b="0" i="1" smtClean="0">
+                        <a:latin typeface="Cambria Math" panose="02040503050406030204" pitchFamily="18" charset="0"/>
+                      </a:rPr>
+                      <m:t>=</m:t>
+                    </m:r>
+                    <m:d>
+                      <m:dPr>
+                        <m:ctrlPr>
+                          <a:rPr lang="en-US" b="0" i="1" smtClean="0">
+                            <a:latin typeface="Cambria Math" panose="02040503050406030204" pitchFamily="18" charset="0"/>
+                            <a:ea typeface="Cambria Math" panose="02040503050406030204" pitchFamily="18" charset="0"/>
+                          </a:rPr>
+                        </m:ctrlPr>
+                      </m:dPr>
+                      <m:e>
+                        <m:r>
+                          <a:rPr lang="en-US" b="0" i="1" smtClean="0">
+                            <a:latin typeface="Cambria Math" panose="02040503050406030204" pitchFamily="18" charset="0"/>
+                            <a:ea typeface="Cambria Math" panose="02040503050406030204" pitchFamily="18" charset="0"/>
+                          </a:rPr>
+                          <m:t>𝓕</m:t>
+                        </m:r>
+                        <m:r>
+                          <a:rPr lang="en-US" b="0" i="1" smtClean="0">
+                            <a:latin typeface="Cambria Math" panose="02040503050406030204" pitchFamily="18" charset="0"/>
+                            <a:ea typeface="Cambria Math" panose="02040503050406030204" pitchFamily="18" charset="0"/>
+                          </a:rPr>
+                          <m:t>, </m:t>
+                        </m:r>
+                        <m:r>
+                          <a:rPr lang="en-US" b="0" i="1" smtClean="0">
+                            <a:latin typeface="Cambria Math" panose="02040503050406030204" pitchFamily="18" charset="0"/>
+                            <a:ea typeface="Cambria Math" panose="02040503050406030204" pitchFamily="18" charset="0"/>
+                          </a:rPr>
+                          <m:t>𝐸</m:t>
+                        </m:r>
+                      </m:e>
+                    </m:d>
+                  </m:oMath>
+                </a14:m>
+                <a:r>
+                  <a:rPr lang="en-US" dirty="0"/>
+                  <a:t>, where </a:t>
+                </a:r>
+                <a14:m>
+                  <m:oMath xmlns:m="http://schemas.openxmlformats.org/officeDocument/2006/math">
+                    <m:r>
+                      <a:rPr lang="en-US" b="0" i="1" smtClean="0">
+                        <a:latin typeface="Cambria Math" panose="02040503050406030204" pitchFamily="18" charset="0"/>
+                      </a:rPr>
+                      <m:t>𝐸</m:t>
+                    </m:r>
+                  </m:oMath>
+                </a14:m>
+                <a:r>
+                  <a:rPr lang="en-US" dirty="0"/>
+                  <a:t> denotes features which have co-</a:t>
+                </a:r>
+                <a:r>
+                  <a:rPr lang="en-US" dirty="0" err="1"/>
+                  <a:t>occured</a:t>
+                </a:r>
+                <a:r>
+                  <a:rPr lang="en-US" dirty="0"/>
+                  <a:t> together in </a:t>
+                </a:r>
+                <a14:m>
+                  <m:oMath xmlns:m="http://schemas.openxmlformats.org/officeDocument/2006/math">
+                    <m:sSub>
+                      <m:sSubPr>
+                        <m:ctrlPr>
+                          <a:rPr lang="en-US" b="0" i="1" smtClean="0">
+                            <a:latin typeface="Cambria Math" panose="02040503050406030204" pitchFamily="18" charset="0"/>
+                          </a:rPr>
+                        </m:ctrlPr>
+                      </m:sSubPr>
+                      <m:e>
+                        <m:r>
+                          <a:rPr lang="en-US" b="0" i="1" smtClean="0">
+                            <a:latin typeface="Cambria Math" panose="02040503050406030204" pitchFamily="18" charset="0"/>
+                          </a:rPr>
+                          <m:t>𝐺</m:t>
+                        </m:r>
+                      </m:e>
+                      <m:sub>
+                        <m:r>
+                          <a:rPr lang="en-US" b="0" i="1" smtClean="0">
+                            <a:latin typeface="Cambria Math" panose="02040503050406030204" pitchFamily="18" charset="0"/>
+                          </a:rPr>
+                          <m:t>0</m:t>
+                        </m:r>
+                      </m:sub>
+                    </m:sSub>
+                  </m:oMath>
+                </a14:m>
+                <a:endParaRPr lang="en-US" dirty="0"/>
+              </a:p>
+              <a:p>
+                <a:pPr lvl="1"/>
+                <a:r>
+                  <a:rPr lang="en-US" dirty="0"/>
+                  <a:t>Add a feature to a node if it has a significantly high probability of co-occurring with other features for that node. </a:t>
+                </a:r>
+              </a:p>
+              <a:p>
+                <a:pPr lvl="1"/>
+                <a:endParaRPr lang="en-US" dirty="0"/>
+              </a:p>
+            </p:txBody>
+          </p:sp>
+        </mc:Choice>
+        <mc:Fallback xmlns="">
+          <p:sp>
+            <p:nvSpPr>
+              <p:cNvPr id="5" name="Content Placeholder 4">
+                <a:extLst>
+                  <a:ext uri="{FF2B5EF4-FFF2-40B4-BE49-F238E27FC236}">
+                    <a16:creationId xmlns:a16="http://schemas.microsoft.com/office/drawing/2014/main" id="{2972E615-8B9C-4FCF-B30B-C3F6D7ED842B}"/>
+                  </a:ext>
+                </a:extLst>
+              </p:cNvPr>
+              <p:cNvSpPr>
+                <a:spLocks noGrp="1" noRot="1" noChangeAspect="1" noMove="1" noResize="1" noEditPoints="1" noAdjustHandles="1" noChangeArrowheads="1" noChangeShapeType="1" noTextEdit="1"/>
+              </p:cNvSpPr>
+              <p:nvPr>
+                <p:ph idx="1"/>
+              </p:nvPr>
+            </p:nvSpPr>
+            <p:spPr>
+              <a:blipFill>
+                <a:blip r:embed="rId2"/>
+                <a:stretch>
+                  <a:fillRect l="-1043" t="-2241" r="-870"/>
+                </a:stretch>
+              </a:blipFill>
+            </p:spPr>
+            <p:txBody>
+              <a:bodyPr/>
+              <a:lstStyle/>
+              <a:p>
+                <a:r>
+                  <a:rPr lang="en-US">
+                    <a:noFill/>
+                  </a:rPr>
+                  <a:t> </a:t>
+                </a:r>
+              </a:p>
+            </p:txBody>
+          </p:sp>
+        </mc:Fallback>
+      </mc:AlternateContent>
+    </p:spTree>
+    <p:extLst>
+      <p:ext uri="{BB962C8B-B14F-4D97-AF65-F5344CB8AC3E}">
+        <p14:creationId xmlns:p14="http://schemas.microsoft.com/office/powerpoint/2010/main" val="1299029335"/>
+      </p:ext>
+    </p:extLst>
+  </p:cSld>
+  <p:clrMapOvr>
+    <a:masterClrMapping/>
+  </p:clrMapOvr>
+</p:sld>
+</file>
+
+<file path=ppt/slides/slide22.xml><?xml version="1.0" encoding="utf-8"?>
+<p:sld xmlns:a="http://schemas.openxmlformats.org/drawingml/2006/main" xmlns:r="http://schemas.openxmlformats.org/officeDocument/2006/relationships" xmlns:p="http://schemas.openxmlformats.org/presentationml/2006/main">
+  <p:cSld>
+    <p:spTree>
+      <p:nvGrpSpPr>
+        <p:cNvPr id="1" name=""/>
+        <p:cNvGrpSpPr/>
+        <p:nvPr/>
+      </p:nvGrpSpPr>
+      <p:grpSpPr>
+        <a:xfrm>
+          <a:off x="0" y="0"/>
+          <a:ext cx="0" cy="0"/>
+          <a:chOff x="0" y="0"/>
+          <a:chExt cx="0" cy="0"/>
+        </a:xfrm>
+      </p:grpSpPr>
+      <p:sp>
+        <p:nvSpPr>
+          <p:cNvPr id="2" name="Title 1">
+            <a:extLst>
+              <a:ext uri="{FF2B5EF4-FFF2-40B4-BE49-F238E27FC236}">
+                <a16:creationId xmlns:a16="http://schemas.microsoft.com/office/drawing/2014/main" id="{F301111F-C40B-45C8-84E5-E9F237F97508}"/>
+              </a:ext>
+            </a:extLst>
+          </p:cNvPr>
+          <p:cNvSpPr>
+            <a:spLocks noGrp="1"/>
+          </p:cNvSpPr>
+          <p:nvPr>
+            <p:ph type="title"/>
+          </p:nvPr>
+        </p:nvSpPr>
+        <p:spPr/>
+        <p:txBody>
+          <a:bodyPr/>
+          <a:lstStyle/>
+          <a:p>
+            <a:r>
+              <a:rPr lang="en-US" dirty="0"/>
+              <a:t>Generating Adversarial Graphs</a:t>
+            </a:r>
+          </a:p>
+        </p:txBody>
+      </p:sp>
+      <p:sp>
+        <p:nvSpPr>
+          <p:cNvPr id="3" name="Content Placeholder 2">
+            <a:extLst>
+              <a:ext uri="{FF2B5EF4-FFF2-40B4-BE49-F238E27FC236}">
+                <a16:creationId xmlns:a16="http://schemas.microsoft.com/office/drawing/2014/main" id="{FE6BDF7A-99A7-463D-A7BF-EDC8E048CE0B}"/>
+              </a:ext>
+            </a:extLst>
+          </p:cNvPr>
+          <p:cNvSpPr>
+            <a:spLocks noGrp="1"/>
+          </p:cNvSpPr>
+          <p:nvPr>
+            <p:ph idx="1"/>
+          </p:nvPr>
+        </p:nvSpPr>
+        <p:spPr/>
+        <p:txBody>
+          <a:bodyPr/>
+          <a:lstStyle/>
+          <a:p>
+            <a:r>
+              <a:rPr lang="en-US" dirty="0"/>
+              <a:t>Solving the Bi-level optimization problem is intractable.  Used a </a:t>
+            </a:r>
+            <a:r>
+              <a:rPr lang="en-US" i="1" dirty="0"/>
+              <a:t>tractable</a:t>
+            </a:r>
+            <a:r>
+              <a:rPr lang="en-US" dirty="0"/>
+              <a:t> surrogate model to generate the adversarial graphs.</a:t>
+            </a:r>
+          </a:p>
+          <a:p>
+            <a:endParaRPr lang="en-US" dirty="0"/>
+          </a:p>
+          <a:p>
+            <a:endParaRPr lang="en-US" dirty="0"/>
+          </a:p>
+          <a:p>
+            <a:endParaRPr lang="en-US" dirty="0"/>
+          </a:p>
+          <a:p>
+            <a:pPr marL="0" indent="0">
+              <a:buNone/>
+            </a:pPr>
+            <a:endParaRPr lang="en-US" dirty="0"/>
+          </a:p>
+        </p:txBody>
+      </p:sp>
+      <p:grpSp>
+        <p:nvGrpSpPr>
+          <p:cNvPr id="18" name="Group 17">
+            <a:extLst>
+              <a:ext uri="{FF2B5EF4-FFF2-40B4-BE49-F238E27FC236}">
+                <a16:creationId xmlns:a16="http://schemas.microsoft.com/office/drawing/2014/main" id="{D03484ED-F2DF-4055-B5F4-262795ABC57D}"/>
+              </a:ext>
+            </a:extLst>
+          </p:cNvPr>
+          <p:cNvGrpSpPr/>
+          <p:nvPr/>
+        </p:nvGrpSpPr>
+        <p:grpSpPr>
+          <a:xfrm>
+            <a:off x="1034021" y="3224664"/>
+            <a:ext cx="5061979" cy="2149352"/>
+            <a:chOff x="889284" y="3111004"/>
+            <a:chExt cx="5736285" cy="2467348"/>
+          </a:xfrm>
+        </p:grpSpPr>
+        <p:pic>
+          <p:nvPicPr>
+            <p:cNvPr id="4" name="Picture 3">
+              <a:extLst>
+                <a:ext uri="{FF2B5EF4-FFF2-40B4-BE49-F238E27FC236}">
+                  <a16:creationId xmlns:a16="http://schemas.microsoft.com/office/drawing/2014/main" id="{48958CC3-4D19-4715-AFB0-8C3087992542}"/>
+                </a:ext>
+              </a:extLst>
+            </p:cNvPr>
+            <p:cNvPicPr>
+              <a:picLocks noChangeAspect="1"/>
+            </p:cNvPicPr>
+            <p:nvPr/>
+          </p:nvPicPr>
+          <p:blipFill>
+            <a:blip r:embed="rId2"/>
+            <a:stretch>
+              <a:fillRect/>
+            </a:stretch>
+          </p:blipFill>
+          <p:spPr>
+            <a:xfrm>
+              <a:off x="889284" y="3291438"/>
+              <a:ext cx="5534425" cy="493872"/>
+            </a:xfrm>
+            <a:prstGeom prst="rect">
+              <a:avLst/>
+            </a:prstGeom>
+          </p:spPr>
+        </p:pic>
+        <p:pic>
+          <p:nvPicPr>
+            <p:cNvPr id="5" name="Picture 4">
+              <a:extLst>
+                <a:ext uri="{FF2B5EF4-FFF2-40B4-BE49-F238E27FC236}">
+                  <a16:creationId xmlns:a16="http://schemas.microsoft.com/office/drawing/2014/main" id="{D05EAF2B-74D0-4B7F-A9AF-F08CCBC1DA28}"/>
+                </a:ext>
+              </a:extLst>
+            </p:cNvPr>
+            <p:cNvPicPr>
+              <a:picLocks noChangeAspect="1"/>
+            </p:cNvPicPr>
+            <p:nvPr/>
+          </p:nvPicPr>
+          <p:blipFill>
+            <a:blip r:embed="rId3"/>
+            <a:stretch>
+              <a:fillRect/>
+            </a:stretch>
+          </p:blipFill>
+          <p:spPr>
+            <a:xfrm>
+              <a:off x="912879" y="4676721"/>
+              <a:ext cx="5689093" cy="645924"/>
+            </a:xfrm>
+            <a:prstGeom prst="rect">
+              <a:avLst/>
+            </a:prstGeom>
+          </p:spPr>
+        </p:pic>
+        <p:grpSp>
+          <p:nvGrpSpPr>
+            <p:cNvPr id="8" name="Group 7">
+              <a:extLst>
+                <a:ext uri="{FF2B5EF4-FFF2-40B4-BE49-F238E27FC236}">
+                  <a16:creationId xmlns:a16="http://schemas.microsoft.com/office/drawing/2014/main" id="{51FE84DE-826B-416C-96A8-14E19771BC64}"/>
+                </a:ext>
+              </a:extLst>
+            </p:cNvPr>
+            <p:cNvGrpSpPr/>
+            <p:nvPr/>
+          </p:nvGrpSpPr>
+          <p:grpSpPr>
+            <a:xfrm>
+              <a:off x="1834451" y="3986184"/>
+              <a:ext cx="3674737" cy="586272"/>
+              <a:chOff x="3208062" y="4846028"/>
+              <a:chExt cx="3674737" cy="586272"/>
+            </a:xfrm>
+          </p:grpSpPr>
+          <p:pic>
+            <p:nvPicPr>
+              <p:cNvPr id="6" name="Picture 5">
+                <a:extLst>
+                  <a:ext uri="{FF2B5EF4-FFF2-40B4-BE49-F238E27FC236}">
+                    <a16:creationId xmlns:a16="http://schemas.microsoft.com/office/drawing/2014/main" id="{44FD9492-33E3-41A5-A68C-14939A1BB2C7}"/>
+                  </a:ext>
+                </a:extLst>
+              </p:cNvPr>
+              <p:cNvPicPr>
+                <a:picLocks noChangeAspect="1"/>
+              </p:cNvPicPr>
+              <p:nvPr/>
+            </p:nvPicPr>
+            <p:blipFill>
+              <a:blip r:embed="rId4"/>
+              <a:stretch>
+                <a:fillRect/>
+              </a:stretch>
+            </p:blipFill>
+            <p:spPr>
+              <a:xfrm>
+                <a:off x="4077070" y="4846028"/>
+                <a:ext cx="2805729" cy="586272"/>
+              </a:xfrm>
+              <a:prstGeom prst="rect">
+                <a:avLst/>
+              </a:prstGeom>
+            </p:spPr>
+          </p:pic>
+          <mc:AlternateContent xmlns:mc="http://schemas.openxmlformats.org/markup-compatibility/2006" xmlns:a14="http://schemas.microsoft.com/office/drawing/2010/main">
+            <mc:Choice Requires="a14">
+              <p:sp>
+                <p:nvSpPr>
+                  <p:cNvPr id="7" name="TextBox 6">
+                    <a:extLst>
+                      <a:ext uri="{FF2B5EF4-FFF2-40B4-BE49-F238E27FC236}">
+                        <a16:creationId xmlns:a16="http://schemas.microsoft.com/office/drawing/2014/main" id="{C82D08E4-7286-4705-BB8C-86FC3D1F9B77}"/>
+                      </a:ext>
+                    </a:extLst>
+                  </p:cNvPr>
+                  <p:cNvSpPr txBox="1"/>
+                  <p:nvPr/>
+                </p:nvSpPr>
+                <p:spPr>
+                  <a:xfrm>
+                    <a:off x="3208062" y="4846028"/>
+                    <a:ext cx="989951" cy="276999"/>
+                  </a:xfrm>
+                  <a:prstGeom prst="rect">
+                    <a:avLst/>
+                  </a:prstGeom>
+                  <a:noFill/>
+                </p:spPr>
+                <p:txBody>
+                  <a:bodyPr wrap="none" lIns="0" tIns="0" rIns="0" bIns="0" rtlCol="0">
+                    <a:spAutoFit/>
+                  </a:bodyPr>
+                  <a:lstStyle/>
+                  <a:p>
+                    <a:pPr/>
+                    <a14:m>
+                      <m:oMathPara xmlns:m="http://schemas.openxmlformats.org/officeDocument/2006/math">
+                        <m:oMathParaPr>
+                          <m:jc m:val="centerGroup"/>
+                        </m:oMathParaPr>
+                        <m:oMath xmlns:m="http://schemas.openxmlformats.org/officeDocument/2006/math">
+                          <m:sSup>
+                            <m:sSupPr>
+                              <m:ctrlPr>
+                                <a:rPr lang="en-US" b="0" i="1" smtClean="0">
+                                  <a:latin typeface="Cambria Math" panose="02040503050406030204" pitchFamily="18" charset="0"/>
+                                </a:rPr>
+                              </m:ctrlPr>
+                            </m:sSupPr>
+                            <m:e>
+                              <m:r>
+                                <a:rPr lang="en-US" b="0" i="1" smtClean="0">
+                                  <a:latin typeface="Cambria Math" panose="02040503050406030204" pitchFamily="18" charset="0"/>
+                                </a:rPr>
+                                <m:t>(</m:t>
+                              </m:r>
+                              <m:r>
+                                <a:rPr lang="en-US" b="0" i="1" smtClean="0">
+                                  <a:latin typeface="Cambria Math" panose="02040503050406030204" pitchFamily="18" charset="0"/>
+                                </a:rPr>
+                                <m:t>𝐴</m:t>
+                              </m:r>
+                            </m:e>
+                            <m:sup>
+                              <m:r>
+                                <a:rPr lang="en-US" b="0" i="1" smtClean="0">
+                                  <a:latin typeface="Cambria Math" panose="02040503050406030204" pitchFamily="18" charset="0"/>
+                                </a:rPr>
+                                <m:t>′</m:t>
+                              </m:r>
+                            </m:sup>
+                          </m:sSup>
+                          <m:r>
+                            <a:rPr lang="en-US" b="0" i="1" smtClean="0">
+                              <a:latin typeface="Cambria Math" panose="02040503050406030204" pitchFamily="18" charset="0"/>
+                            </a:rPr>
+                            <m:t>,</m:t>
+                          </m:r>
+                          <m:r>
+                            <a:rPr lang="en-US" b="0" i="1" smtClean="0">
+                              <a:latin typeface="Cambria Math" panose="02040503050406030204" pitchFamily="18" charset="0"/>
+                            </a:rPr>
+                            <m:t>𝑋</m:t>
+                          </m:r>
+                          <m:r>
+                            <a:rPr lang="en-US" b="0" i="1" smtClean="0">
+                              <a:latin typeface="Cambria Math" panose="02040503050406030204" pitchFamily="18" charset="0"/>
+                            </a:rPr>
+                            <m:t>′)=</m:t>
+                          </m:r>
+                        </m:oMath>
+                      </m:oMathPara>
+                    </a14:m>
+                    <a:endParaRPr lang="en-US" dirty="0"/>
+                  </a:p>
+                </p:txBody>
+              </p:sp>
+            </mc:Choice>
+            <mc:Fallback xmlns="">
+              <p:sp>
+                <p:nvSpPr>
+                  <p:cNvPr id="7" name="TextBox 6">
+                    <a:extLst>
+                      <a:ext uri="{FF2B5EF4-FFF2-40B4-BE49-F238E27FC236}">
+                        <a16:creationId xmlns:a16="http://schemas.microsoft.com/office/drawing/2014/main" id="{C82D08E4-7286-4705-BB8C-86FC3D1F9B77}"/>
+                      </a:ext>
+                    </a:extLst>
+                  </p:cNvPr>
+                  <p:cNvSpPr txBox="1">
+                    <a:spLocks noRot="1" noChangeAspect="1" noMove="1" noResize="1" noEditPoints="1" noAdjustHandles="1" noChangeArrowheads="1" noChangeShapeType="1" noTextEdit="1"/>
+                  </p:cNvSpPr>
+                  <p:nvPr/>
+                </p:nvSpPr>
+                <p:spPr>
+                  <a:xfrm>
+                    <a:off x="3208062" y="4846028"/>
+                    <a:ext cx="989951" cy="276999"/>
+                  </a:xfrm>
+                  <a:prstGeom prst="rect">
+                    <a:avLst/>
+                  </a:prstGeom>
+                  <a:blipFill>
+                    <a:blip r:embed="rId5"/>
+                    <a:stretch>
+                      <a:fillRect l="-12500" t="-5000" r="-11806" b="-52500"/>
+                    </a:stretch>
+                  </a:blipFill>
+                </p:spPr>
+                <p:txBody>
+                  <a:bodyPr/>
+                  <a:lstStyle/>
+                  <a:p>
+                    <a:r>
+                      <a:rPr lang="en-US">
+                        <a:noFill/>
+                      </a:rPr>
+                      <a:t> </a:t>
+                    </a:r>
+                  </a:p>
+                </p:txBody>
+              </p:sp>
+            </mc:Fallback>
+          </mc:AlternateContent>
+        </p:grpSp>
+        <p:sp>
+          <p:nvSpPr>
+            <p:cNvPr id="12" name="Rectangle: Rounded Corners 11">
+              <a:extLst>
+                <a:ext uri="{FF2B5EF4-FFF2-40B4-BE49-F238E27FC236}">
+                  <a16:creationId xmlns:a16="http://schemas.microsoft.com/office/drawing/2014/main" id="{9530F6F4-B289-4137-95BC-780EF50D49C3}"/>
+                </a:ext>
+              </a:extLst>
+            </p:cNvPr>
+            <p:cNvSpPr/>
+            <p:nvPr/>
+          </p:nvSpPr>
+          <p:spPr>
+            <a:xfrm>
+              <a:off x="889284" y="3111004"/>
+              <a:ext cx="5736285" cy="2467348"/>
+            </a:xfrm>
+            <a:prstGeom prst="roundRect">
+              <a:avLst/>
+            </a:prstGeom>
+            <a:noFill/>
+            <a:ln w="28575">
+              <a:solidFill>
+                <a:srgbClr val="C00000"/>
+              </a:solidFill>
+            </a:ln>
+          </p:spPr>
+          <p:style>
+            <a:lnRef idx="2">
+              <a:schemeClr val="accent1">
+                <a:shade val="50000"/>
+              </a:schemeClr>
+            </a:lnRef>
+            <a:fillRef idx="1">
+              <a:schemeClr val="accent1"/>
+            </a:fillRef>
+            <a:effectRef idx="0">
+              <a:schemeClr val="accent1"/>
+            </a:effectRef>
+            <a:fontRef idx="minor">
+              <a:schemeClr val="lt1"/>
+            </a:fontRef>
+          </p:style>
+          <p:txBody>
+            <a:bodyPr rtlCol="0" anchor="ctr"/>
+            <a:lstStyle/>
+            <a:p>
+              <a:pPr algn="ctr"/>
+              <a:endParaRPr lang="en-US"/>
+            </a:p>
+          </p:txBody>
+        </p:sp>
+      </p:grpSp>
+      <p:grpSp>
+        <p:nvGrpSpPr>
+          <p:cNvPr id="19" name="Group 18">
+            <a:extLst>
+              <a:ext uri="{FF2B5EF4-FFF2-40B4-BE49-F238E27FC236}">
+                <a16:creationId xmlns:a16="http://schemas.microsoft.com/office/drawing/2014/main" id="{61E33512-BCB7-4E6C-9C6B-528D72622B8F}"/>
+              </a:ext>
+            </a:extLst>
+          </p:cNvPr>
+          <p:cNvGrpSpPr/>
+          <p:nvPr/>
+        </p:nvGrpSpPr>
+        <p:grpSpPr>
+          <a:xfrm>
+            <a:off x="6842031" y="3224664"/>
+            <a:ext cx="4439182" cy="2149352"/>
+            <a:chOff x="7095540" y="3111004"/>
+            <a:chExt cx="4638409" cy="2467348"/>
+          </a:xfrm>
+        </p:grpSpPr>
+        <p:grpSp>
+          <p:nvGrpSpPr>
+            <p:cNvPr id="17" name="Group 16">
+              <a:extLst>
+                <a:ext uri="{FF2B5EF4-FFF2-40B4-BE49-F238E27FC236}">
+                  <a16:creationId xmlns:a16="http://schemas.microsoft.com/office/drawing/2014/main" id="{38A57B7D-89C9-4F51-9969-E79E071AF0F3}"/>
+                </a:ext>
+              </a:extLst>
+            </p:cNvPr>
+            <p:cNvGrpSpPr/>
+            <p:nvPr/>
+          </p:nvGrpSpPr>
+          <p:grpSpPr>
+            <a:xfrm>
+              <a:off x="7245066" y="3364091"/>
+              <a:ext cx="4359044" cy="1798183"/>
+              <a:chOff x="7142899" y="3169042"/>
+              <a:chExt cx="4359044" cy="1798183"/>
+            </a:xfrm>
+          </p:grpSpPr>
+          <p:pic>
+            <p:nvPicPr>
+              <p:cNvPr id="9" name="Picture 8">
+                <a:extLst>
+                  <a:ext uri="{FF2B5EF4-FFF2-40B4-BE49-F238E27FC236}">
+                    <a16:creationId xmlns:a16="http://schemas.microsoft.com/office/drawing/2014/main" id="{1C49593F-D689-45EC-BBBB-A5B049A00B79}"/>
+                  </a:ext>
+                </a:extLst>
+              </p:cNvPr>
+              <p:cNvPicPr>
+                <a:picLocks noChangeAspect="1"/>
+              </p:cNvPicPr>
+              <p:nvPr/>
+            </p:nvPicPr>
+            <p:blipFill>
+              <a:blip r:embed="rId6"/>
+              <a:stretch>
+                <a:fillRect/>
+              </a:stretch>
+            </p:blipFill>
+            <p:spPr>
+              <a:xfrm>
+                <a:off x="7142899" y="3808297"/>
+                <a:ext cx="4359044" cy="813172"/>
+              </a:xfrm>
+              <a:prstGeom prst="rect">
+                <a:avLst/>
+              </a:prstGeom>
+            </p:spPr>
+          </p:pic>
+          <mc:AlternateContent xmlns:mc="http://schemas.openxmlformats.org/markup-compatibility/2006" xmlns:a14="http://schemas.microsoft.com/office/drawing/2010/main">
+            <mc:Choice Requires="a14">
+              <p:sp>
+                <p:nvSpPr>
+                  <p:cNvPr id="13" name="TextBox 12">
+                    <a:extLst>
+                      <a:ext uri="{FF2B5EF4-FFF2-40B4-BE49-F238E27FC236}">
+                        <a16:creationId xmlns:a16="http://schemas.microsoft.com/office/drawing/2014/main" id="{83ADFEB8-49F0-459B-AC1A-06BDCED7D1AE}"/>
+                      </a:ext>
+                    </a:extLst>
+                  </p:cNvPr>
+                  <p:cNvSpPr txBox="1"/>
+                  <p:nvPr/>
+                </p:nvSpPr>
+                <p:spPr>
+                  <a:xfrm>
+                    <a:off x="8313714" y="4690226"/>
+                    <a:ext cx="2355403" cy="276999"/>
+                  </a:xfrm>
+                  <a:prstGeom prst="rect">
+                    <a:avLst/>
+                  </a:prstGeom>
+                  <a:noFill/>
+                </p:spPr>
+                <p:txBody>
+                  <a:bodyPr wrap="square" lIns="0" tIns="0" rIns="0" bIns="0" rtlCol="0">
+                    <a:spAutoFit/>
+                  </a:bodyPr>
+                  <a:lstStyle/>
+                  <a:p>
+                    <a:pPr/>
+                    <a14:m>
+                      <m:oMathPara xmlns:m="http://schemas.openxmlformats.org/officeDocument/2006/math">
+                        <m:oMathParaPr>
+                          <m:jc m:val="centerGroup"/>
+                        </m:oMathParaPr>
+                        <m:oMath xmlns:m="http://schemas.openxmlformats.org/officeDocument/2006/math">
+                          <m:sSup>
+                            <m:sSupPr>
+                              <m:ctrlPr>
+                                <a:rPr lang="en-US" b="0" i="1" smtClean="0">
+                                  <a:latin typeface="Cambria Math" panose="02040503050406030204" pitchFamily="18" charset="0"/>
+                                </a:rPr>
+                              </m:ctrlPr>
+                            </m:sSupPr>
+                            <m:e>
+                              <m:r>
+                                <a:rPr lang="en-US" b="0" i="1" smtClean="0">
+                                  <a:latin typeface="Cambria Math" panose="02040503050406030204" pitchFamily="18" charset="0"/>
+                                </a:rPr>
+                                <m:t>𝐴</m:t>
+                              </m:r>
+                            </m:e>
+                            <m:sup>
+                              <m:r>
+                                <a:rPr lang="en-US" b="0" i="1" smtClean="0">
+                                  <a:latin typeface="Cambria Math" panose="02040503050406030204" pitchFamily="18" charset="0"/>
+                                </a:rPr>
+                                <m:t>′</m:t>
+                              </m:r>
+                            </m:sup>
+                          </m:sSup>
+                          <m:r>
+                            <a:rPr lang="en-US" b="0" i="1" smtClean="0">
+                              <a:latin typeface="Cambria Math" panose="02040503050406030204" pitchFamily="18" charset="0"/>
+                            </a:rPr>
+                            <m:t>=</m:t>
+                          </m:r>
+                          <m:r>
+                            <a:rPr lang="en-US" b="0" i="1" smtClean="0">
+                              <a:latin typeface="Cambria Math" panose="02040503050406030204" pitchFamily="18" charset="0"/>
+                            </a:rPr>
+                            <m:t>𝐴</m:t>
+                          </m:r>
+                          <m:r>
+                            <a:rPr lang="en-US" b="0" i="1" smtClean="0">
+                              <a:latin typeface="Cambria Math" panose="02040503050406030204" pitchFamily="18" charset="0"/>
+                            </a:rPr>
+                            <m:t>±</m:t>
+                          </m:r>
+                          <m:r>
+                            <a:rPr lang="en-US" b="0" i="1" smtClean="0">
+                              <a:latin typeface="Cambria Math" panose="02040503050406030204" pitchFamily="18" charset="0"/>
+                            </a:rPr>
+                            <m:t>𝑒</m:t>
+                          </m:r>
+                          <m:r>
+                            <a:rPr lang="en-US" b="0" i="1" smtClean="0">
+                              <a:latin typeface="Cambria Math" panose="02040503050406030204" pitchFamily="18" charset="0"/>
+                            </a:rPr>
+                            <m:t>, </m:t>
+                          </m:r>
+                          <m:sSup>
+                            <m:sSupPr>
+                              <m:ctrlPr>
+                                <a:rPr lang="en-US" b="0" i="1" smtClean="0">
+                                  <a:latin typeface="Cambria Math" panose="02040503050406030204" pitchFamily="18" charset="0"/>
+                                </a:rPr>
+                              </m:ctrlPr>
+                            </m:sSupPr>
+                            <m:e>
+                              <m:r>
+                                <a:rPr lang="en-US" b="0" i="1" smtClean="0">
+                                  <a:latin typeface="Cambria Math" panose="02040503050406030204" pitchFamily="18" charset="0"/>
+                                </a:rPr>
+                                <m:t>𝑋</m:t>
+                              </m:r>
+                            </m:e>
+                            <m:sup>
+                              <m:r>
+                                <a:rPr lang="en-US" b="0" i="1" smtClean="0">
+                                  <a:latin typeface="Cambria Math" panose="02040503050406030204" pitchFamily="18" charset="0"/>
+                                </a:rPr>
+                                <m:t>′</m:t>
+                              </m:r>
+                            </m:sup>
+                          </m:sSup>
+                          <m:r>
+                            <a:rPr lang="en-US" b="0" i="1" smtClean="0">
+                              <a:latin typeface="Cambria Math" panose="02040503050406030204" pitchFamily="18" charset="0"/>
+                            </a:rPr>
+                            <m:t>=</m:t>
+                          </m:r>
+                          <m:r>
+                            <a:rPr lang="en-US" b="0" i="1" smtClean="0">
+                              <a:latin typeface="Cambria Math" panose="02040503050406030204" pitchFamily="18" charset="0"/>
+                            </a:rPr>
+                            <m:t>𝑋</m:t>
+                          </m:r>
+                          <m:r>
+                            <a:rPr lang="en-US" b="0" i="1" smtClean="0">
+                              <a:latin typeface="Cambria Math" panose="02040503050406030204" pitchFamily="18" charset="0"/>
+                            </a:rPr>
+                            <m:t>±</m:t>
+                          </m:r>
+                          <m:r>
+                            <a:rPr lang="en-US" b="0" i="1" smtClean="0">
+                              <a:latin typeface="Cambria Math" panose="02040503050406030204" pitchFamily="18" charset="0"/>
+                            </a:rPr>
+                            <m:t>𝑓</m:t>
+                          </m:r>
+                        </m:oMath>
+                      </m:oMathPara>
+                    </a14:m>
+                    <a:endParaRPr lang="en-US" dirty="0"/>
+                  </a:p>
+                </p:txBody>
+              </p:sp>
+            </mc:Choice>
+            <mc:Fallback xmlns="">
+              <p:sp>
+                <p:nvSpPr>
+                  <p:cNvPr id="13" name="TextBox 12">
+                    <a:extLst>
+                      <a:ext uri="{FF2B5EF4-FFF2-40B4-BE49-F238E27FC236}">
+                        <a16:creationId xmlns:a16="http://schemas.microsoft.com/office/drawing/2014/main" id="{83ADFEB8-49F0-459B-AC1A-06BDCED7D1AE}"/>
+                      </a:ext>
+                    </a:extLst>
+                  </p:cNvPr>
+                  <p:cNvSpPr txBox="1">
+                    <a:spLocks noRot="1" noChangeAspect="1" noMove="1" noResize="1" noEditPoints="1" noAdjustHandles="1" noChangeArrowheads="1" noChangeShapeType="1" noTextEdit="1"/>
+                  </p:cNvSpPr>
+                  <p:nvPr/>
+                </p:nvSpPr>
+                <p:spPr>
+                  <a:xfrm>
+                    <a:off x="8313714" y="4690226"/>
+                    <a:ext cx="2355403" cy="276999"/>
+                  </a:xfrm>
+                  <a:prstGeom prst="rect">
+                    <a:avLst/>
+                  </a:prstGeom>
+                  <a:blipFill>
+                    <a:blip r:embed="rId7"/>
+                    <a:stretch>
+                      <a:fillRect l="-2981" t="-5128" r="-4065" b="-56410"/>
+                    </a:stretch>
+                  </a:blipFill>
+                </p:spPr>
+                <p:txBody>
+                  <a:bodyPr/>
+                  <a:lstStyle/>
+                  <a:p>
+                    <a:r>
+                      <a:rPr lang="en-US">
+                        <a:noFill/>
+                      </a:rPr>
+                      <a:t> </a:t>
+                    </a:r>
+                  </a:p>
+                </p:txBody>
+              </p:sp>
+            </mc:Fallback>
+          </mc:AlternateContent>
+          <p:sp>
+            <p:nvSpPr>
+              <p:cNvPr id="14" name="TextBox 13">
+                <a:extLst>
+                  <a:ext uri="{FF2B5EF4-FFF2-40B4-BE49-F238E27FC236}">
+                    <a16:creationId xmlns:a16="http://schemas.microsoft.com/office/drawing/2014/main" id="{AB125B32-9121-4A25-915F-FDB097B2A494}"/>
+                  </a:ext>
+                </a:extLst>
+              </p:cNvPr>
+              <p:cNvSpPr txBox="1"/>
+              <p:nvPr/>
+            </p:nvSpPr>
+            <p:spPr>
+              <a:xfrm>
+                <a:off x="7611606" y="3169042"/>
+                <a:ext cx="3125343" cy="369332"/>
+              </a:xfrm>
+              <a:prstGeom prst="rect">
+                <a:avLst/>
+              </a:prstGeom>
+              <a:noFill/>
+            </p:spPr>
+            <p:txBody>
+              <a:bodyPr wrap="none" rtlCol="0">
+                <a:spAutoFit/>
+              </a:bodyPr>
+              <a:lstStyle/>
+              <a:p>
+                <a:r>
+                  <a:rPr lang="en-US" dirty="0"/>
+                  <a:t>Scalable Greedy Approximation</a:t>
+                </a:r>
+              </a:p>
+            </p:txBody>
+          </p:sp>
+        </p:grpSp>
+        <p:sp>
+          <p:nvSpPr>
+            <p:cNvPr id="16" name="Rectangle: Rounded Corners 15">
+              <a:extLst>
+                <a:ext uri="{FF2B5EF4-FFF2-40B4-BE49-F238E27FC236}">
+                  <a16:creationId xmlns:a16="http://schemas.microsoft.com/office/drawing/2014/main" id="{C9741835-7F6E-419D-86A6-A9384723AFAB}"/>
+                </a:ext>
+              </a:extLst>
+            </p:cNvPr>
+            <p:cNvSpPr/>
+            <p:nvPr/>
+          </p:nvSpPr>
+          <p:spPr>
+            <a:xfrm>
+              <a:off x="7095540" y="3111004"/>
+              <a:ext cx="4638409" cy="2467348"/>
+            </a:xfrm>
+            <a:prstGeom prst="roundRect">
+              <a:avLst/>
+            </a:prstGeom>
+            <a:noFill/>
+            <a:ln w="28575">
+              <a:solidFill>
+                <a:srgbClr val="C00000"/>
+              </a:solidFill>
+            </a:ln>
+          </p:spPr>
+          <p:style>
+            <a:lnRef idx="2">
+              <a:schemeClr val="accent1">
+                <a:shade val="50000"/>
+              </a:schemeClr>
+            </a:lnRef>
+            <a:fillRef idx="1">
+              <a:schemeClr val="accent1"/>
+            </a:fillRef>
+            <a:effectRef idx="0">
+              <a:schemeClr val="accent1"/>
+            </a:effectRef>
+            <a:fontRef idx="minor">
+              <a:schemeClr val="lt1"/>
+            </a:fontRef>
+          </p:style>
+          <p:txBody>
+            <a:bodyPr rtlCol="0" anchor="ctr"/>
+            <a:lstStyle/>
+            <a:p>
+              <a:pPr algn="ctr"/>
+              <a:endParaRPr lang="en-US"/>
+            </a:p>
+          </p:txBody>
+        </p:sp>
+      </p:grpSp>
+      <p:sp>
+        <p:nvSpPr>
+          <p:cNvPr id="20" name="Arrow: Right 19">
+            <a:extLst>
+              <a:ext uri="{FF2B5EF4-FFF2-40B4-BE49-F238E27FC236}">
+                <a16:creationId xmlns:a16="http://schemas.microsoft.com/office/drawing/2014/main" id="{36C7425A-8B78-4646-BF59-6D23F9A01E65}"/>
+              </a:ext>
+            </a:extLst>
+          </p:cNvPr>
+          <p:cNvSpPr/>
+          <p:nvPr/>
+        </p:nvSpPr>
+        <p:spPr>
+          <a:xfrm>
+            <a:off x="6200965" y="4107698"/>
+            <a:ext cx="475079" cy="183341"/>
+          </a:xfrm>
+          <a:prstGeom prst="rightArrow">
+            <a:avLst/>
+          </a:prstGeom>
+          <a:noFill/>
+          <a:ln w="28575">
+            <a:solidFill>
+              <a:schemeClr val="accent1"/>
+            </a:solidFill>
+          </a:ln>
+        </p:spPr>
+        <p:style>
+          <a:lnRef idx="2">
+            <a:schemeClr val="accent1">
+              <a:shade val="50000"/>
+            </a:schemeClr>
+          </a:lnRef>
+          <a:fillRef idx="1">
+            <a:schemeClr val="accent1"/>
+          </a:fillRef>
+          <a:effectRef idx="0">
+            <a:schemeClr val="accent1"/>
+          </a:effectRef>
+          <a:fontRef idx="minor">
+            <a:schemeClr val="lt1"/>
+          </a:fontRef>
+        </p:style>
+        <p:txBody>
+          <a:bodyPr rtlCol="0" anchor="ctr"/>
+          <a:lstStyle/>
+          <a:p>
+            <a:pPr algn="ctr"/>
+            <a:endParaRPr lang="en-US"/>
+          </a:p>
+        </p:txBody>
+      </p:sp>
+    </p:spTree>
+    <p:extLst>
+      <p:ext uri="{BB962C8B-B14F-4D97-AF65-F5344CB8AC3E}">
+        <p14:creationId xmlns:p14="http://schemas.microsoft.com/office/powerpoint/2010/main" val="308939988"/>
+      </p:ext>
+    </p:extLst>
+  </p:cSld>
+  <p:clrMapOvr>
+    <a:masterClrMapping/>
+  </p:clrMapOvr>
+</p:sld>
+</file>
+
+<file path=ppt/slides/slide23.xml><?xml version="1.0" encoding="utf-8"?>
+<p:sld xmlns:a="http://schemas.openxmlformats.org/drawingml/2006/main" xmlns:r="http://schemas.openxmlformats.org/officeDocument/2006/relationships" xmlns:p="http://schemas.openxmlformats.org/presentationml/2006/main">
+  <p:cSld>
+    <p:spTree>
+      <p:nvGrpSpPr>
+        <p:cNvPr id="1" name=""/>
+        <p:cNvGrpSpPr/>
+        <p:nvPr/>
+      </p:nvGrpSpPr>
+      <p:grpSpPr>
+        <a:xfrm>
+          <a:off x="0" y="0"/>
+          <a:ext cx="0" cy="0"/>
+          <a:chOff x="0" y="0"/>
+          <a:chExt cx="0" cy="0"/>
+        </a:xfrm>
+      </p:grpSpPr>
+      <p:sp>
+        <p:nvSpPr>
+          <p:cNvPr id="2" name="Title 1">
+            <a:extLst>
+              <a:ext uri="{FF2B5EF4-FFF2-40B4-BE49-F238E27FC236}">
+                <a16:creationId xmlns:a16="http://schemas.microsoft.com/office/drawing/2014/main" id="{FDAA4140-18F5-46CC-8B5F-FD31B0870961}"/>
+              </a:ext>
+            </a:extLst>
+          </p:cNvPr>
+          <p:cNvSpPr>
+            <a:spLocks noGrp="1"/>
+          </p:cNvSpPr>
+          <p:nvPr>
+            <p:ph type="title"/>
+          </p:nvPr>
+        </p:nvSpPr>
+        <p:spPr/>
+        <p:txBody>
+          <a:bodyPr/>
+          <a:lstStyle/>
+          <a:p>
+            <a:r>
+              <a:rPr lang="en-US" dirty="0" err="1"/>
+              <a:t>Nettack</a:t>
+            </a:r>
+            <a:r>
+              <a:rPr lang="en-US" dirty="0"/>
+              <a:t> Algorithm</a:t>
+            </a:r>
+          </a:p>
+        </p:txBody>
+      </p:sp>
+      <p:pic>
+        <p:nvPicPr>
+          <p:cNvPr id="4" name="Picture 3">
+            <a:extLst>
+              <a:ext uri="{FF2B5EF4-FFF2-40B4-BE49-F238E27FC236}">
+                <a16:creationId xmlns:a16="http://schemas.microsoft.com/office/drawing/2014/main" id="{6D747ADA-4FE9-4B3B-A55E-940591B15634}"/>
+              </a:ext>
+            </a:extLst>
+          </p:cNvPr>
+          <p:cNvPicPr>
+            <a:picLocks noChangeAspect="1"/>
+          </p:cNvPicPr>
+          <p:nvPr/>
+        </p:nvPicPr>
+        <p:blipFill>
+          <a:blip r:embed="rId2"/>
+          <a:stretch>
+            <a:fillRect/>
+          </a:stretch>
+        </p:blipFill>
+        <p:spPr>
+          <a:xfrm>
+            <a:off x="1032842" y="1618289"/>
+            <a:ext cx="5454801" cy="4874586"/>
+          </a:xfrm>
+          <a:prstGeom prst="rect">
+            <a:avLst/>
+          </a:prstGeom>
+        </p:spPr>
+      </p:pic>
+      <p:sp>
+        <p:nvSpPr>
+          <p:cNvPr id="5" name="TextBox 4">
+            <a:extLst>
+              <a:ext uri="{FF2B5EF4-FFF2-40B4-BE49-F238E27FC236}">
+                <a16:creationId xmlns:a16="http://schemas.microsoft.com/office/drawing/2014/main" id="{F9A31353-6C62-49D4-AEB5-8BB2ECD733D9}"/>
+              </a:ext>
+            </a:extLst>
+          </p:cNvPr>
+          <p:cNvSpPr txBox="1"/>
+          <p:nvPr/>
+        </p:nvSpPr>
+        <p:spPr>
+          <a:xfrm>
+            <a:off x="6985710" y="2572764"/>
+            <a:ext cx="3961974" cy="2862322"/>
+          </a:xfrm>
+          <a:prstGeom prst="rect">
+            <a:avLst/>
+          </a:prstGeom>
+          <a:noFill/>
+          <a:ln>
+            <a:solidFill>
+              <a:schemeClr val="bg1">
+                <a:lumMod val="50000"/>
+              </a:schemeClr>
+            </a:solidFill>
+          </a:ln>
+        </p:spPr>
+        <p:txBody>
+          <a:bodyPr wrap="square" rtlCol="0">
+            <a:spAutoFit/>
+          </a:bodyPr>
+          <a:lstStyle/>
+          <a:p>
+            <a:pPr marL="285750" indent="-285750">
+              <a:buFont typeface="Arial" panose="020B0604020202020204" pitchFamily="34" charset="0"/>
+              <a:buChar char="•"/>
+            </a:pPr>
+            <a:r>
+              <a:rPr lang="en-US" dirty="0"/>
+              <a:t>Sequentially manipulate an entry from the adjacency matrix or a feature entry and pick one which increases the surrogate loss most.</a:t>
+            </a:r>
+          </a:p>
+          <a:p>
+            <a:endParaRPr lang="en-US" dirty="0"/>
+          </a:p>
+          <a:p>
+            <a:pPr marL="285750" indent="-285750">
+              <a:buFont typeface="Arial" panose="020B0604020202020204" pitchFamily="34" charset="0"/>
+              <a:buChar char="•"/>
+            </a:pPr>
+            <a:r>
+              <a:rPr lang="en-US" dirty="0"/>
+              <a:t>Efficient computation needed for the score functions and candidate edge/feature perturbations (refer to the paper for details). </a:t>
+            </a:r>
+          </a:p>
+          <a:p>
+            <a:endParaRPr lang="en-US" dirty="0"/>
+          </a:p>
+        </p:txBody>
+      </p:sp>
+    </p:spTree>
+    <p:extLst>
+      <p:ext uri="{BB962C8B-B14F-4D97-AF65-F5344CB8AC3E}">
+        <p14:creationId xmlns:p14="http://schemas.microsoft.com/office/powerpoint/2010/main" val="3316262587"/>
+      </p:ext>
+    </p:extLst>
+  </p:cSld>
+  <p:clrMapOvr>
+    <a:masterClrMapping/>
+  </p:clrMapOvr>
+</p:sld>
+</file>
+
+<file path=ppt/slides/slide24.xml><?xml version="1.0" encoding="utf-8"?>
+<p:sld xmlns:a="http://schemas.openxmlformats.org/drawingml/2006/main" xmlns:r="http://schemas.openxmlformats.org/officeDocument/2006/relationships" xmlns:p="http://schemas.openxmlformats.org/presentationml/2006/main">
+  <p:cSld>
+    <p:spTree>
+      <p:nvGrpSpPr>
+        <p:cNvPr id="1" name=""/>
+        <p:cNvGrpSpPr/>
+        <p:nvPr/>
+      </p:nvGrpSpPr>
+      <p:grpSpPr>
+        <a:xfrm>
+          <a:off x="0" y="0"/>
+          <a:ext cx="0" cy="0"/>
+          <a:chOff x="0" y="0"/>
+          <a:chExt cx="0" cy="0"/>
+        </a:xfrm>
+      </p:grpSpPr>
+      <p:sp>
+        <p:nvSpPr>
+          <p:cNvPr id="2" name="Title 1">
+            <a:extLst>
+              <a:ext uri="{FF2B5EF4-FFF2-40B4-BE49-F238E27FC236}">
+                <a16:creationId xmlns:a16="http://schemas.microsoft.com/office/drawing/2014/main" id="{0AE86E7A-094C-472F-BABC-990ABAA97D5A}"/>
+              </a:ext>
+            </a:extLst>
+          </p:cNvPr>
+          <p:cNvSpPr>
+            <a:spLocks noGrp="1"/>
+          </p:cNvSpPr>
+          <p:nvPr>
+            <p:ph type="title"/>
+          </p:nvPr>
+        </p:nvSpPr>
+        <p:spPr>
+          <a:xfrm>
+            <a:off x="705382" y="479693"/>
+            <a:ext cx="10515600" cy="1325563"/>
+          </a:xfrm>
+        </p:spPr>
+        <p:txBody>
+          <a:bodyPr/>
+          <a:lstStyle/>
+          <a:p>
+            <a:r>
+              <a:rPr lang="en-US" dirty="0"/>
+              <a:t>Experimental results : Attack on surrogate</a:t>
+            </a:r>
+          </a:p>
+        </p:txBody>
+      </p:sp>
+      <p:pic>
+        <p:nvPicPr>
+          <p:cNvPr id="4" name="Picture 3">
+            <a:extLst>
+              <a:ext uri="{FF2B5EF4-FFF2-40B4-BE49-F238E27FC236}">
+                <a16:creationId xmlns:a16="http://schemas.microsoft.com/office/drawing/2014/main" id="{76C13D42-9B4D-40AE-8C43-86DD7A793B95}"/>
+              </a:ext>
+            </a:extLst>
+          </p:cNvPr>
+          <p:cNvPicPr>
+            <a:picLocks noChangeAspect="1"/>
+          </p:cNvPicPr>
+          <p:nvPr/>
+        </p:nvPicPr>
+        <p:blipFill>
+          <a:blip r:embed="rId2"/>
+          <a:stretch>
+            <a:fillRect/>
+          </a:stretch>
+        </p:blipFill>
+        <p:spPr>
+          <a:xfrm>
+            <a:off x="531271" y="3679310"/>
+            <a:ext cx="3545216" cy="3029548"/>
+          </a:xfrm>
+          <a:prstGeom prst="rect">
+            <a:avLst/>
+          </a:prstGeom>
+        </p:spPr>
+      </p:pic>
+      <p:pic>
+        <p:nvPicPr>
+          <p:cNvPr id="5" name="Picture 4">
+            <a:extLst>
+              <a:ext uri="{FF2B5EF4-FFF2-40B4-BE49-F238E27FC236}">
+                <a16:creationId xmlns:a16="http://schemas.microsoft.com/office/drawing/2014/main" id="{7C0159E8-1806-457F-A0E6-AFBC3479AC27}"/>
+              </a:ext>
+            </a:extLst>
+          </p:cNvPr>
+          <p:cNvPicPr>
+            <a:picLocks noChangeAspect="1"/>
+          </p:cNvPicPr>
+          <p:nvPr/>
+        </p:nvPicPr>
+        <p:blipFill>
+          <a:blip r:embed="rId3"/>
+          <a:stretch>
+            <a:fillRect/>
+          </a:stretch>
+        </p:blipFill>
+        <p:spPr>
+          <a:xfrm>
+            <a:off x="4476946" y="4021045"/>
+            <a:ext cx="7262490" cy="2605274"/>
+          </a:xfrm>
+          <a:prstGeom prst="rect">
+            <a:avLst/>
+          </a:prstGeom>
+        </p:spPr>
+      </p:pic>
+      <p:sp>
+        <p:nvSpPr>
+          <p:cNvPr id="6" name="TextBox 5">
+            <a:extLst>
+              <a:ext uri="{FF2B5EF4-FFF2-40B4-BE49-F238E27FC236}">
+                <a16:creationId xmlns:a16="http://schemas.microsoft.com/office/drawing/2014/main" id="{BD3FD7B2-3D2A-46AF-AA92-50813CE67BCF}"/>
+              </a:ext>
+            </a:extLst>
+          </p:cNvPr>
+          <p:cNvSpPr txBox="1"/>
+          <p:nvPr/>
+        </p:nvSpPr>
+        <p:spPr>
+          <a:xfrm>
+            <a:off x="531271" y="1704323"/>
+            <a:ext cx="6195723" cy="2308324"/>
+          </a:xfrm>
+          <a:prstGeom prst="rect">
+            <a:avLst/>
+          </a:prstGeom>
+          <a:noFill/>
+        </p:spPr>
+        <p:txBody>
+          <a:bodyPr wrap="square" rtlCol="0">
+            <a:spAutoFit/>
+          </a:bodyPr>
+          <a:lstStyle/>
+          <a:p>
+            <a:pPr marL="457200" indent="-457200">
+              <a:buFont typeface="Arial" panose="020B0604020202020204" pitchFamily="34" charset="0"/>
+              <a:buChar char="•"/>
+            </a:pPr>
+            <a:r>
+              <a:rPr lang="en-US" sz="2400" dirty="0"/>
+              <a:t>Surrogate model trained on Cora-ML, </a:t>
+            </a:r>
+            <a:r>
+              <a:rPr lang="en-US" sz="2400" dirty="0" err="1"/>
+              <a:t>Citeseer</a:t>
+            </a:r>
+            <a:r>
+              <a:rPr lang="en-US" sz="2400" dirty="0"/>
+              <a:t>, </a:t>
+            </a:r>
+            <a:r>
+              <a:rPr lang="en-US" sz="2400" dirty="0" err="1"/>
+              <a:t>Polblogs</a:t>
+            </a:r>
+            <a:r>
+              <a:rPr lang="en-US" sz="2400" dirty="0"/>
+              <a:t> graphs. </a:t>
+            </a:r>
+          </a:p>
+          <a:p>
+            <a:pPr marL="457200" indent="-457200">
+              <a:buFont typeface="Arial" panose="020B0604020202020204" pitchFamily="34" charset="0"/>
+              <a:buChar char="•"/>
+            </a:pPr>
+            <a:r>
+              <a:rPr lang="en-US" sz="2400" dirty="0"/>
+              <a:t>Adversarial graphs using </a:t>
+            </a:r>
+            <a:r>
+              <a:rPr lang="en-US" sz="2400" dirty="0" err="1"/>
+              <a:t>Nettack</a:t>
+            </a:r>
+            <a:r>
+              <a:rPr lang="en-US" sz="2400" dirty="0"/>
+              <a:t> (Direct) successful than </a:t>
+            </a:r>
+            <a:r>
+              <a:rPr lang="en-US" sz="2400" dirty="0" err="1"/>
+              <a:t>Nettack</a:t>
+            </a:r>
+            <a:r>
+              <a:rPr lang="en-US" sz="2400" dirty="0"/>
+              <a:t>-In(influence).</a:t>
+            </a:r>
+          </a:p>
+          <a:p>
+            <a:pPr marL="457200" indent="-457200">
+              <a:buFont typeface="Arial" panose="020B0604020202020204" pitchFamily="34" charset="0"/>
+              <a:buChar char="•"/>
+            </a:pPr>
+            <a:r>
+              <a:rPr lang="en-US" sz="2400" dirty="0"/>
+              <a:t>Unconstrained perturbations are detectable.</a:t>
+            </a:r>
+          </a:p>
+          <a:p>
+            <a:pPr marL="457200" indent="-457200">
+              <a:buFont typeface="Arial" panose="020B0604020202020204" pitchFamily="34" charset="0"/>
+              <a:buChar char="•"/>
+            </a:pPr>
+            <a:endParaRPr lang="en-US" sz="2400" dirty="0"/>
+          </a:p>
+        </p:txBody>
+      </p:sp>
+      <p:pic>
+        <p:nvPicPr>
+          <p:cNvPr id="7" name="Picture 6">
+            <a:extLst>
+              <a:ext uri="{FF2B5EF4-FFF2-40B4-BE49-F238E27FC236}">
+                <a16:creationId xmlns:a16="http://schemas.microsoft.com/office/drawing/2014/main" id="{533F7C3E-7C93-44B8-8D07-8600F7D28DAC}"/>
+              </a:ext>
+            </a:extLst>
+          </p:cNvPr>
+          <p:cNvPicPr>
+            <a:picLocks noChangeAspect="1"/>
+          </p:cNvPicPr>
+          <p:nvPr/>
+        </p:nvPicPr>
+        <p:blipFill>
+          <a:blip r:embed="rId4"/>
+          <a:stretch>
+            <a:fillRect/>
+          </a:stretch>
+        </p:blipFill>
+        <p:spPr>
+          <a:xfrm>
+            <a:off x="7127453" y="1499395"/>
+            <a:ext cx="3979563" cy="2521650"/>
+          </a:xfrm>
+          <a:prstGeom prst="rect">
+            <a:avLst/>
+          </a:prstGeom>
+        </p:spPr>
+      </p:pic>
+    </p:spTree>
+    <p:extLst>
+      <p:ext uri="{BB962C8B-B14F-4D97-AF65-F5344CB8AC3E}">
+        <p14:creationId xmlns:p14="http://schemas.microsoft.com/office/powerpoint/2010/main" val="971289627"/>
+      </p:ext>
+    </p:extLst>
+  </p:cSld>
+  <p:clrMapOvr>
+    <a:masterClrMapping/>
+  </p:clrMapOvr>
+</p:sld>
+</file>
+
+<file path=ppt/slides/slide25.xml><?xml version="1.0" encoding="utf-8"?>
+<p:sld xmlns:a="http://schemas.openxmlformats.org/drawingml/2006/main" xmlns:r="http://schemas.openxmlformats.org/officeDocument/2006/relationships" xmlns:p="http://schemas.openxmlformats.org/presentationml/2006/main">
+  <p:cSld>
+    <p:spTree>
+      <p:nvGrpSpPr>
+        <p:cNvPr id="1" name=""/>
+        <p:cNvGrpSpPr/>
+        <p:nvPr/>
+      </p:nvGrpSpPr>
+      <p:grpSpPr>
+        <a:xfrm>
+          <a:off x="0" y="0"/>
+          <a:ext cx="0" cy="0"/>
+          <a:chOff x="0" y="0"/>
+          <a:chExt cx="0" cy="0"/>
+        </a:xfrm>
+      </p:grpSpPr>
+      <p:sp>
+        <p:nvSpPr>
+          <p:cNvPr id="2" name="Title 1">
+            <a:extLst>
+              <a:ext uri="{FF2B5EF4-FFF2-40B4-BE49-F238E27FC236}">
+                <a16:creationId xmlns:a16="http://schemas.microsoft.com/office/drawing/2014/main" id="{EF0004AB-9055-4653-A73D-30D076F3CD6F}"/>
+              </a:ext>
+            </a:extLst>
+          </p:cNvPr>
+          <p:cNvSpPr>
+            <a:spLocks noGrp="1"/>
+          </p:cNvSpPr>
+          <p:nvPr>
+            <p:ph type="title"/>
+          </p:nvPr>
+        </p:nvSpPr>
+        <p:spPr/>
+        <p:txBody>
+          <a:bodyPr/>
+          <a:lstStyle/>
+          <a:p>
+            <a:r>
+              <a:rPr lang="en-US" dirty="0"/>
+              <a:t>Experimental result: Transfer to actual models</a:t>
+            </a:r>
+          </a:p>
+        </p:txBody>
+      </p:sp>
+      <p:pic>
+        <p:nvPicPr>
+          <p:cNvPr id="4" name="Content Placeholder 3">
+            <a:extLst>
+              <a:ext uri="{FF2B5EF4-FFF2-40B4-BE49-F238E27FC236}">
+                <a16:creationId xmlns:a16="http://schemas.microsoft.com/office/drawing/2014/main" id="{3BBD33EF-BFBC-46D2-AF23-C76B5935CA0F}"/>
+              </a:ext>
+            </a:extLst>
+          </p:cNvPr>
+          <p:cNvPicPr>
+            <a:picLocks noGrp="1" noChangeAspect="1"/>
+          </p:cNvPicPr>
+          <p:nvPr>
+            <p:ph idx="1"/>
+          </p:nvPr>
+        </p:nvPicPr>
+        <p:blipFill>
+          <a:blip r:embed="rId2"/>
+          <a:stretch>
+            <a:fillRect/>
+          </a:stretch>
+        </p:blipFill>
+        <p:spPr>
+          <a:xfrm>
+            <a:off x="1434565" y="3728185"/>
+            <a:ext cx="3180713" cy="2647072"/>
+          </a:xfrm>
+          <a:prstGeom prst="rect">
+            <a:avLst/>
+          </a:prstGeom>
+        </p:spPr>
+      </p:pic>
+      <p:grpSp>
+        <p:nvGrpSpPr>
+          <p:cNvPr id="7" name="Group 6">
+            <a:extLst>
+              <a:ext uri="{FF2B5EF4-FFF2-40B4-BE49-F238E27FC236}">
+                <a16:creationId xmlns:a16="http://schemas.microsoft.com/office/drawing/2014/main" id="{1875FC23-12F1-42CF-9EF6-6632EF54D358}"/>
+              </a:ext>
+            </a:extLst>
+          </p:cNvPr>
+          <p:cNvGrpSpPr/>
+          <p:nvPr/>
+        </p:nvGrpSpPr>
+        <p:grpSpPr>
+          <a:xfrm>
+            <a:off x="6876384" y="3793033"/>
+            <a:ext cx="3238208" cy="2740584"/>
+            <a:chOff x="7060286" y="2189003"/>
+            <a:chExt cx="3238208" cy="2740584"/>
+          </a:xfrm>
+        </p:grpSpPr>
+        <p:pic>
+          <p:nvPicPr>
+            <p:cNvPr id="5" name="Picture 4">
+              <a:extLst>
+                <a:ext uri="{FF2B5EF4-FFF2-40B4-BE49-F238E27FC236}">
+                  <a16:creationId xmlns:a16="http://schemas.microsoft.com/office/drawing/2014/main" id="{652395C3-474F-4410-99A3-AFE8A050005C}"/>
+                </a:ext>
+              </a:extLst>
+            </p:cNvPr>
+            <p:cNvPicPr>
+              <a:picLocks noChangeAspect="1"/>
+            </p:cNvPicPr>
+            <p:nvPr/>
+          </p:nvPicPr>
+          <p:blipFill>
+            <a:blip r:embed="rId3"/>
+            <a:stretch>
+              <a:fillRect/>
+            </a:stretch>
+          </p:blipFill>
+          <p:spPr>
+            <a:xfrm>
+              <a:off x="7060286" y="2189003"/>
+              <a:ext cx="3069631" cy="2673914"/>
+            </a:xfrm>
+            <a:prstGeom prst="rect">
+              <a:avLst/>
+            </a:prstGeom>
+          </p:spPr>
+        </p:pic>
+        <p:sp>
+          <p:nvSpPr>
+            <p:cNvPr id="6" name="Rectangle 5">
+              <a:extLst>
+                <a:ext uri="{FF2B5EF4-FFF2-40B4-BE49-F238E27FC236}">
+                  <a16:creationId xmlns:a16="http://schemas.microsoft.com/office/drawing/2014/main" id="{FC2B6175-910D-495B-9858-6E999351BA38}"/>
+                </a:ext>
+              </a:extLst>
+            </p:cNvPr>
+            <p:cNvSpPr/>
+            <p:nvPr/>
+          </p:nvSpPr>
+          <p:spPr>
+            <a:xfrm>
+              <a:off x="9930691" y="4612867"/>
+              <a:ext cx="367803" cy="316720"/>
+            </a:xfrm>
+            <a:prstGeom prst="rect">
+              <a:avLst/>
+            </a:prstGeom>
+            <a:solidFill>
+              <a:schemeClr val="bg1"/>
+            </a:solidFill>
+            <a:ln>
+              <a:solidFill>
+                <a:schemeClr val="bg1"/>
+              </a:solidFill>
+            </a:ln>
+          </p:spPr>
+          <p:style>
+            <a:lnRef idx="2">
+              <a:schemeClr val="accent1">
+                <a:shade val="50000"/>
+              </a:schemeClr>
+            </a:lnRef>
+            <a:fillRef idx="1">
+              <a:schemeClr val="accent1"/>
+            </a:fillRef>
+            <a:effectRef idx="0">
+              <a:schemeClr val="accent1"/>
+            </a:effectRef>
+            <a:fontRef idx="minor">
+              <a:schemeClr val="lt1"/>
+            </a:fontRef>
+          </p:style>
+          <p:txBody>
+            <a:bodyPr rtlCol="0" anchor="ctr"/>
+            <a:lstStyle/>
+            <a:p>
+              <a:pPr algn="ctr"/>
+              <a:endParaRPr lang="en-US"/>
+            </a:p>
+          </p:txBody>
+        </p:sp>
+      </p:grpSp>
+      <p:sp>
+        <p:nvSpPr>
+          <p:cNvPr id="8" name="TextBox 7">
+            <a:extLst>
+              <a:ext uri="{FF2B5EF4-FFF2-40B4-BE49-F238E27FC236}">
+                <a16:creationId xmlns:a16="http://schemas.microsoft.com/office/drawing/2014/main" id="{AFB94E67-7B52-4177-A2EC-39F76C95223A}"/>
+              </a:ext>
+            </a:extLst>
+          </p:cNvPr>
+          <p:cNvSpPr txBox="1"/>
+          <p:nvPr/>
+        </p:nvSpPr>
+        <p:spPr>
+          <a:xfrm>
+            <a:off x="740715" y="1632118"/>
+            <a:ext cx="10413858" cy="1938992"/>
+          </a:xfrm>
+          <a:prstGeom prst="rect">
+            <a:avLst/>
+          </a:prstGeom>
+          <a:noFill/>
+        </p:spPr>
+        <p:txBody>
+          <a:bodyPr wrap="square" rtlCol="0">
+            <a:spAutoFit/>
+          </a:bodyPr>
+          <a:lstStyle/>
+          <a:p>
+            <a:pPr marL="285750" indent="-285750">
+              <a:buFont typeface="Arial" panose="020B0604020202020204" pitchFamily="34" charset="0"/>
+              <a:buChar char="•"/>
+            </a:pPr>
+            <a:r>
+              <a:rPr lang="en-US" sz="2400" dirty="0"/>
+              <a:t>Adversarial Graphs from surrogate model evaluated on GCN for both Evasion attacks and Poisoning attacks.</a:t>
+            </a:r>
+          </a:p>
+          <a:p>
+            <a:pPr marL="285750" indent="-285750">
+              <a:buFont typeface="Arial" panose="020B0604020202020204" pitchFamily="34" charset="0"/>
+              <a:buChar char="•"/>
+            </a:pPr>
+            <a:r>
+              <a:rPr lang="en-US" sz="2400" dirty="0"/>
+              <a:t>Surrogate model is a good approximator for true models. </a:t>
+            </a:r>
+          </a:p>
+          <a:p>
+            <a:pPr marL="285750" indent="-285750">
+              <a:buFont typeface="Arial" panose="020B0604020202020204" pitchFamily="34" charset="0"/>
+              <a:buChar char="•"/>
+            </a:pPr>
+            <a:r>
+              <a:rPr lang="en-US" sz="2400" dirty="0"/>
+              <a:t>Both Evasion and poisoning attacks are successful.  </a:t>
+            </a:r>
+          </a:p>
+          <a:p>
+            <a:pPr marL="285750" indent="-285750">
+              <a:buFont typeface="Arial" panose="020B0604020202020204" pitchFamily="34" charset="0"/>
+              <a:buChar char="•"/>
+            </a:pPr>
+            <a:r>
+              <a:rPr lang="en-US" sz="2400" dirty="0"/>
+              <a:t>Direct attacks much successful than gradient attacks </a:t>
+            </a:r>
+          </a:p>
+        </p:txBody>
+      </p:sp>
+    </p:spTree>
+    <p:extLst>
+      <p:ext uri="{BB962C8B-B14F-4D97-AF65-F5344CB8AC3E}">
+        <p14:creationId xmlns:p14="http://schemas.microsoft.com/office/powerpoint/2010/main" val="2685169693"/>
+      </p:ext>
+    </p:extLst>
+  </p:cSld>
+  <p:clrMapOvr>
+    <a:masterClrMapping/>
+  </p:clrMapOvr>
+</p:sld>
+</file>
+
+<file path=ppt/slides/slide26.xml><?xml version="1.0" encoding="utf-8"?>
+<p:sld xmlns:a="http://schemas.openxmlformats.org/drawingml/2006/main" xmlns:r="http://schemas.openxmlformats.org/officeDocument/2006/relationships" xmlns:p="http://schemas.openxmlformats.org/presentationml/2006/main">
+  <p:cSld>
+    <p:spTree>
+      <p:nvGrpSpPr>
+        <p:cNvPr id="1" name=""/>
+        <p:cNvGrpSpPr/>
+        <p:nvPr/>
+      </p:nvGrpSpPr>
+      <p:grpSpPr>
+        <a:xfrm>
+          <a:off x="0" y="0"/>
+          <a:ext cx="0" cy="0"/>
+          <a:chOff x="0" y="0"/>
+          <a:chExt cx="0" cy="0"/>
+        </a:xfrm>
+      </p:grpSpPr>
+      <p:sp>
+        <p:nvSpPr>
+          <p:cNvPr id="2" name="Title 1">
+            <a:extLst>
+              <a:ext uri="{FF2B5EF4-FFF2-40B4-BE49-F238E27FC236}">
+                <a16:creationId xmlns:a16="http://schemas.microsoft.com/office/drawing/2014/main" id="{F929B5C6-06A9-4117-ACE8-3026A277D8A5}"/>
+              </a:ext>
+            </a:extLst>
+          </p:cNvPr>
+          <p:cNvSpPr>
+            <a:spLocks noGrp="1"/>
+          </p:cNvSpPr>
+          <p:nvPr>
+            <p:ph type="title"/>
+          </p:nvPr>
+        </p:nvSpPr>
+        <p:spPr>
+          <a:xfrm>
+            <a:off x="838199" y="365125"/>
+            <a:ext cx="10814015" cy="1325563"/>
+          </a:xfrm>
+        </p:spPr>
+        <p:txBody>
+          <a:bodyPr/>
+          <a:lstStyle/>
+          <a:p>
+            <a:r>
+              <a:rPr lang="en-US" dirty="0"/>
+              <a:t>Experimental results: Limited Graph knowledge</a:t>
+            </a:r>
+          </a:p>
+        </p:txBody>
+      </p:sp>
+      <p:pic>
+        <p:nvPicPr>
+          <p:cNvPr id="4" name="Picture 3">
+            <a:extLst>
+              <a:ext uri="{FF2B5EF4-FFF2-40B4-BE49-F238E27FC236}">
+                <a16:creationId xmlns:a16="http://schemas.microsoft.com/office/drawing/2014/main" id="{3057B196-BF73-42E4-9E54-37FC042EE379}"/>
+              </a:ext>
+            </a:extLst>
+          </p:cNvPr>
+          <p:cNvPicPr>
+            <a:picLocks noChangeAspect="1"/>
+          </p:cNvPicPr>
+          <p:nvPr/>
+        </p:nvPicPr>
+        <p:blipFill>
+          <a:blip r:embed="rId2"/>
+          <a:stretch>
+            <a:fillRect/>
+          </a:stretch>
+        </p:blipFill>
+        <p:spPr>
+          <a:xfrm>
+            <a:off x="2859269" y="3949806"/>
+            <a:ext cx="6340923" cy="2386990"/>
+          </a:xfrm>
+          <a:prstGeom prst="rect">
+            <a:avLst/>
+          </a:prstGeom>
+        </p:spPr>
+      </p:pic>
+      <p:sp>
+        <p:nvSpPr>
+          <p:cNvPr id="5" name="TextBox 4">
+            <a:extLst>
+              <a:ext uri="{FF2B5EF4-FFF2-40B4-BE49-F238E27FC236}">
+                <a16:creationId xmlns:a16="http://schemas.microsoft.com/office/drawing/2014/main" id="{9D18A9B8-FCD3-4831-ABEF-B1BA93E3F720}"/>
+              </a:ext>
+            </a:extLst>
+          </p:cNvPr>
+          <p:cNvSpPr txBox="1"/>
+          <p:nvPr/>
+        </p:nvSpPr>
+        <p:spPr>
+          <a:xfrm>
+            <a:off x="950158" y="1604032"/>
+            <a:ext cx="9757006" cy="2246769"/>
+          </a:xfrm>
+          <a:prstGeom prst="rect">
+            <a:avLst/>
+          </a:prstGeom>
+          <a:noFill/>
+        </p:spPr>
+        <p:txBody>
+          <a:bodyPr wrap="square" rtlCol="0">
+            <a:spAutoFit/>
+          </a:bodyPr>
+          <a:lstStyle/>
+          <a:p>
+            <a:pPr marL="285750" indent="-285750">
+              <a:buFont typeface="Arial" panose="020B0604020202020204" pitchFamily="34" charset="0"/>
+              <a:buChar char="•"/>
+            </a:pPr>
+            <a:r>
+              <a:rPr lang="en-US" sz="2000" dirty="0"/>
+              <a:t>Assume that attacker does not know the complete graph but only a subset of the graph. </a:t>
+            </a:r>
+          </a:p>
+          <a:p>
+            <a:pPr marL="285750" indent="-285750">
+              <a:buFont typeface="Arial" panose="020B0604020202020204" pitchFamily="34" charset="0"/>
+              <a:buChar char="•"/>
+            </a:pPr>
+            <a:endParaRPr lang="en-US" sz="2000" dirty="0"/>
+          </a:p>
+          <a:p>
+            <a:pPr marL="285750" indent="-285750">
+              <a:buFont typeface="Arial" panose="020B0604020202020204" pitchFamily="34" charset="0"/>
+              <a:buChar char="•"/>
+            </a:pPr>
+            <a:r>
+              <a:rPr lang="en-US" sz="2000" dirty="0"/>
+              <a:t>Used subgraphs of increasing size from the target node (1-hop, 2 hop etc.) to generate the adversarial subgraphs. </a:t>
+            </a:r>
+          </a:p>
+          <a:p>
+            <a:pPr marL="285750" indent="-285750">
+              <a:buFont typeface="Arial" panose="020B0604020202020204" pitchFamily="34" charset="0"/>
+              <a:buChar char="•"/>
+            </a:pPr>
+            <a:endParaRPr lang="en-US" sz="2000" dirty="0"/>
+          </a:p>
+          <a:p>
+            <a:pPr marL="285750" indent="-285750">
+              <a:buFont typeface="Arial" panose="020B0604020202020204" pitchFamily="34" charset="0"/>
+              <a:buChar char="•"/>
+            </a:pPr>
+            <a:r>
+              <a:rPr lang="en-US" sz="2000" dirty="0"/>
+              <a:t>Direct attack successful for even 10% of the graph access, with expense of slightly more perturbations. </a:t>
+            </a:r>
+          </a:p>
+        </p:txBody>
+      </p:sp>
+    </p:spTree>
+    <p:extLst>
+      <p:ext uri="{BB962C8B-B14F-4D97-AF65-F5344CB8AC3E}">
+        <p14:creationId xmlns:p14="http://schemas.microsoft.com/office/powerpoint/2010/main" val="4047901213"/>
+      </p:ext>
+    </p:extLst>
+  </p:cSld>
+  <p:clrMapOvr>
+    <a:masterClrMapping/>
+  </p:clrMapOvr>
+</p:sld>
+</file>
+
+<file path=ppt/slides/slide3.xml><?xml version="1.0" encoding="utf-8"?>
+<p:sld xmlns:a="http://schemas.openxmlformats.org/drawingml/2006/main" xmlns:r="http://schemas.openxmlformats.org/officeDocument/2006/relationships" xmlns:p="http://schemas.openxmlformats.org/presentationml/2006/main">
+  <p:cSld>
+    <p:spTree>
+      <p:nvGrpSpPr>
+        <p:cNvPr id="1" name=""/>
+        <p:cNvGrpSpPr/>
+        <p:nvPr/>
+      </p:nvGrpSpPr>
+      <p:grpSpPr>
+        <a:xfrm>
+          <a:off x="0" y="0"/>
+          <a:ext cx="0" cy="0"/>
+          <a:chOff x="0" y="0"/>
+          <a:chExt cx="0" cy="0"/>
+        </a:xfrm>
+      </p:grpSpPr>
+      <p:sp>
+        <p:nvSpPr>
+          <p:cNvPr id="2" name="Title 1">
+            <a:extLst>
+              <a:ext uri="{FF2B5EF4-FFF2-40B4-BE49-F238E27FC236}">
+                <a16:creationId xmlns:a16="http://schemas.microsoft.com/office/drawing/2014/main" id="{DE77978A-0D93-4519-AE9A-E8E546AC7980}"/>
+              </a:ext>
+            </a:extLst>
+          </p:cNvPr>
+          <p:cNvSpPr>
+            <a:spLocks noGrp="1"/>
+          </p:cNvSpPr>
+          <p:nvPr>
+            <p:ph type="title"/>
+          </p:nvPr>
+        </p:nvSpPr>
+        <p:spPr>
+          <a:xfrm>
+            <a:off x="838200" y="365125"/>
+            <a:ext cx="10515600" cy="1325563"/>
+          </a:xfrm>
+        </p:spPr>
+        <p:txBody>
+          <a:bodyPr/>
+          <a:lstStyle/>
+          <a:p>
+            <a:pPr algn="ctr"/>
+            <a:r>
+              <a:rPr lang="en-US"/>
+              <a:t>Graph Neural Networks (GNNs)</a:t>
+            </a:r>
+            <a:endParaRPr lang="en-US" dirty="0"/>
+          </a:p>
+        </p:txBody>
+      </p:sp>
+      <p:pic>
+        <p:nvPicPr>
+          <p:cNvPr id="5" name="Picture 4">
+            <a:extLst>
+              <a:ext uri="{FF2B5EF4-FFF2-40B4-BE49-F238E27FC236}">
+                <a16:creationId xmlns:a16="http://schemas.microsoft.com/office/drawing/2014/main" id="{C95D1410-FB71-4E1E-AE8D-9C00632052A3}"/>
+              </a:ext>
+            </a:extLst>
+          </p:cNvPr>
+          <p:cNvPicPr>
+            <a:picLocks noChangeAspect="1"/>
+          </p:cNvPicPr>
+          <p:nvPr/>
+        </p:nvPicPr>
+        <p:blipFill>
+          <a:blip r:embed="rId2"/>
+          <a:stretch>
+            <a:fillRect/>
+          </a:stretch>
+        </p:blipFill>
+        <p:spPr>
+          <a:xfrm>
+            <a:off x="934078" y="4739160"/>
+            <a:ext cx="4464090" cy="1027136"/>
+          </a:xfrm>
+          <a:prstGeom prst="rect">
+            <a:avLst/>
+          </a:prstGeom>
+        </p:spPr>
+      </p:pic>
+      <p:pic>
+        <p:nvPicPr>
+          <p:cNvPr id="10" name="Picture 9">
+            <a:extLst>
+              <a:ext uri="{FF2B5EF4-FFF2-40B4-BE49-F238E27FC236}">
+                <a16:creationId xmlns:a16="http://schemas.microsoft.com/office/drawing/2014/main" id="{354327C7-1791-4599-8D93-5F1C9B425F52}"/>
+              </a:ext>
+            </a:extLst>
+          </p:cNvPr>
+          <p:cNvPicPr>
+            <a:picLocks noChangeAspect="1"/>
+          </p:cNvPicPr>
+          <p:nvPr/>
+        </p:nvPicPr>
+        <p:blipFill>
+          <a:blip r:embed="rId3"/>
+          <a:stretch>
+            <a:fillRect/>
+          </a:stretch>
+        </p:blipFill>
+        <p:spPr>
+          <a:xfrm>
+            <a:off x="5604961" y="1696146"/>
+            <a:ext cx="5542046" cy="4070150"/>
+          </a:xfrm>
+          <a:prstGeom prst="rect">
+            <a:avLst/>
+          </a:prstGeom>
+        </p:spPr>
+      </p:pic>
+      <p:pic>
+        <p:nvPicPr>
+          <p:cNvPr id="12" name="Picture 11">
+            <a:extLst>
+              <a:ext uri="{FF2B5EF4-FFF2-40B4-BE49-F238E27FC236}">
+                <a16:creationId xmlns:a16="http://schemas.microsoft.com/office/drawing/2014/main" id="{F4E39B50-5023-45D0-9B52-23D62E381EE1}"/>
+              </a:ext>
+            </a:extLst>
+          </p:cNvPr>
+          <p:cNvPicPr>
+            <a:picLocks noChangeAspect="1"/>
+          </p:cNvPicPr>
+          <p:nvPr/>
+        </p:nvPicPr>
+        <p:blipFill>
+          <a:blip r:embed="rId4"/>
+          <a:stretch>
+            <a:fillRect/>
+          </a:stretch>
+        </p:blipFill>
+        <p:spPr>
+          <a:xfrm>
+            <a:off x="1861485" y="1868428"/>
+            <a:ext cx="2609275" cy="2325096"/>
+          </a:xfrm>
+          <a:prstGeom prst="rect">
+            <a:avLst/>
+          </a:prstGeom>
+        </p:spPr>
+      </p:pic>
+    </p:spTree>
+    <p:extLst>
+      <p:ext uri="{BB962C8B-B14F-4D97-AF65-F5344CB8AC3E}">
+        <p14:creationId xmlns:p14="http://schemas.microsoft.com/office/powerpoint/2010/main" val="1228162489"/>
+      </p:ext>
+    </p:extLst>
+  </p:cSld>
+  <p:clrMapOvr>
+    <a:masterClrMapping/>
+  </p:clrMapOvr>
+</p:sld>
+</file>
+
+<file path=ppt/slides/slide4.xml><?xml version="1.0" encoding="utf-8"?>
+<p:sld xmlns:a="http://schemas.openxmlformats.org/drawingml/2006/main" xmlns:r="http://schemas.openxmlformats.org/officeDocument/2006/relationships" xmlns:p="http://schemas.openxmlformats.org/presentationml/2006/main">
+  <p:cSld>
+    <p:spTree>
+      <p:nvGrpSpPr>
+        <p:cNvPr id="1" name=""/>
+        <p:cNvGrpSpPr/>
+        <p:nvPr/>
+      </p:nvGrpSpPr>
+      <p:grpSpPr>
+        <a:xfrm>
+          <a:off x="0" y="0"/>
+          <a:ext cx="0" cy="0"/>
+          <a:chOff x="0" y="0"/>
+          <a:chExt cx="0" cy="0"/>
+        </a:xfrm>
+      </p:grpSpPr>
+      <p:sp>
+        <p:nvSpPr>
+          <p:cNvPr id="2" name="Title 1">
+            <a:extLst>
+              <a:ext uri="{FF2B5EF4-FFF2-40B4-BE49-F238E27FC236}">
+                <a16:creationId xmlns:a16="http://schemas.microsoft.com/office/drawing/2014/main" id="{3729217E-D96B-41E5-87FB-E34337085BAF}"/>
+              </a:ext>
+            </a:extLst>
+          </p:cNvPr>
+          <p:cNvSpPr>
+            <a:spLocks noGrp="1"/>
+          </p:cNvSpPr>
+          <p:nvPr>
+            <p:ph type="title"/>
+          </p:nvPr>
+        </p:nvSpPr>
+        <p:spPr/>
+        <p:txBody>
+          <a:bodyPr/>
+          <a:lstStyle/>
+          <a:p>
+            <a:pPr algn="ctr"/>
+            <a:r>
+              <a:rPr lang="en-US" dirty="0"/>
+              <a:t>GNN unrolled over time</a:t>
+            </a:r>
+          </a:p>
+        </p:txBody>
+      </p:sp>
+      <p:pic>
+        <p:nvPicPr>
+          <p:cNvPr id="4" name="Picture 3">
+            <a:extLst>
+              <a:ext uri="{FF2B5EF4-FFF2-40B4-BE49-F238E27FC236}">
+                <a16:creationId xmlns:a16="http://schemas.microsoft.com/office/drawing/2014/main" id="{487282CD-C42D-4C56-8EE8-2C9E5762A628}"/>
+              </a:ext>
+            </a:extLst>
+          </p:cNvPr>
+          <p:cNvPicPr>
+            <a:picLocks noChangeAspect="1"/>
+          </p:cNvPicPr>
+          <p:nvPr/>
+        </p:nvPicPr>
+        <p:blipFill>
+          <a:blip r:embed="rId2"/>
+          <a:stretch>
+            <a:fillRect/>
+          </a:stretch>
+        </p:blipFill>
+        <p:spPr>
+          <a:xfrm>
+            <a:off x="2887938" y="1578304"/>
+            <a:ext cx="6920151" cy="3913121"/>
+          </a:xfrm>
+          <a:prstGeom prst="rect">
+            <a:avLst/>
+          </a:prstGeom>
+        </p:spPr>
+      </p:pic>
+    </p:spTree>
+    <p:extLst>
+      <p:ext uri="{BB962C8B-B14F-4D97-AF65-F5344CB8AC3E}">
+        <p14:creationId xmlns:p14="http://schemas.microsoft.com/office/powerpoint/2010/main" val="3525249349"/>
+      </p:ext>
+    </p:extLst>
+  </p:cSld>
+  <p:clrMapOvr>
+    <a:masterClrMapping/>
+  </p:clrMapOvr>
+</p:sld>
+</file>
+
+<file path=ppt/slides/slide5.xml><?xml version="1.0" encoding="utf-8"?>
+<p:sld xmlns:a="http://schemas.openxmlformats.org/drawingml/2006/main" xmlns:r="http://schemas.openxmlformats.org/officeDocument/2006/relationships" xmlns:p="http://schemas.openxmlformats.org/presentationml/2006/main">
+  <p:cSld>
+    <p:spTree>
+      <p:nvGrpSpPr>
+        <p:cNvPr id="1" name=""/>
+        <p:cNvGrpSpPr/>
+        <p:nvPr/>
+      </p:nvGrpSpPr>
+      <p:grpSpPr>
+        <a:xfrm>
+          <a:off x="0" y="0"/>
+          <a:ext cx="0" cy="0"/>
+          <a:chOff x="0" y="0"/>
+          <a:chExt cx="0" cy="0"/>
+        </a:xfrm>
+      </p:grpSpPr>
+      <p:sp>
+        <p:nvSpPr>
+          <p:cNvPr id="2" name="Title 1">
+            <a:extLst>
+              <a:ext uri="{FF2B5EF4-FFF2-40B4-BE49-F238E27FC236}">
+                <a16:creationId xmlns:a16="http://schemas.microsoft.com/office/drawing/2014/main" id="{224758A1-DAA1-4587-9194-70267AC5831E}"/>
+              </a:ext>
+            </a:extLst>
+          </p:cNvPr>
+          <p:cNvSpPr>
+            <a:spLocks noGrp="1"/>
+          </p:cNvSpPr>
+          <p:nvPr>
+            <p:ph type="title"/>
+          </p:nvPr>
+        </p:nvSpPr>
+        <p:spPr>
+          <a:xfrm>
+            <a:off x="838200" y="365125"/>
+            <a:ext cx="10515600" cy="1325563"/>
+          </a:xfrm>
+        </p:spPr>
+        <p:txBody>
+          <a:bodyPr/>
+          <a:lstStyle/>
+          <a:p>
+            <a:pPr algn="ctr"/>
+            <a:r>
+              <a:rPr lang="en-US" dirty="0"/>
+              <a:t>Graph Convolutional Networks (GCN)</a:t>
+            </a:r>
+          </a:p>
+        </p:txBody>
+      </p:sp>
+      <p:pic>
+        <p:nvPicPr>
+          <p:cNvPr id="4" name="Picture 3">
+            <a:extLst>
+              <a:ext uri="{FF2B5EF4-FFF2-40B4-BE49-F238E27FC236}">
+                <a16:creationId xmlns:a16="http://schemas.microsoft.com/office/drawing/2014/main" id="{21ABEBD2-53BA-4C34-97F9-89689E295A21}"/>
+              </a:ext>
+            </a:extLst>
+          </p:cNvPr>
+          <p:cNvPicPr>
+            <a:picLocks noChangeAspect="1"/>
+          </p:cNvPicPr>
+          <p:nvPr/>
+        </p:nvPicPr>
+        <p:blipFill>
+          <a:blip r:embed="rId2"/>
+          <a:stretch>
+            <a:fillRect/>
+          </a:stretch>
+        </p:blipFill>
+        <p:spPr>
+          <a:xfrm>
+            <a:off x="2885489" y="1742645"/>
+            <a:ext cx="5926466" cy="2851965"/>
+          </a:xfrm>
+          <a:prstGeom prst="rect">
+            <a:avLst/>
+          </a:prstGeom>
+        </p:spPr>
+      </p:pic>
+      <p:pic>
+        <p:nvPicPr>
+          <p:cNvPr id="5" name="Picture 4">
+            <a:extLst>
+              <a:ext uri="{FF2B5EF4-FFF2-40B4-BE49-F238E27FC236}">
+                <a16:creationId xmlns:a16="http://schemas.microsoft.com/office/drawing/2014/main" id="{5C368282-6027-460C-A562-1F1821DB30A2}"/>
+              </a:ext>
+            </a:extLst>
+          </p:cNvPr>
+          <p:cNvPicPr>
+            <a:picLocks noChangeAspect="1"/>
+          </p:cNvPicPr>
+          <p:nvPr/>
+        </p:nvPicPr>
+        <p:blipFill>
+          <a:blip r:embed="rId3"/>
+          <a:stretch>
+            <a:fillRect/>
+          </a:stretch>
+        </p:blipFill>
+        <p:spPr>
+          <a:xfrm>
+            <a:off x="3269948" y="4909155"/>
+            <a:ext cx="4567113" cy="779454"/>
+          </a:xfrm>
+          <a:prstGeom prst="rect">
+            <a:avLst/>
+          </a:prstGeom>
+        </p:spPr>
+      </p:pic>
+      <p:sp>
+        <p:nvSpPr>
+          <p:cNvPr id="3" name="Right Brace 2">
+            <a:extLst>
+              <a:ext uri="{FF2B5EF4-FFF2-40B4-BE49-F238E27FC236}">
+                <a16:creationId xmlns:a16="http://schemas.microsoft.com/office/drawing/2014/main" id="{7DA92A19-E00C-46E2-BAA3-1529E8F3871F}"/>
+              </a:ext>
+            </a:extLst>
+          </p:cNvPr>
+          <p:cNvSpPr/>
+          <p:nvPr/>
+        </p:nvSpPr>
+        <p:spPr>
+          <a:xfrm rot="5400000">
+            <a:off x="5476183" y="5247162"/>
+            <a:ext cx="237539" cy="702403"/>
+          </a:xfrm>
+          <a:prstGeom prst="rightBrace">
+            <a:avLst/>
+          </a:prstGeom>
+          <a:ln w="28575"/>
+        </p:spPr>
+        <p:style>
+          <a:lnRef idx="1">
+            <a:schemeClr val="accent1"/>
+          </a:lnRef>
+          <a:fillRef idx="0">
+            <a:schemeClr val="accent1"/>
+          </a:fillRef>
+          <a:effectRef idx="0">
+            <a:schemeClr val="accent1"/>
+          </a:effectRef>
+          <a:fontRef idx="minor">
+            <a:schemeClr val="tx1"/>
+          </a:fontRef>
+        </p:style>
+        <p:txBody>
+          <a:bodyPr rtlCol="0" anchor="ctr"/>
+          <a:lstStyle/>
+          <a:p>
+            <a:pPr algn="ctr"/>
+            <a:endParaRPr lang="en-US"/>
+          </a:p>
+        </p:txBody>
+      </p:sp>
+      <p:sp>
+        <p:nvSpPr>
+          <p:cNvPr id="6" name="TextBox 5">
+            <a:extLst>
+              <a:ext uri="{FF2B5EF4-FFF2-40B4-BE49-F238E27FC236}">
+                <a16:creationId xmlns:a16="http://schemas.microsoft.com/office/drawing/2014/main" id="{11F2ED5E-88A8-4BB9-8AB4-F76EF4B31417}"/>
+              </a:ext>
+            </a:extLst>
+          </p:cNvPr>
+          <p:cNvSpPr txBox="1"/>
+          <p:nvPr/>
+        </p:nvSpPr>
+        <p:spPr>
+          <a:xfrm>
+            <a:off x="4255281" y="5818488"/>
+            <a:ext cx="3090570" cy="369332"/>
+          </a:xfrm>
+          <a:prstGeom prst="rect">
+            <a:avLst/>
+          </a:prstGeom>
+          <a:noFill/>
+        </p:spPr>
+        <p:txBody>
+          <a:bodyPr wrap="square" rtlCol="0">
+            <a:spAutoFit/>
+          </a:bodyPr>
+          <a:lstStyle/>
+          <a:p>
+            <a:r>
+              <a:rPr lang="en-US" dirty="0"/>
+              <a:t>Normalized Laplacian Matrix</a:t>
+            </a:r>
+          </a:p>
+        </p:txBody>
+      </p:sp>
+    </p:spTree>
+    <p:extLst>
+      <p:ext uri="{BB962C8B-B14F-4D97-AF65-F5344CB8AC3E}">
+        <p14:creationId xmlns:p14="http://schemas.microsoft.com/office/powerpoint/2010/main" val="1605795002"/>
+      </p:ext>
+    </p:extLst>
+  </p:cSld>
+  <p:clrMapOvr>
+    <a:masterClrMapping/>
+  </p:clrMapOvr>
+</p:sld>
+</file>
+
+<file path=ppt/slides/slide6.xml><?xml version="1.0" encoding="utf-8"?>
+<p:sld xmlns:a="http://schemas.openxmlformats.org/drawingml/2006/main" xmlns:r="http://schemas.openxmlformats.org/officeDocument/2006/relationships" xmlns:p="http://schemas.openxmlformats.org/presentationml/2006/main">
+  <p:cSld>
+    <p:spTree>
+      <p:nvGrpSpPr>
+        <p:cNvPr id="1" name=""/>
+        <p:cNvGrpSpPr/>
+        <p:nvPr/>
+      </p:nvGrpSpPr>
+      <p:grpSpPr>
+        <a:xfrm>
+          <a:off x="0" y="0"/>
+          <a:ext cx="0" cy="0"/>
+          <a:chOff x="0" y="0"/>
+          <a:chExt cx="0" cy="0"/>
+        </a:xfrm>
+      </p:grpSpPr>
+      <p:sp>
+        <p:nvSpPr>
+          <p:cNvPr id="2" name="Title 1">
+            <a:extLst>
+              <a:ext uri="{FF2B5EF4-FFF2-40B4-BE49-F238E27FC236}">
+                <a16:creationId xmlns:a16="http://schemas.microsoft.com/office/drawing/2014/main" id="{A86304F5-D66C-48FB-9ABD-9C1BA1698F42}"/>
+              </a:ext>
+            </a:extLst>
+          </p:cNvPr>
+          <p:cNvSpPr>
+            <a:spLocks noGrp="1"/>
+          </p:cNvSpPr>
+          <p:nvPr>
+            <p:ph type="title"/>
+          </p:nvPr>
+        </p:nvSpPr>
+        <p:spPr/>
+        <p:txBody>
+          <a:bodyPr/>
+          <a:lstStyle/>
+          <a:p>
+            <a:r>
+              <a:rPr lang="en-US" dirty="0"/>
+              <a:t>Overview</a:t>
+            </a:r>
+          </a:p>
+        </p:txBody>
+      </p:sp>
+      <p:sp>
+        <p:nvSpPr>
+          <p:cNvPr id="3" name="Content Placeholder 2">
+            <a:extLst>
+              <a:ext uri="{FF2B5EF4-FFF2-40B4-BE49-F238E27FC236}">
+                <a16:creationId xmlns:a16="http://schemas.microsoft.com/office/drawing/2014/main" id="{D0AB8B1E-0847-4CD4-A776-7DAF36F8393A}"/>
+              </a:ext>
+            </a:extLst>
+          </p:cNvPr>
+          <p:cNvSpPr>
+            <a:spLocks noGrp="1"/>
+          </p:cNvSpPr>
+          <p:nvPr>
+            <p:ph idx="1"/>
+          </p:nvPr>
+        </p:nvSpPr>
+        <p:spPr/>
+        <p:txBody>
+          <a:bodyPr/>
+          <a:lstStyle/>
+          <a:p>
+            <a:r>
+              <a:rPr lang="en-US" dirty="0"/>
+              <a:t>Adversarial Attacks on Graph Structured Data</a:t>
+            </a:r>
+          </a:p>
+          <a:p>
+            <a:pPr lvl="1"/>
+            <a:r>
+              <a:rPr lang="en-US" dirty="0"/>
+              <a:t>Evasion attacks on GNN and GCN.</a:t>
+            </a:r>
+          </a:p>
+          <a:p>
+            <a:pPr lvl="1"/>
+            <a:r>
+              <a:rPr lang="en-US" dirty="0"/>
+              <a:t>Graph level and Node level attacks.</a:t>
+            </a:r>
+          </a:p>
+          <a:p>
+            <a:pPr marL="457200" lvl="1" indent="0">
+              <a:buNone/>
+            </a:pPr>
+            <a:endParaRPr lang="en-US" dirty="0"/>
+          </a:p>
+          <a:p>
+            <a:pPr marL="457200" lvl="1" indent="0">
+              <a:buNone/>
+            </a:pPr>
+            <a:endParaRPr lang="en-US" dirty="0"/>
+          </a:p>
+          <a:p>
+            <a:r>
+              <a:rPr lang="en-US" dirty="0"/>
+              <a:t>Adversarial Attacks on Neural Networks for Graph Data</a:t>
+            </a:r>
+          </a:p>
+          <a:p>
+            <a:pPr lvl="1"/>
+            <a:r>
+              <a:rPr lang="en-US" dirty="0"/>
+              <a:t>Poisoning attacks on GCN.</a:t>
+            </a:r>
+          </a:p>
+          <a:p>
+            <a:pPr lvl="1"/>
+            <a:r>
+              <a:rPr lang="en-US" dirty="0"/>
+              <a:t>Node level attacks.</a:t>
+            </a:r>
+          </a:p>
+          <a:p>
+            <a:pPr lvl="1"/>
+            <a:endParaRPr lang="en-US" dirty="0"/>
+          </a:p>
+          <a:p>
+            <a:pPr lvl="1"/>
+            <a:endParaRPr lang="en-US" dirty="0"/>
+          </a:p>
+        </p:txBody>
+      </p:sp>
+    </p:spTree>
+    <p:extLst>
+      <p:ext uri="{BB962C8B-B14F-4D97-AF65-F5344CB8AC3E}">
+        <p14:creationId xmlns:p14="http://schemas.microsoft.com/office/powerpoint/2010/main" val="515703987"/>
       </p:ext>
     </p:extLst>
   </p:cSld>
@@ -10376,7 +11029,7 @@
           <p:cNvPr id="2" name="Title 1">
             <a:extLst>
               <a:ext uri="{FF2B5EF4-FFF2-40B4-BE49-F238E27FC236}">
-                <a16:creationId xmlns:a16="http://schemas.microsoft.com/office/drawing/2014/main" id="{9CF001FE-7E83-4C14-8E4D-48CD81B58D68}"/>
+                <a16:creationId xmlns:a16="http://schemas.microsoft.com/office/drawing/2014/main" id="{1DA5EC56-01E4-4D34-9B61-50E8A5DF937A}"/>
               </a:ext>
             </a:extLst>
           </p:cNvPr>
@@ -10394,7 +11047,7 @@
           <a:p>
             <a:r>
               <a:rPr lang="en-US" dirty="0"/>
-              <a:t>Gradient based White Box attack (WBA) </a:t>
+              <a:t>Challenges</a:t>
             </a:r>
           </a:p>
         </p:txBody>
@@ -10404,7 +11057,7 @@
           <p:cNvPr id="3" name="Content Placeholder 2">
             <a:extLst>
               <a:ext uri="{FF2B5EF4-FFF2-40B4-BE49-F238E27FC236}">
-                <a16:creationId xmlns:a16="http://schemas.microsoft.com/office/drawing/2014/main" id="{4E9C06B9-04E2-40D3-8C24-F1816E771DD9}"/>
+                <a16:creationId xmlns:a16="http://schemas.microsoft.com/office/drawing/2014/main" id="{EBF08C9A-37E0-4A71-87C9-12E802A32972}"/>
               </a:ext>
             </a:extLst>
           </p:cNvPr>
@@ -10417,12 +11070,14 @@
         </p:nvSpPr>
         <p:spPr/>
         <p:txBody>
-          <a:bodyPr/>
+          <a:bodyPr>
+            <a:normAutofit/>
+          </a:bodyPr>
           <a:lstStyle/>
           <a:p>
             <a:r>
               <a:rPr lang="en-US" dirty="0"/>
-              <a:t>Compute the gradient of the classification loss with respect to the adjacency matrix A of the graph. </a:t>
+              <a:t>Discrete optimization problem – intractable to solve.</a:t>
             </a:r>
           </a:p>
           <a:p>
@@ -10432,179 +11087,29 @@
             <a:endParaRPr lang="en-US" dirty="0"/>
           </a:p>
           <a:p>
+            <a:r>
+              <a:rPr lang="en-US" dirty="0"/>
+              <a:t>Large graphs – huge optimization space.</a:t>
+            </a:r>
+          </a:p>
+          <a:p>
+            <a:pPr marL="0" indent="0">
+              <a:buNone/>
+            </a:pPr>
             <a:endParaRPr lang="en-US" dirty="0"/>
           </a:p>
-        </p:txBody>
-      </p:sp>
-      <p:pic>
-        <p:nvPicPr>
-          <p:cNvPr id="4" name="Picture 3">
-            <a:extLst>
-              <a:ext uri="{FF2B5EF4-FFF2-40B4-BE49-F238E27FC236}">
-                <a16:creationId xmlns:a16="http://schemas.microsoft.com/office/drawing/2014/main" id="{AEFA0C95-23D5-4A18-A8C3-8356AFF62EA9}"/>
-              </a:ext>
-            </a:extLst>
-          </p:cNvPr>
-          <p:cNvPicPr>
-            <a:picLocks noChangeAspect="1"/>
-          </p:cNvPicPr>
-          <p:nvPr/>
-        </p:nvPicPr>
-        <p:blipFill>
-          <a:blip r:embed="rId2"/>
-          <a:stretch>
-            <a:fillRect/>
-          </a:stretch>
-        </p:blipFill>
-        <p:spPr>
-          <a:xfrm>
-            <a:off x="4286850" y="2878650"/>
-            <a:ext cx="3063192" cy="972215"/>
-          </a:xfrm>
-          <a:prstGeom prst="rect">
-            <a:avLst/>
-          </a:prstGeom>
-        </p:spPr>
-      </p:pic>
-      <p:pic>
-        <p:nvPicPr>
-          <p:cNvPr id="5" name="Picture 4">
-            <a:extLst>
-              <a:ext uri="{FF2B5EF4-FFF2-40B4-BE49-F238E27FC236}">
-                <a16:creationId xmlns:a16="http://schemas.microsoft.com/office/drawing/2014/main" id="{AF4F9206-8E95-49E9-91D1-C4F0863074A3}"/>
-              </a:ext>
-            </a:extLst>
-          </p:cNvPr>
-          <p:cNvPicPr>
-            <a:picLocks noChangeAspect="1"/>
-          </p:cNvPicPr>
-          <p:nvPr/>
-        </p:nvPicPr>
-        <p:blipFill>
-          <a:blip r:embed="rId3"/>
-          <a:stretch>
-            <a:fillRect/>
-          </a:stretch>
-        </p:blipFill>
-        <p:spPr>
-          <a:xfrm>
-            <a:off x="945832" y="4534081"/>
-            <a:ext cx="4826622" cy="1777819"/>
-          </a:xfrm>
-          <a:prstGeom prst="rect">
-            <a:avLst/>
-          </a:prstGeom>
-        </p:spPr>
-      </p:pic>
-      <p:pic>
-        <p:nvPicPr>
-          <p:cNvPr id="6" name="Picture 5">
-            <a:extLst>
-              <a:ext uri="{FF2B5EF4-FFF2-40B4-BE49-F238E27FC236}">
-                <a16:creationId xmlns:a16="http://schemas.microsoft.com/office/drawing/2014/main" id="{FE433175-04EF-4B3A-8E92-FD460BA131B2}"/>
-              </a:ext>
-            </a:extLst>
-          </p:cNvPr>
-          <p:cNvPicPr>
-            <a:picLocks noChangeAspect="1"/>
-          </p:cNvPicPr>
-          <p:nvPr/>
-        </p:nvPicPr>
-        <p:blipFill>
-          <a:blip r:embed="rId4"/>
-          <a:stretch>
-            <a:fillRect/>
-          </a:stretch>
-        </p:blipFill>
-        <p:spPr>
-          <a:xfrm>
-            <a:off x="6261972" y="4884379"/>
-            <a:ext cx="4602310" cy="1077222"/>
-          </a:xfrm>
-          <a:prstGeom prst="rect">
-            <a:avLst/>
-          </a:prstGeom>
-        </p:spPr>
-      </p:pic>
-      <p:sp>
-        <p:nvSpPr>
-          <p:cNvPr id="7" name="TextBox 6">
-            <a:extLst>
-              <a:ext uri="{FF2B5EF4-FFF2-40B4-BE49-F238E27FC236}">
-                <a16:creationId xmlns:a16="http://schemas.microsoft.com/office/drawing/2014/main" id="{0B9796B1-AFA3-47A7-8661-D7984D57DD39}"/>
-              </a:ext>
-            </a:extLst>
-          </p:cNvPr>
-          <p:cNvSpPr txBox="1"/>
-          <p:nvPr/>
-        </p:nvSpPr>
-        <p:spPr>
-          <a:xfrm>
-            <a:off x="1234510" y="4164749"/>
-            <a:ext cx="4537944" cy="369332"/>
-          </a:xfrm>
-          <a:prstGeom prst="rect">
-            <a:avLst/>
-          </a:prstGeom>
-          <a:noFill/>
-        </p:spPr>
-        <p:txBody>
-          <a:bodyPr wrap="square" rtlCol="0">
-            <a:spAutoFit/>
-          </a:bodyPr>
-          <a:lstStyle/>
           <a:p>
             <a:r>
               <a:rPr lang="en-US" dirty="0"/>
-              <a:t>Solve the Combinatorial optimization problem</a:t>
-            </a:r>
-          </a:p>
-        </p:txBody>
-      </p:sp>
-      <p:sp>
-        <p:nvSpPr>
-          <p:cNvPr id="8" name="TextBox 7">
-            <a:extLst>
-              <a:ext uri="{FF2B5EF4-FFF2-40B4-BE49-F238E27FC236}">
-                <a16:creationId xmlns:a16="http://schemas.microsoft.com/office/drawing/2014/main" id="{49C753B4-10DB-4FB2-A374-44DC4B95CA20}"/>
-              </a:ext>
-            </a:extLst>
-          </p:cNvPr>
-          <p:cNvSpPr txBox="1"/>
-          <p:nvPr/>
-        </p:nvSpPr>
-        <p:spPr>
-          <a:xfrm>
-            <a:off x="6911884" y="4163942"/>
-            <a:ext cx="3190104" cy="369332"/>
-          </a:xfrm>
-          <a:prstGeom prst="rect">
-            <a:avLst/>
-          </a:prstGeom>
-          <a:noFill/>
-        </p:spPr>
-        <p:txBody>
-          <a:bodyPr wrap="none" rtlCol="0">
-            <a:spAutoFit/>
-          </a:bodyPr>
-          <a:lstStyle/>
-          <a:p>
-            <a:r>
-              <a:rPr lang="en-US" dirty="0"/>
-              <a:t>Greedy Algorithm - </a:t>
-            </a:r>
-            <a:r>
-              <a:rPr lang="en-US" i="1" dirty="0" err="1"/>
-              <a:t>GradArgmax</a:t>
-            </a:r>
-            <a:endParaRPr lang="en-US" i="1" dirty="0"/>
+              <a:t>Definitions of unnoticeable perturbations is not clear.</a:t>
+            </a:r>
           </a:p>
         </p:txBody>
       </p:sp>
     </p:spTree>
     <p:extLst>
       <p:ext uri="{BB962C8B-B14F-4D97-AF65-F5344CB8AC3E}">
-        <p14:creationId xmlns:p14="http://schemas.microsoft.com/office/powerpoint/2010/main" val="911574183"/>
+        <p14:creationId xmlns:p14="http://schemas.microsoft.com/office/powerpoint/2010/main" val="701562217"/>
       </p:ext>
     </p:extLst>
   </p:cSld>
@@ -10636,7 +11141,7 @@
           <p:cNvPr id="2" name="Title 1">
             <a:extLst>
               <a:ext uri="{FF2B5EF4-FFF2-40B4-BE49-F238E27FC236}">
-                <a16:creationId xmlns:a16="http://schemas.microsoft.com/office/drawing/2014/main" id="{354C5BA8-DD2F-4678-96B0-5F7A78DD10E5}"/>
+                <a16:creationId xmlns:a16="http://schemas.microsoft.com/office/drawing/2014/main" id="{2A5AA265-6FA6-493B-B3BE-5FFB3E3BD335}"/>
               </a:ext>
             </a:extLst>
           </p:cNvPr>
@@ -10654,152 +11159,45 @@
           <a:p>
             <a:r>
               <a:rPr lang="en-US" dirty="0"/>
-              <a:t>Other Attack methods</a:t>
+              <a:t>Gradient White-box Attack</a:t>
             </a:r>
           </a:p>
         </p:txBody>
       </p:sp>
-      <mc:AlternateContent xmlns:mc="http://schemas.openxmlformats.org/markup-compatibility/2006" xmlns:a14="http://schemas.microsoft.com/office/drawing/2010/main">
-        <mc:Choice Requires="a14">
-          <p:sp>
-            <p:nvSpPr>
-              <p:cNvPr id="3" name="Content Placeholder 2">
-                <a:extLst>
-                  <a:ext uri="{FF2B5EF4-FFF2-40B4-BE49-F238E27FC236}">
-                    <a16:creationId xmlns:a16="http://schemas.microsoft.com/office/drawing/2014/main" id="{63D3281A-DF63-4AF1-8D11-CE78E5207A6F}"/>
-                  </a:ext>
-                </a:extLst>
-              </p:cNvPr>
-              <p:cNvSpPr>
-                <a:spLocks noGrp="1"/>
-              </p:cNvSpPr>
-              <p:nvPr>
-                <p:ph idx="1"/>
-              </p:nvPr>
-            </p:nvSpPr>
-            <p:spPr/>
-            <p:txBody>
-              <a:bodyPr/>
-              <a:lstStyle/>
-              <a:p>
-                <a:r>
-                  <a:rPr lang="en-US" dirty="0"/>
-                  <a:t>Genetic Algorithms</a:t>
-                </a:r>
-              </a:p>
-              <a:p>
-                <a:pPr lvl="1"/>
-                <a:r>
-                  <a:rPr lang="en-US" dirty="0"/>
-                  <a:t>Used for implementing black-box attacks using classifiers prediction confidence</a:t>
-                </a:r>
-              </a:p>
-              <a:p>
-                <a:pPr lvl="1"/>
-                <a:r>
-                  <a:rPr lang="en-US" dirty="0"/>
-                  <a:t>Population of modified graphs </a:t>
-                </a:r>
-                <a14:m>
-                  <m:oMath xmlns:m="http://schemas.openxmlformats.org/officeDocument/2006/math">
-                    <m:acc>
-                      <m:accPr>
-                        <m:chr m:val="̃"/>
-                        <m:ctrlPr>
-                          <a:rPr lang="en-US" b="0" i="1" smtClean="0">
-                            <a:latin typeface="Cambria Math" panose="02040503050406030204" pitchFamily="18" charset="0"/>
-                          </a:rPr>
-                        </m:ctrlPr>
-                      </m:accPr>
-                      <m:e>
-                        <m:r>
-                          <a:rPr lang="en-US" b="0" i="1" smtClean="0">
-                            <a:latin typeface="Cambria Math" panose="02040503050406030204" pitchFamily="18" charset="0"/>
-                          </a:rPr>
-                          <m:t>𝐺</m:t>
-                        </m:r>
-                      </m:e>
-                    </m:acc>
-                    <m:r>
-                      <a:rPr lang="en-US" b="0" i="1" dirty="0" smtClean="0">
-                        <a:latin typeface="Cambria Math" panose="02040503050406030204" pitchFamily="18" charset="0"/>
-                      </a:rPr>
-                      <m:t> </m:t>
-                    </m:r>
-                  </m:oMath>
-                </a14:m>
-                <a:r>
-                  <a:rPr lang="en-US" dirty="0"/>
-                  <a:t>is chosen, their fitness scores is calculated using the misclassification loss and a next generation of population is obtained using selection, crossover and mutation strategies. </a:t>
-                </a:r>
-              </a:p>
-              <a:p>
-                <a:r>
-                  <a:rPr lang="en-US" dirty="0"/>
-                  <a:t>Random Sampling</a:t>
-                </a:r>
-              </a:p>
-              <a:p>
-                <a:pPr lvl="1"/>
-                <a:r>
-                  <a:rPr lang="en-US" dirty="0"/>
-                  <a:t>Sample a random pair of vertices. Apply the modification to the corresponding edge is the modification is unnoticeable.</a:t>
-                </a:r>
-              </a:p>
-              <a:p>
-                <a:pPr lvl="1"/>
-                <a:r>
-                  <a:rPr lang="en-US" dirty="0"/>
-                  <a:t>Needs no information of the target classifier. </a:t>
-                </a:r>
-              </a:p>
-            </p:txBody>
-          </p:sp>
-        </mc:Choice>
-        <mc:Fallback xmlns="">
-          <p:sp>
-            <p:nvSpPr>
-              <p:cNvPr id="3" name="Content Placeholder 2">
-                <a:extLst>
-                  <a:ext uri="{FF2B5EF4-FFF2-40B4-BE49-F238E27FC236}">
-                    <a16:creationId xmlns:a16="http://schemas.microsoft.com/office/drawing/2014/main" id="{63D3281A-DF63-4AF1-8D11-CE78E5207A6F}"/>
-                  </a:ext>
-                </a:extLst>
-              </p:cNvPr>
-              <p:cNvSpPr>
-                <a:spLocks noGrp="1" noRot="1" noChangeAspect="1" noMove="1" noResize="1" noEditPoints="1" noAdjustHandles="1" noChangeArrowheads="1" noChangeShapeType="1" noTextEdit="1"/>
-              </p:cNvSpPr>
-              <p:nvPr>
-                <p:ph idx="1"/>
-              </p:nvPr>
-            </p:nvSpPr>
-            <p:spPr>
-              <a:blipFill>
-                <a:blip r:embed="rId2"/>
-                <a:stretch>
-                  <a:fillRect l="-1043" t="-2241"/>
-                </a:stretch>
-              </a:blipFill>
-            </p:spPr>
-            <p:txBody>
-              <a:bodyPr/>
-              <a:lstStyle/>
-              <a:p>
-                <a:r>
-                  <a:rPr lang="en-US">
-                    <a:noFill/>
-                  </a:rPr>
-                  <a:t> </a:t>
-                </a:r>
-              </a:p>
-            </p:txBody>
-          </p:sp>
-        </mc:Fallback>
-      </mc:AlternateContent>
+      <p:pic>
+        <p:nvPicPr>
+          <p:cNvPr id="4" name="Picture 3">
+            <a:extLst>
+              <a:ext uri="{FF2B5EF4-FFF2-40B4-BE49-F238E27FC236}">
+                <a16:creationId xmlns:a16="http://schemas.microsoft.com/office/drawing/2014/main" id="{F9500420-B1AA-40ED-B836-9E7C3849BA57}"/>
+              </a:ext>
+            </a:extLst>
+          </p:cNvPr>
+          <p:cNvPicPr>
+            <a:picLocks noChangeAspect="1"/>
+          </p:cNvPicPr>
+          <p:nvPr/>
+        </p:nvPicPr>
+        <p:blipFill>
+          <a:blip r:embed="rId2"/>
+          <a:stretch>
+            <a:fillRect/>
+          </a:stretch>
+        </p:blipFill>
+        <p:spPr>
+          <a:xfrm>
+            <a:off x="2595769" y="1643101"/>
+            <a:ext cx="6375021" cy="4614789"/>
+          </a:xfrm>
+          <a:prstGeom prst="rect">
+            <a:avLst/>
+          </a:prstGeom>
+        </p:spPr>
+      </p:pic>
     </p:spTree>
     <p:extLst>
       <p:ext uri="{BB962C8B-B14F-4D97-AF65-F5344CB8AC3E}">
-        <p14:creationId xmlns:p14="http://schemas.microsoft.com/office/powerpoint/2010/main" val="2450639334"/>
+        <p14:creationId xmlns:p14="http://schemas.microsoft.com/office/powerpoint/2010/main" val="2694475033"/>
       </p:ext>
     </p:extLst>
   </p:cSld>

--- a/TEACHING/files/2019/1029/CS598AML_AmishGoel.pptx
+++ b/TEACHING/files/2019/1029/CS598AML_AmishGoel.pptx
@@ -3391,6 +3391,42 @@
           </a:p>
         </p:txBody>
       </p:sp>
+      <p:sp>
+        <p:nvSpPr>
+          <p:cNvPr id="3" name="TextBox 2">
+            <a:extLst>
+              <a:ext uri="{FF2B5EF4-FFF2-40B4-BE49-F238E27FC236}">
+                <a16:creationId xmlns:a16="http://schemas.microsoft.com/office/drawing/2014/main" id="{DC021873-B011-4CFD-B646-87E576BE9A92}"/>
+              </a:ext>
+            </a:extLst>
+          </p:cNvPr>
+          <p:cNvSpPr txBox="1"/>
+          <p:nvPr/>
+        </p:nvSpPr>
+        <p:spPr>
+          <a:xfrm>
+            <a:off x="2503107" y="4454507"/>
+            <a:ext cx="6676652" cy="461665"/>
+          </a:xfrm>
+          <a:prstGeom prst="rect">
+            <a:avLst/>
+          </a:prstGeom>
+          <a:noFill/>
+        </p:spPr>
+        <p:txBody>
+          <a:bodyPr wrap="square" rtlCol="0">
+            <a:spAutoFit/>
+          </a:bodyPr>
+          <a:lstStyle/>
+          <a:p>
+            <a:pPr algn="ctr"/>
+            <a:r>
+              <a:rPr lang="en-US" sz="2400" dirty="0"/>
+              <a:t>Presented by: Amish Goel</a:t>
+            </a:r>
+          </a:p>
+        </p:txBody>
+      </p:sp>
     </p:spTree>
     <p:extLst>
       <p:ext uri="{BB962C8B-B14F-4D97-AF65-F5344CB8AC3E}">
@@ -3588,10 +3624,10 @@
       </p:sp>
       <p:grpSp>
         <p:nvGrpSpPr>
-          <p:cNvPr id="15" name="Group 14">
-            <a:extLst>
-              <a:ext uri="{FF2B5EF4-FFF2-40B4-BE49-F238E27FC236}">
-                <a16:creationId xmlns:a16="http://schemas.microsoft.com/office/drawing/2014/main" id="{78F207D4-CFB8-44F6-9D82-ED478F8FD80C}"/>
+          <p:cNvPr id="17" name="Group 16">
+            <a:extLst>
+              <a:ext uri="{FF2B5EF4-FFF2-40B4-BE49-F238E27FC236}">
+                <a16:creationId xmlns:a16="http://schemas.microsoft.com/office/drawing/2014/main" id="{4A98B75D-F94A-4EEB-815A-7FC1B84E3146}"/>
               </a:ext>
             </a:extLst>
           </p:cNvPr>
@@ -3600,191 +3636,212 @@
         </p:nvGrpSpPr>
         <p:grpSpPr>
           <a:xfrm>
-            <a:off x="6527726" y="4383922"/>
-            <a:ext cx="3889473" cy="2354648"/>
-            <a:chOff x="6244341" y="4118725"/>
-            <a:chExt cx="3889473" cy="2354648"/>
+            <a:off x="6527726" y="2931231"/>
+            <a:ext cx="4183124" cy="2816313"/>
+            <a:chOff x="6339500" y="3922257"/>
+            <a:chExt cx="4183124" cy="2816313"/>
           </a:xfrm>
         </p:grpSpPr>
-        <p:pic>
-          <p:nvPicPr>
-            <p:cNvPr id="12" name="Picture 11">
+        <p:grpSp>
+          <p:nvGrpSpPr>
+            <p:cNvPr id="15" name="Group 14">
               <a:extLst>
                 <a:ext uri="{FF2B5EF4-FFF2-40B4-BE49-F238E27FC236}">
-                  <a16:creationId xmlns:a16="http://schemas.microsoft.com/office/drawing/2014/main" id="{4D21CEB1-329D-4CF6-9304-FE0B42333EFA}"/>
+                  <a16:creationId xmlns:a16="http://schemas.microsoft.com/office/drawing/2014/main" id="{78F207D4-CFB8-44F6-9D82-ED478F8FD80C}"/>
                 </a:ext>
               </a:extLst>
             </p:cNvPr>
-            <p:cNvPicPr>
-              <a:picLocks noChangeAspect="1"/>
-            </p:cNvPicPr>
+            <p:cNvGrpSpPr/>
             <p:nvPr/>
-          </p:nvPicPr>
-          <p:blipFill>
-            <a:blip r:embed="rId4"/>
-            <a:stretch>
-              <a:fillRect/>
-            </a:stretch>
-          </p:blipFill>
+          </p:nvGrpSpPr>
+          <p:grpSpPr>
+            <a:xfrm>
+              <a:off x="6527726" y="4383922"/>
+              <a:ext cx="3889473" cy="2354648"/>
+              <a:chOff x="6244341" y="4118725"/>
+              <a:chExt cx="3889473" cy="2354648"/>
+            </a:xfrm>
+          </p:grpSpPr>
+          <p:pic>
+            <p:nvPicPr>
+              <p:cNvPr id="12" name="Picture 11">
+                <a:extLst>
+                  <a:ext uri="{FF2B5EF4-FFF2-40B4-BE49-F238E27FC236}">
+                    <a16:creationId xmlns:a16="http://schemas.microsoft.com/office/drawing/2014/main" id="{4D21CEB1-329D-4CF6-9304-FE0B42333EFA}"/>
+                  </a:ext>
+                </a:extLst>
+              </p:cNvPr>
+              <p:cNvPicPr>
+                <a:picLocks noChangeAspect="1"/>
+              </p:cNvPicPr>
+              <p:nvPr/>
+            </p:nvPicPr>
+            <p:blipFill>
+              <a:blip r:embed="rId4"/>
+              <a:stretch>
+                <a:fillRect/>
+              </a:stretch>
+            </p:blipFill>
+            <p:spPr>
+              <a:xfrm>
+                <a:off x="6439606" y="4118725"/>
+                <a:ext cx="3138607" cy="2354648"/>
+              </a:xfrm>
+              <a:prstGeom prst="rect">
+                <a:avLst/>
+              </a:prstGeom>
+            </p:spPr>
+          </p:pic>
+          <p:sp>
+            <p:nvSpPr>
+              <p:cNvPr id="13" name="Rectangle 12">
+                <a:extLst>
+                  <a:ext uri="{FF2B5EF4-FFF2-40B4-BE49-F238E27FC236}">
+                    <a16:creationId xmlns:a16="http://schemas.microsoft.com/office/drawing/2014/main" id="{7F05E5FE-7E6D-4618-809A-AD8BAAEA2721}"/>
+                  </a:ext>
+                </a:extLst>
+              </p:cNvPr>
+              <p:cNvSpPr/>
+              <p:nvPr/>
+            </p:nvSpPr>
+            <p:spPr>
+              <a:xfrm>
+                <a:off x="6244341" y="5248920"/>
+                <a:ext cx="720673" cy="316720"/>
+              </a:xfrm>
+              <a:prstGeom prst="rect">
+                <a:avLst/>
+              </a:prstGeom>
+              <a:solidFill>
+                <a:schemeClr val="bg1"/>
+              </a:solidFill>
+              <a:ln>
+                <a:solidFill>
+                  <a:schemeClr val="bg1"/>
+                </a:solidFill>
+              </a:ln>
+            </p:spPr>
+            <p:style>
+              <a:lnRef idx="2">
+                <a:schemeClr val="accent1">
+                  <a:shade val="50000"/>
+                </a:schemeClr>
+              </a:lnRef>
+              <a:fillRef idx="1">
+                <a:schemeClr val="accent1"/>
+              </a:fillRef>
+              <a:effectRef idx="0">
+                <a:schemeClr val="accent1"/>
+              </a:effectRef>
+              <a:fontRef idx="minor">
+                <a:schemeClr val="lt1"/>
+              </a:fontRef>
+            </p:style>
+            <p:txBody>
+              <a:bodyPr rtlCol="0" anchor="ctr"/>
+              <a:lstStyle/>
+              <a:p>
+                <a:pPr algn="ctr"/>
+                <a:endParaRPr lang="en-US"/>
+              </a:p>
+            </p:txBody>
+          </p:sp>
+          <p:sp>
+            <p:nvSpPr>
+              <p:cNvPr id="14" name="Rectangle 13">
+                <a:extLst>
+                  <a:ext uri="{FF2B5EF4-FFF2-40B4-BE49-F238E27FC236}">
+                    <a16:creationId xmlns:a16="http://schemas.microsoft.com/office/drawing/2014/main" id="{DCD9D89A-CDC6-463B-AC75-464FAA4BEDB0}"/>
+                  </a:ext>
+                </a:extLst>
+              </p:cNvPr>
+              <p:cNvSpPr/>
+              <p:nvPr/>
+            </p:nvSpPr>
+            <p:spPr>
+              <a:xfrm>
+                <a:off x="9413141" y="4900740"/>
+                <a:ext cx="720673" cy="316720"/>
+              </a:xfrm>
+              <a:prstGeom prst="rect">
+                <a:avLst/>
+              </a:prstGeom>
+              <a:solidFill>
+                <a:schemeClr val="bg1"/>
+              </a:solidFill>
+              <a:ln>
+                <a:solidFill>
+                  <a:schemeClr val="bg1"/>
+                </a:solidFill>
+              </a:ln>
+            </p:spPr>
+            <p:style>
+              <a:lnRef idx="2">
+                <a:schemeClr val="accent1">
+                  <a:shade val="50000"/>
+                </a:schemeClr>
+              </a:lnRef>
+              <a:fillRef idx="1">
+                <a:schemeClr val="accent1"/>
+              </a:fillRef>
+              <a:effectRef idx="0">
+                <a:schemeClr val="accent1"/>
+              </a:effectRef>
+              <a:fontRef idx="minor">
+                <a:schemeClr val="lt1"/>
+              </a:fontRef>
+            </p:style>
+            <p:txBody>
+              <a:bodyPr rtlCol="0" anchor="ctr"/>
+              <a:lstStyle/>
+              <a:p>
+                <a:pPr algn="ctr"/>
+                <a:endParaRPr lang="en-US"/>
+              </a:p>
+            </p:txBody>
+          </p:sp>
+        </p:grpSp>
+        <p:sp>
+          <p:nvSpPr>
+            <p:cNvPr id="16" name="TextBox 15">
+              <a:extLst>
+                <a:ext uri="{FF2B5EF4-FFF2-40B4-BE49-F238E27FC236}">
+                  <a16:creationId xmlns:a16="http://schemas.microsoft.com/office/drawing/2014/main" id="{87C05353-5EFD-4AF1-8269-41A090562BE0}"/>
+                </a:ext>
+              </a:extLst>
+            </p:cNvPr>
+            <p:cNvSpPr txBox="1"/>
+            <p:nvPr/>
+          </p:nvSpPr>
           <p:spPr>
             <a:xfrm>
-              <a:off x="6439606" y="4118725"/>
-              <a:ext cx="3138607" cy="2354648"/>
+              <a:off x="6339500" y="3922257"/>
+              <a:ext cx="4183124" cy="461665"/>
             </a:xfrm>
             <a:prstGeom prst="rect">
               <a:avLst/>
             </a:prstGeom>
+            <a:noFill/>
           </p:spPr>
-        </p:pic>
-        <p:sp>
-          <p:nvSpPr>
-            <p:cNvPr id="13" name="Rectangle 12">
-              <a:extLst>
-                <a:ext uri="{FF2B5EF4-FFF2-40B4-BE49-F238E27FC236}">
-                  <a16:creationId xmlns:a16="http://schemas.microsoft.com/office/drawing/2014/main" id="{7F05E5FE-7E6D-4618-809A-AD8BAAEA2721}"/>
-                </a:ext>
-              </a:extLst>
-            </p:cNvPr>
-            <p:cNvSpPr/>
-            <p:nvPr/>
-          </p:nvSpPr>
-          <p:spPr>
-            <a:xfrm>
-              <a:off x="6244341" y="5248920"/>
-              <a:ext cx="720673" cy="316720"/>
-            </a:xfrm>
-            <a:prstGeom prst="rect">
-              <a:avLst/>
-            </a:prstGeom>
-            <a:solidFill>
-              <a:schemeClr val="bg1"/>
-            </a:solidFill>
-            <a:ln>
-              <a:solidFill>
-                <a:schemeClr val="bg1"/>
-              </a:solidFill>
-            </a:ln>
-          </p:spPr>
-          <p:style>
-            <a:lnRef idx="2">
-              <a:schemeClr val="accent1">
-                <a:shade val="50000"/>
-              </a:schemeClr>
-            </a:lnRef>
-            <a:fillRef idx="1">
-              <a:schemeClr val="accent1"/>
-            </a:fillRef>
-            <a:effectRef idx="0">
-              <a:schemeClr val="accent1"/>
-            </a:effectRef>
-            <a:fontRef idx="minor">
-              <a:schemeClr val="lt1"/>
-            </a:fontRef>
-          </p:style>
           <p:txBody>
-            <a:bodyPr rtlCol="0" anchor="ctr"/>
+            <a:bodyPr wrap="square" rtlCol="0">
+              <a:spAutoFit/>
+            </a:bodyPr>
             <a:lstStyle/>
             <a:p>
               <a:pPr algn="ctr"/>
-              <a:endParaRPr lang="en-US"/>
-            </a:p>
-          </p:txBody>
-        </p:sp>
-        <p:sp>
-          <p:nvSpPr>
-            <p:cNvPr id="14" name="Rectangle 13">
-              <a:extLst>
-                <a:ext uri="{FF2B5EF4-FFF2-40B4-BE49-F238E27FC236}">
-                  <a16:creationId xmlns:a16="http://schemas.microsoft.com/office/drawing/2014/main" id="{DCD9D89A-CDC6-463B-AC75-464FAA4BEDB0}"/>
-                </a:ext>
-              </a:extLst>
-            </p:cNvPr>
-            <p:cNvSpPr/>
-            <p:nvPr/>
-          </p:nvSpPr>
-          <p:spPr>
-            <a:xfrm>
-              <a:off x="9413141" y="4900740"/>
-              <a:ext cx="720673" cy="316720"/>
-            </a:xfrm>
-            <a:prstGeom prst="rect">
-              <a:avLst/>
-            </a:prstGeom>
-            <a:solidFill>
-              <a:schemeClr val="bg1"/>
-            </a:solidFill>
-            <a:ln>
-              <a:solidFill>
-                <a:schemeClr val="bg1"/>
-              </a:solidFill>
-            </a:ln>
-          </p:spPr>
-          <p:style>
-            <a:lnRef idx="2">
-              <a:schemeClr val="accent1">
-                <a:shade val="50000"/>
-              </a:schemeClr>
-            </a:lnRef>
-            <a:fillRef idx="1">
-              <a:schemeClr val="accent1"/>
-            </a:fillRef>
-            <a:effectRef idx="0">
-              <a:schemeClr val="accent1"/>
-            </a:effectRef>
-            <a:fontRef idx="minor">
-              <a:schemeClr val="lt1"/>
-            </a:fontRef>
-          </p:style>
-          <p:txBody>
-            <a:bodyPr rtlCol="0" anchor="ctr"/>
-            <a:lstStyle/>
-            <a:p>
-              <a:pPr algn="ctr"/>
-              <a:endParaRPr lang="en-US"/>
+              <a:r>
+                <a:rPr lang="en-US" sz="2400" dirty="0">
+                  <a:solidFill>
+                    <a:srgbClr val="C00000"/>
+                  </a:solidFill>
+                </a:rPr>
+                <a:t>Gradients may not be reliable</a:t>
+              </a:r>
             </a:p>
           </p:txBody>
         </p:sp>
       </p:grpSp>
-      <p:sp>
-        <p:nvSpPr>
-          <p:cNvPr id="16" name="TextBox 15">
-            <a:extLst>
-              <a:ext uri="{FF2B5EF4-FFF2-40B4-BE49-F238E27FC236}">
-                <a16:creationId xmlns:a16="http://schemas.microsoft.com/office/drawing/2014/main" id="{87C05353-5EFD-4AF1-8269-41A090562BE0}"/>
-              </a:ext>
-            </a:extLst>
-          </p:cNvPr>
-          <p:cNvSpPr txBox="1"/>
-          <p:nvPr/>
-        </p:nvSpPr>
-        <p:spPr>
-          <a:xfrm>
-            <a:off x="6686230" y="3960302"/>
-            <a:ext cx="3514566" cy="461665"/>
-          </a:xfrm>
-          <a:prstGeom prst="rect">
-            <a:avLst/>
-          </a:prstGeom>
-          <a:noFill/>
-        </p:spPr>
-        <p:txBody>
-          <a:bodyPr wrap="square" rtlCol="0">
-            <a:spAutoFit/>
-          </a:bodyPr>
-          <a:lstStyle/>
-          <a:p>
-            <a:pPr algn="ctr"/>
-            <a:r>
-              <a:rPr lang="en-US" sz="2400" dirty="0">
-                <a:solidFill>
-                  <a:srgbClr val="C00000"/>
-                </a:solidFill>
-              </a:rPr>
-              <a:t>Gradients not reliable</a:t>
-            </a:r>
-          </a:p>
-        </p:txBody>
-      </p:sp>
     </p:spTree>
     <p:extLst>
       <p:ext uri="{BB962C8B-B14F-4D97-AF65-F5344CB8AC3E}">
@@ -3932,8 +3989,8 @@
           </a:p>
         </p:txBody>
       </p:sp>
-      <mc:AlternateContent xmlns:mc="http://schemas.openxmlformats.org/markup-compatibility/2006">
-        <mc:Choice xmlns:a14="http://schemas.microsoft.com/office/drawing/2010/main" Requires="a14">
+      <mc:AlternateContent xmlns:mc="http://schemas.openxmlformats.org/markup-compatibility/2006" xmlns:a14="http://schemas.microsoft.com/office/drawing/2010/main">
+        <mc:Choice Requires="a14">
           <p:sp>
             <p:nvSpPr>
               <p:cNvPr id="3" name="Content Placeholder 2">
@@ -4259,7 +4316,7 @@
             </p:txBody>
           </p:sp>
         </mc:Choice>
-        <mc:Fallback>
+        <mc:Fallback xmlns="">
           <p:sp>
             <p:nvSpPr>
               <p:cNvPr id="3" name="Content Placeholder 2">
@@ -8950,7 +9007,7 @@
         </p:blipFill>
         <p:spPr>
           <a:xfrm>
-            <a:off x="531271" y="3679310"/>
+            <a:off x="531271" y="3808908"/>
             <a:ext cx="3545216" cy="3029548"/>
           </a:xfrm>
           <a:prstGeom prst="rect">
@@ -8980,7 +9037,7 @@
         </p:blipFill>
         <p:spPr>
           <a:xfrm>
-            <a:off x="4476946" y="4021045"/>
+            <a:off x="4262394" y="3980178"/>
             <a:ext cx="7262490" cy="2605274"/>
           </a:xfrm>
           <a:prstGeom prst="rect">
@@ -9074,7 +9131,7 @@
             </a:pPr>
             <a:r>
               <a:rPr lang="en-US" sz="2400" dirty="0"/>
-              <a:t>Unconstrained perturbations are detectable.</a:t>
+              <a:t>Unconstrained perturbations are detectable. </a:t>
             </a:r>
           </a:p>
           <a:p>
@@ -9198,7 +9255,7 @@
         </p:blipFill>
         <p:spPr>
           <a:xfrm>
-            <a:off x="1434565" y="3728185"/>
+            <a:off x="7906882" y="1951330"/>
             <a:ext cx="3180713" cy="2647072"/>
           </a:xfrm>
           <a:prstGeom prst="rect">
@@ -9206,180 +9263,196 @@
           </a:prstGeom>
         </p:spPr>
       </p:pic>
-      <p:grpSp>
-        <p:nvGrpSpPr>
-          <p:cNvPr id="7" name="Group 6">
-            <a:extLst>
-              <a:ext uri="{FF2B5EF4-FFF2-40B4-BE49-F238E27FC236}">
-                <a16:creationId xmlns:a16="http://schemas.microsoft.com/office/drawing/2014/main" id="{1875FC23-12F1-42CF-9EF6-6632EF54D358}"/>
-              </a:ext>
-            </a:extLst>
-          </p:cNvPr>
-          <p:cNvGrpSpPr/>
-          <p:nvPr/>
-        </p:nvGrpSpPr>
-        <p:grpSpPr>
-          <a:xfrm>
-            <a:off x="6876384" y="3793033"/>
-            <a:ext cx="3238208" cy="2740584"/>
-            <a:chOff x="7060286" y="2189003"/>
-            <a:chExt cx="3238208" cy="2740584"/>
-          </a:xfrm>
-        </p:grpSpPr>
-        <p:pic>
-          <p:nvPicPr>
-            <p:cNvPr id="5" name="Picture 4">
-              <a:extLst>
-                <a:ext uri="{FF2B5EF4-FFF2-40B4-BE49-F238E27FC236}">
-                  <a16:creationId xmlns:a16="http://schemas.microsoft.com/office/drawing/2014/main" id="{652395C3-474F-4410-99A3-AFE8A050005C}"/>
-                </a:ext>
-              </a:extLst>
-            </p:cNvPr>
-            <p:cNvPicPr>
-              <a:picLocks noChangeAspect="1"/>
-            </p:cNvPicPr>
-            <p:nvPr/>
-          </p:nvPicPr>
-          <p:blipFill>
-            <a:blip r:embed="rId3"/>
-            <a:stretch>
-              <a:fillRect/>
-            </a:stretch>
-          </p:blipFill>
-          <p:spPr>
-            <a:xfrm>
-              <a:off x="7060286" y="2189003"/>
-              <a:ext cx="3069631" cy="2673914"/>
-            </a:xfrm>
-            <a:prstGeom prst="rect">
-              <a:avLst/>
-            </a:prstGeom>
-          </p:spPr>
-        </p:pic>
-        <p:sp>
-          <p:nvSpPr>
-            <p:cNvPr id="6" name="Rectangle 5">
-              <a:extLst>
-                <a:ext uri="{FF2B5EF4-FFF2-40B4-BE49-F238E27FC236}">
-                  <a16:creationId xmlns:a16="http://schemas.microsoft.com/office/drawing/2014/main" id="{FC2B6175-910D-495B-9858-6E999351BA38}"/>
-                </a:ext>
-              </a:extLst>
-            </p:cNvPr>
-            <p:cNvSpPr/>
-            <p:nvPr/>
-          </p:nvSpPr>
-          <p:spPr>
-            <a:xfrm>
-              <a:off x="9930691" y="4612867"/>
-              <a:ext cx="367803" cy="316720"/>
-            </a:xfrm>
-            <a:prstGeom prst="rect">
-              <a:avLst/>
-            </a:prstGeom>
-            <a:solidFill>
-              <a:schemeClr val="bg1"/>
-            </a:solidFill>
-            <a:ln>
-              <a:solidFill>
-                <a:schemeClr val="bg1"/>
-              </a:solidFill>
-            </a:ln>
-          </p:spPr>
-          <p:style>
-            <a:lnRef idx="2">
-              <a:schemeClr val="accent1">
-                <a:shade val="50000"/>
-              </a:schemeClr>
-            </a:lnRef>
-            <a:fillRef idx="1">
-              <a:schemeClr val="accent1"/>
-            </a:fillRef>
-            <a:effectRef idx="0">
-              <a:schemeClr val="accent1"/>
-            </a:effectRef>
-            <a:fontRef idx="minor">
-              <a:schemeClr val="lt1"/>
-            </a:fontRef>
-          </p:style>
-          <p:txBody>
-            <a:bodyPr rtlCol="0" anchor="ctr"/>
-            <a:lstStyle/>
-            <a:p>
-              <a:pPr algn="ctr"/>
-              <a:endParaRPr lang="en-US"/>
-            </a:p>
-          </p:txBody>
-        </p:sp>
-      </p:grpSp>
-      <p:sp>
-        <p:nvSpPr>
-          <p:cNvPr id="8" name="TextBox 7">
-            <a:extLst>
-              <a:ext uri="{FF2B5EF4-FFF2-40B4-BE49-F238E27FC236}">
-                <a16:creationId xmlns:a16="http://schemas.microsoft.com/office/drawing/2014/main" id="{AFB94E67-7B52-4177-A2EC-39F76C95223A}"/>
-              </a:ext>
-            </a:extLst>
-          </p:cNvPr>
-          <p:cNvSpPr txBox="1"/>
-          <p:nvPr/>
-        </p:nvSpPr>
-        <p:spPr>
-          <a:xfrm>
-            <a:off x="740715" y="1632118"/>
-            <a:ext cx="10413858" cy="1938992"/>
-          </a:xfrm>
-          <a:prstGeom prst="rect">
-            <a:avLst/>
-          </a:prstGeom>
-          <a:noFill/>
-        </p:spPr>
-        <p:txBody>
-          <a:bodyPr wrap="square" rtlCol="0">
-            <a:spAutoFit/>
-          </a:bodyPr>
-          <a:lstStyle/>
-          <a:p>
-            <a:pPr marL="285750" indent="-285750">
-              <a:buFont typeface="Arial" panose="020B0604020202020204" pitchFamily="34" charset="0"/>
-              <a:buChar char="•"/>
-            </a:pPr>
-            <a:r>
-              <a:rPr lang="en-US" sz="2400" dirty="0"/>
-              <a:t>Adversarial Graphs from surrogate model evaluated on GCN for both Evasion attacks and Poisoning attacks.</a:t>
-            </a:r>
-          </a:p>
-          <a:p>
-            <a:pPr marL="285750" indent="-285750">
-              <a:buFont typeface="Arial" panose="020B0604020202020204" pitchFamily="34" charset="0"/>
-              <a:buChar char="•"/>
-            </a:pPr>
-            <a:r>
-              <a:rPr lang="en-US" sz="2400" dirty="0"/>
-              <a:t>Surrogate model is a good approximator for true models. </a:t>
-            </a:r>
-          </a:p>
-          <a:p>
-            <a:pPr marL="285750" indent="-285750">
-              <a:buFont typeface="Arial" panose="020B0604020202020204" pitchFamily="34" charset="0"/>
-              <a:buChar char="•"/>
-            </a:pPr>
-            <a:r>
-              <a:rPr lang="en-US" sz="2400" dirty="0"/>
-              <a:t>Both Evasion and poisoning attacks are successful.  </a:t>
-            </a:r>
-          </a:p>
-          <a:p>
-            <a:pPr marL="285750" indent="-285750">
-              <a:buFont typeface="Arial" panose="020B0604020202020204" pitchFamily="34" charset="0"/>
-              <a:buChar char="•"/>
-            </a:pPr>
-            <a:r>
-              <a:rPr lang="en-US" sz="2400" dirty="0"/>
-              <a:t>Direct attacks much successful than gradient attacks </a:t>
-            </a:r>
-          </a:p>
-        </p:txBody>
-      </p:sp>
+      <mc:AlternateContent xmlns:mc="http://schemas.openxmlformats.org/markup-compatibility/2006" xmlns:a14="http://schemas.microsoft.com/office/drawing/2010/main">
+        <mc:Choice Requires="a14">
+          <p:sp>
+            <p:nvSpPr>
+              <p:cNvPr id="8" name="TextBox 7">
+                <a:extLst>
+                  <a:ext uri="{FF2B5EF4-FFF2-40B4-BE49-F238E27FC236}">
+                    <a16:creationId xmlns:a16="http://schemas.microsoft.com/office/drawing/2014/main" id="{AFB94E67-7B52-4177-A2EC-39F76C95223A}"/>
+                  </a:ext>
+                </a:extLst>
+              </p:cNvPr>
+              <p:cNvSpPr txBox="1"/>
+              <p:nvPr/>
+            </p:nvSpPr>
+            <p:spPr>
+              <a:xfrm>
+                <a:off x="740715" y="1632118"/>
+                <a:ext cx="7080215" cy="4009752"/>
+              </a:xfrm>
+              <a:prstGeom prst="rect">
+                <a:avLst/>
+              </a:prstGeom>
+              <a:noFill/>
+            </p:spPr>
+            <p:txBody>
+              <a:bodyPr wrap="square" rtlCol="0">
+                <a:spAutoFit/>
+              </a:bodyPr>
+              <a:lstStyle/>
+              <a:p>
+                <a:pPr marL="285750" indent="-285750">
+                  <a:buFont typeface="Arial" panose="020B0604020202020204" pitchFamily="34" charset="0"/>
+                  <a:buChar char="•"/>
+                </a:pPr>
+                <a:r>
+                  <a:rPr lang="en-US" sz="2800" dirty="0"/>
+                  <a:t>Adversarial Graphs from surrogate model evaluated on GCN for both Evasion attacks and Poisoning attacks (</a:t>
+                </a:r>
+                <a14:m>
+                  <m:oMath xmlns:m="http://schemas.openxmlformats.org/officeDocument/2006/math">
+                    <m:r>
+                      <m:rPr>
+                        <m:sty m:val="p"/>
+                      </m:rPr>
+                      <a:rPr lang="en-US" sz="2800">
+                        <a:latin typeface="Cambria Math" panose="02040503050406030204" pitchFamily="18" charset="0"/>
+                      </a:rPr>
+                      <m:t>Δ</m:t>
+                    </m:r>
+                    <m:r>
+                      <a:rPr lang="en-US" sz="2800" i="1">
+                        <a:latin typeface="Cambria Math" panose="02040503050406030204" pitchFamily="18" charset="0"/>
+                      </a:rPr>
+                      <m:t>=</m:t>
+                    </m:r>
+                    <m:sSub>
+                      <m:sSubPr>
+                        <m:ctrlPr>
+                          <a:rPr lang="en-US" sz="2800" i="1">
+                            <a:latin typeface="Cambria Math" panose="02040503050406030204" pitchFamily="18" charset="0"/>
+                          </a:rPr>
+                        </m:ctrlPr>
+                      </m:sSubPr>
+                      <m:e>
+                        <m:r>
+                          <a:rPr lang="en-US" sz="2800" i="1">
+                            <a:latin typeface="Cambria Math" panose="02040503050406030204" pitchFamily="18" charset="0"/>
+                          </a:rPr>
+                          <m:t>𝑑</m:t>
+                        </m:r>
+                      </m:e>
+                      <m:sub>
+                        <m:sSub>
+                          <m:sSubPr>
+                            <m:ctrlPr>
+                              <a:rPr lang="en-US" sz="2800" i="1">
+                                <a:latin typeface="Cambria Math" panose="02040503050406030204" pitchFamily="18" charset="0"/>
+                              </a:rPr>
+                            </m:ctrlPr>
+                          </m:sSubPr>
+                          <m:e>
+                            <m:r>
+                              <a:rPr lang="en-US" sz="2800" i="1">
+                                <a:latin typeface="Cambria Math" panose="02040503050406030204" pitchFamily="18" charset="0"/>
+                              </a:rPr>
+                              <m:t>𝑣</m:t>
+                            </m:r>
+                          </m:e>
+                          <m:sub>
+                            <m:r>
+                              <a:rPr lang="en-US" sz="2800" i="1">
+                                <a:latin typeface="Cambria Math" panose="02040503050406030204" pitchFamily="18" charset="0"/>
+                              </a:rPr>
+                              <m:t>0</m:t>
+                            </m:r>
+                          </m:sub>
+                        </m:sSub>
+                      </m:sub>
+                    </m:sSub>
+                    <m:r>
+                      <a:rPr lang="en-US" sz="2800" i="1">
+                        <a:latin typeface="Cambria Math" panose="02040503050406030204" pitchFamily="18" charset="0"/>
+                      </a:rPr>
+                      <m:t>+2</m:t>
+                    </m:r>
+                  </m:oMath>
+                </a14:m>
+                <a:r>
+                  <a:rPr lang="en-US" sz="2800" dirty="0"/>
+                  <a:t>).</a:t>
+                </a:r>
+              </a:p>
+              <a:p>
+                <a:pPr marL="285750" indent="-285750">
+                  <a:buFont typeface="Arial" panose="020B0604020202020204" pitchFamily="34" charset="0"/>
+                  <a:buChar char="•"/>
+                </a:pPr>
+                <a:r>
+                  <a:rPr lang="en-US" sz="2800" dirty="0"/>
+                  <a:t>Surrogate model is a good approximator for true models. </a:t>
+                </a:r>
+              </a:p>
+              <a:p>
+                <a:pPr marL="285750" indent="-285750">
+                  <a:buFont typeface="Arial" panose="020B0604020202020204" pitchFamily="34" charset="0"/>
+                  <a:buChar char="•"/>
+                </a:pPr>
+                <a:r>
+                  <a:rPr lang="en-US" sz="2800" dirty="0"/>
+                  <a:t>Both Evasion and poisoning attacks are successful.  </a:t>
+                </a:r>
+              </a:p>
+              <a:p>
+                <a:pPr marL="285750" indent="-285750">
+                  <a:buFont typeface="Arial" panose="020B0604020202020204" pitchFamily="34" charset="0"/>
+                  <a:buChar char="•"/>
+                </a:pPr>
+                <a:r>
+                  <a:rPr lang="en-US" sz="2800" dirty="0"/>
+                  <a:t>Direct attacks much successful than gradient attacks </a:t>
+                </a:r>
+              </a:p>
+            </p:txBody>
+          </p:sp>
+        </mc:Choice>
+        <mc:Fallback xmlns="">
+          <p:sp>
+            <p:nvSpPr>
+              <p:cNvPr id="8" name="TextBox 7">
+                <a:extLst>
+                  <a:ext uri="{FF2B5EF4-FFF2-40B4-BE49-F238E27FC236}">
+                    <a16:creationId xmlns:a16="http://schemas.microsoft.com/office/drawing/2014/main" id="{AFB94E67-7B52-4177-A2EC-39F76C95223A}"/>
+                  </a:ext>
+                </a:extLst>
+              </p:cNvPr>
+              <p:cNvSpPr txBox="1">
+                <a:spLocks noRot="1" noChangeAspect="1" noMove="1" noResize="1" noEditPoints="1" noAdjustHandles="1" noChangeArrowheads="1" noChangeShapeType="1" noTextEdit="1"/>
+              </p:cNvSpPr>
+              <p:nvPr/>
+            </p:nvSpPr>
+            <p:spPr>
+              <a:xfrm>
+                <a:off x="740715" y="1632118"/>
+                <a:ext cx="7080215" cy="4009752"/>
+              </a:xfrm>
+              <a:prstGeom prst="rect">
+                <a:avLst/>
+              </a:prstGeom>
+              <a:blipFill>
+                <a:blip r:embed="rId3"/>
+                <a:stretch>
+                  <a:fillRect l="-1550" t="-1520" r="-172" b="-3343"/>
+                </a:stretch>
+              </a:blipFill>
+            </p:spPr>
+            <p:txBody>
+              <a:bodyPr/>
+              <a:lstStyle/>
+              <a:p>
+                <a:r>
+                  <a:rPr lang="en-US">
+                    <a:noFill/>
+                  </a:rPr>
+                  <a:t> </a:t>
+                </a:r>
+              </a:p>
+            </p:txBody>
+          </p:sp>
+        </mc:Fallback>
+      </mc:AlternateContent>
     </p:spTree>
     <p:extLst>
       <p:ext uri="{BB962C8B-B14F-4D97-AF65-F5344CB8AC3E}">
@@ -9465,7 +9538,7 @@
         </p:blipFill>
         <p:spPr>
           <a:xfrm>
-            <a:off x="2859269" y="3949806"/>
+            <a:off x="2849053" y="3957768"/>
             <a:ext cx="6340923" cy="2386990"/>
           </a:xfrm>
           <a:prstGeom prst="rect">
@@ -9488,7 +9561,7 @@
         <p:spPr>
           <a:xfrm>
             <a:off x="950158" y="1604032"/>
-            <a:ext cx="9757006" cy="2246769"/>
+            <a:ext cx="9757006" cy="2308324"/>
           </a:xfrm>
           <a:prstGeom prst="rect">
             <a:avLst/>
@@ -9506,7 +9579,7 @@
               <a:buChar char="•"/>
             </a:pPr>
             <a:r>
-              <a:rPr lang="en-US" sz="2000" dirty="0"/>
+              <a:rPr lang="en-US" sz="2400" dirty="0"/>
               <a:t>Assume that attacker does not know the complete graph but only a subset of the graph. </a:t>
             </a:r>
           </a:p>
@@ -9515,7 +9588,10 @@
               <a:buFont typeface="Arial" panose="020B0604020202020204" pitchFamily="34" charset="0"/>
               <a:buChar char="•"/>
             </a:pPr>
-            <a:endParaRPr lang="en-US" sz="2000" dirty="0"/>
+            <a:r>
+              <a:rPr lang="en-US" sz="2400" dirty="0"/>
+              <a:t>Used subgraphs of increasing size from the target node (1-hop, 2 hop etc.) to generate the adversarial subgraphs. </a:t>
+            </a:r>
           </a:p>
           <a:p>
             <a:pPr marL="285750" indent="-285750">
@@ -9523,24 +9599,7 @@
               <a:buChar char="•"/>
             </a:pPr>
             <a:r>
-              <a:rPr lang="en-US" sz="2000" dirty="0"/>
-              <a:t>Used subgraphs of increasing size from the target node (1-hop, 2 hop etc.) to generate the adversarial subgraphs. </a:t>
-            </a:r>
-          </a:p>
-          <a:p>
-            <a:pPr marL="285750" indent="-285750">
-              <a:buFont typeface="Arial" panose="020B0604020202020204" pitchFamily="34" charset="0"/>
-              <a:buChar char="•"/>
-            </a:pPr>
-            <a:endParaRPr lang="en-US" sz="2000" dirty="0"/>
-          </a:p>
-          <a:p>
-            <a:pPr marL="285750" indent="-285750">
-              <a:buFont typeface="Arial" panose="020B0604020202020204" pitchFamily="34" charset="0"/>
-              <a:buChar char="•"/>
-            </a:pPr>
-            <a:r>
-              <a:rPr lang="en-US" sz="2000" dirty="0"/>
+              <a:rPr lang="en-US" sz="2400" dirty="0"/>
               <a:t>Direct attack successful for even 10% of the graph access, with expense of slightly more perturbations. </a:t>
             </a:r>
           </a:p>
